--- a/01_交付物/菲律宾450M方案_v8_样张.pptx
+++ b/01_交付物/菲律宾450M方案_v8_样张.pptx
@@ -5888,7 +5888,7 @@
         </p:nvSpPr>
         <p:spPr>
           <a:xfrm>
-            <a:off x="609600" y="279400"/>
+            <a:off x="609600" y="304800"/>
             <a:ext cx="7620000" cy="177800"/>
           </a:xfrm>
           <a:prstGeom prst="rect">
@@ -5904,20 +5904,20 @@
           <a:p>
             <a:pPr algn="l">
               <a:lnSpc>
-                <a:spcPct val="125000"/>
+                <a:spcPct val="120000"/>
               </a:lnSpc>
               <a:spcAft>
-                <a:spcPts val="300"/>
+                <a:spcPts val="0"/>
               </a:spcAft>
             </a:pPr>
             <a:r>
-              <a:rPr sz="950" b="1">
+              <a:rPr sz="900" b="0" spc="120">
                 <a:solidFill>
                   <a:srgbClr val="7F9B00"/>
                 </a:solidFill>
-                <a:latin typeface="Arial"/>
+                <a:latin typeface="Segoe UI Semibold"/>
               </a:rPr>
-              <a:t>A  ·  THE ANSWER</a:t>
+              <a:t>A   THE ANSWER</a:t>
             </a:r>
           </a:p>
         </p:txBody>
@@ -5930,8 +5930,8 @@
         </p:nvSpPr>
         <p:spPr>
           <a:xfrm>
-            <a:off x="9550400" y="342900"/>
-            <a:ext cx="330200" cy="50800"/>
+            <a:off x="9677400" y="368300"/>
+            <a:ext cx="304800" cy="38100"/>
           </a:xfrm>
           <a:prstGeom prst="rect">
             <a:avLst/>
@@ -5974,8 +5974,8 @@
         </p:nvSpPr>
         <p:spPr>
           <a:xfrm>
-            <a:off x="9931400" y="342900"/>
-            <a:ext cx="330200" cy="50800"/>
+            <a:off x="10033000" y="368300"/>
+            <a:ext cx="304800" cy="38100"/>
           </a:xfrm>
           <a:prstGeom prst="rect">
             <a:avLst/>
@@ -6018,8 +6018,8 @@
         </p:nvSpPr>
         <p:spPr>
           <a:xfrm>
-            <a:off x="10312400" y="342900"/>
-            <a:ext cx="330200" cy="50800"/>
+            <a:off x="10388600" y="368300"/>
+            <a:ext cx="304800" cy="38100"/>
           </a:xfrm>
           <a:prstGeom prst="rect">
             <a:avLst/>
@@ -6062,8 +6062,8 @@
         </p:nvSpPr>
         <p:spPr>
           <a:xfrm>
-            <a:off x="10693400" y="342900"/>
-            <a:ext cx="330200" cy="50800"/>
+            <a:off x="10744200" y="368300"/>
+            <a:ext cx="304800" cy="38100"/>
           </a:xfrm>
           <a:prstGeom prst="rect">
             <a:avLst/>
@@ -6106,8 +6106,8 @@
         </p:nvSpPr>
         <p:spPr>
           <a:xfrm>
-            <a:off x="11125200" y="228600"/>
-            <a:ext cx="457200" cy="228600"/>
+            <a:off x="11201400" y="266700"/>
+            <a:ext cx="381000" cy="203200"/>
           </a:xfrm>
           <a:prstGeom prst="rect">
             <a:avLst/>
@@ -6122,81 +6122,275 @@
           <a:p>
             <a:pPr algn="r">
               <a:lnSpc>
-                <a:spcPct val="125000"/>
-              </a:lnSpc>
-              <a:spcAft>
-                <a:spcPts val="300"/>
-              </a:spcAft>
-            </a:pPr>
-            <a:r>
-              <a:rPr sz="1200" b="1">
-                <a:solidFill>
-                  <a:srgbClr val="0B308E"/>
-                </a:solidFill>
-                <a:latin typeface="Arial"/>
-              </a:rPr>
-              <a:t>02</a:t>
-            </a:r>
-          </a:p>
-        </p:txBody>
-      </p:sp>
-      <p:sp>
-        <p:nvSpPr>
-          <p:cNvPr id="9" name="TextBox 8"/>
-          <p:cNvSpPr txBox="1"/>
-          <p:nvPr/>
-        </p:nvSpPr>
-        <p:spPr>
-          <a:xfrm>
-            <a:off x="609600" y="508000"/>
-            <a:ext cx="10972800" cy="762000"/>
-          </a:xfrm>
-          <a:prstGeom prst="rect">
-            <a:avLst/>
-          </a:prstGeom>
-          <a:noFill/>
-        </p:spPr>
-        <p:txBody>
-          <a:bodyPr wrap="square" lIns="0" rIns="0" tIns="0" bIns="0" anchor="b">
-            <a:spAutoFit/>
-          </a:bodyPr>
-          <a:lstStyle/>
-          <a:p>
-            <a:pPr algn="l">
-              <a:lnSpc>
-                <a:spcPct val="108000"/>
+                <a:spcPct val="120000"/>
               </a:lnSpc>
               <a:spcAft>
                 <a:spcPts val="0"/>
               </a:spcAft>
             </a:pPr>
             <a:r>
-              <a:rPr sz="2200" b="1">
+              <a:rPr sz="1100" b="0">
                 <a:solidFill>
                   <a:srgbClr val="0B308E"/>
                 </a:solidFill>
-                <a:latin typeface="Arial"/>
+                <a:latin typeface="Segoe UI Semibold"/>
               </a:rPr>
-              <a:t>450 MHz does one job well: coverage that is still there after the storm</a:t>
+              <a:t>02</a:t>
+            </a:r>
+          </a:p>
+        </p:txBody>
+      </p:sp>
+      <p:sp>
+        <p:nvSpPr>
+          <p:cNvPr id="9" name="TextBox 8"/>
+          <p:cNvSpPr txBox="1"/>
+          <p:nvPr/>
+        </p:nvSpPr>
+        <p:spPr>
+          <a:xfrm>
+            <a:off x="609600" y="508000"/>
+            <a:ext cx="10972800" cy="889000"/>
+          </a:xfrm>
+          <a:prstGeom prst="rect">
+            <a:avLst/>
+          </a:prstGeom>
+          <a:noFill/>
+        </p:spPr>
+        <p:txBody>
+          <a:bodyPr wrap="square" lIns="0" rIns="0" tIns="0" bIns="0" anchor="ctr">
+            <a:spAutoFit/>
+          </a:bodyPr>
+          <a:lstStyle/>
+          <a:p>
+            <a:pPr algn="l">
+              <a:lnSpc>
+                <a:spcPct val="105000"/>
+              </a:lnSpc>
+              <a:spcAft>
+                <a:spcPts val="0"/>
+              </a:spcAft>
+            </a:pPr>
+            <a:r>
+              <a:rPr sz="2200" b="0">
+                <a:solidFill>
+                  <a:srgbClr val="0B308E"/>
+                </a:solidFill>
+                <a:latin typeface="Segoe UI Semibold"/>
+              </a:rPr>
+              <a:t>450 MHz: the coverage that stays up after the storm</a:t>
+            </a:r>
+          </a:p>
+        </p:txBody>
+      </p:sp>
+      <p:sp>
+        <p:nvSpPr>
+          <p:cNvPr id="10" name="Oval 9"/>
+          <p:cNvSpPr/>
+          <p:nvPr/>
+        </p:nvSpPr>
+        <p:spPr>
+          <a:xfrm>
+            <a:off x="609600" y="1625600"/>
+            <a:ext cx="685800" cy="685800"/>
+          </a:xfrm>
+          <a:prstGeom prst="ellipse">
+            <a:avLst/>
+          </a:prstGeom>
+          <a:solidFill>
+            <a:srgbClr val="0B308E"/>
+          </a:solidFill>
+          <a:ln>
+            <a:noFill/>
+          </a:ln>
+          <a:effectLst/>
+        </p:spPr>
+        <p:style>
+          <a:lnRef idx="1">
+            <a:schemeClr val="accent1"/>
+          </a:lnRef>
+          <a:fillRef idx="3">
+            <a:schemeClr val="accent1"/>
+          </a:fillRef>
+          <a:effectRef idx="2">
+            <a:schemeClr val="accent1"/>
+          </a:effectRef>
+          <a:fontRef idx="minor">
+            <a:schemeClr val="lt1"/>
+          </a:fontRef>
+        </p:style>
+        <p:txBody>
+          <a:bodyPr rtlCol="0" anchor="ctr" wrap="square"/>
+          <a:lstStyle/>
+          <a:p>
+            <a:pPr algn="ctr"/>
+          </a:p>
+        </p:txBody>
+      </p:sp>
+      <p:pic>
+        <p:nvPicPr>
+          <p:cNvPr id="11" name="Picture 10" descr="layers_white.png"/>
+          <p:cNvPicPr>
+            <a:picLocks noChangeAspect="1"/>
+          </p:cNvPicPr>
+          <p:nvPr/>
+        </p:nvPicPr>
+        <p:blipFill>
+          <a:blip r:embed="rId2"/>
+          <a:stretch>
+            <a:fillRect/>
+          </a:stretch>
+        </p:blipFill>
+        <p:spPr>
+          <a:xfrm>
+            <a:off x="774192" y="1790192"/>
+            <a:ext cx="356616" cy="356616"/>
+          </a:xfrm>
+          <a:prstGeom prst="rect">
+            <a:avLst/>
+          </a:prstGeom>
+        </p:spPr>
+      </p:pic>
+      <p:sp>
+        <p:nvSpPr>
+          <p:cNvPr id="12" name="TextBox 11"/>
+          <p:cNvSpPr txBox="1"/>
+          <p:nvPr/>
+        </p:nvSpPr>
+        <p:spPr>
+          <a:xfrm>
+            <a:off x="1549400" y="1600200"/>
+            <a:ext cx="3810000" cy="177800"/>
+          </a:xfrm>
+          <a:prstGeom prst="rect">
+            <a:avLst/>
+          </a:prstGeom>
+          <a:noFill/>
+        </p:spPr>
+        <p:txBody>
+          <a:bodyPr wrap="square" lIns="0" rIns="0" tIns="0" bIns="0" anchor="t">
+            <a:spAutoFit/>
+          </a:bodyPr>
+          <a:lstStyle/>
+          <a:p>
+            <a:pPr algn="l">
+              <a:lnSpc>
+                <a:spcPct val="120000"/>
+              </a:lnSpc>
+              <a:spcAft>
+                <a:spcPts val="0"/>
+              </a:spcAft>
+            </a:pPr>
+            <a:r>
+              <a:rPr sz="900" b="0" spc="120">
+                <a:solidFill>
+                  <a:srgbClr val="7F9B00"/>
+                </a:solidFill>
+                <a:latin typeface="Segoe UI Semibold"/>
+              </a:rPr>
+              <a:t>WHAT IT IS</a:t>
+            </a:r>
+          </a:p>
+        </p:txBody>
+      </p:sp>
+      <p:sp>
+        <p:nvSpPr>
+          <p:cNvPr id="13" name="TextBox 12"/>
+          <p:cNvSpPr txBox="1"/>
+          <p:nvPr/>
+        </p:nvSpPr>
+        <p:spPr>
+          <a:xfrm>
+            <a:off x="1549400" y="1803400"/>
+            <a:ext cx="4318000" cy="330200"/>
+          </a:xfrm>
+          <a:prstGeom prst="rect">
+            <a:avLst/>
+          </a:prstGeom>
+          <a:noFill/>
+        </p:spPr>
+        <p:txBody>
+          <a:bodyPr wrap="square" lIns="0" rIns="0" tIns="0" bIns="0" anchor="t">
+            <a:spAutoFit/>
+          </a:bodyPr>
+          <a:lstStyle/>
+          <a:p>
+            <a:pPr algn="l">
+              <a:lnSpc>
+                <a:spcPct val="120000"/>
+              </a:lnSpc>
+              <a:spcAft>
+                <a:spcPts val="0"/>
+              </a:spcAft>
+            </a:pPr>
+            <a:r>
+              <a:rPr sz="1900" b="0">
+                <a:solidFill>
+                  <a:srgbClr val="0B308E"/>
+                </a:solidFill>
+                <a:latin typeface="Segoe UI Semibold"/>
+              </a:rPr>
+              <a:t>A resilience layer</a:t>
+            </a:r>
+          </a:p>
+        </p:txBody>
+      </p:sp>
+      <p:sp>
+        <p:nvSpPr>
+          <p:cNvPr id="14" name="TextBox 13"/>
+          <p:cNvSpPr txBox="1"/>
+          <p:nvPr/>
+        </p:nvSpPr>
+        <p:spPr>
+          <a:xfrm>
+            <a:off x="1549400" y="2159000"/>
+            <a:ext cx="4572000" cy="254000"/>
+          </a:xfrm>
+          <a:prstGeom prst="rect">
+            <a:avLst/>
+          </a:prstGeom>
+          <a:noFill/>
+        </p:spPr>
+        <p:txBody>
+          <a:bodyPr wrap="square" lIns="0" rIns="0" tIns="0" bIns="0" anchor="t">
+            <a:spAutoFit/>
+          </a:bodyPr>
+          <a:lstStyle/>
+          <a:p>
+            <a:pPr algn="l">
+              <a:lnSpc>
+                <a:spcPct val="120000"/>
+              </a:lnSpc>
+              <a:spcAft>
+                <a:spcPts val="0"/>
+              </a:spcAft>
+            </a:pPr>
+            <a:r>
+              <a:rPr sz="1300" b="0">
+                <a:solidFill>
+                  <a:srgbClr val="55607A"/>
+                </a:solidFill>
+                <a:latin typeface="Segoe UI"/>
+              </a:rPr>
+              <a:t>Alongside 4G and 5G</a:t>
             </a:r>
           </a:p>
         </p:txBody>
       </p:sp>
       <p:cxnSp>
         <p:nvCxnSpPr>
-          <p:cNvPr id="10" name="Connector 9"/>
+          <p:cNvPr id="15" name="Connector 14"/>
           <p:cNvCxnSpPr/>
           <p:nvPr/>
         </p:nvCxnSpPr>
         <p:spPr>
           <a:xfrm>
-            <a:off x="609600" y="1371600"/>
-            <a:ext cx="10972800" cy="0"/>
+            <a:off x="1549400" y="2514600"/>
+            <a:ext cx="4419600" cy="0"/>
           </a:xfrm>
           <a:prstGeom prst="line">
             <a:avLst/>
           </a:prstGeom>
-          <a:ln w="12700">
+          <a:ln w="9525">
             <a:solidFill>
               <a:srgbClr val="D6E0F0"/>
             </a:solidFill>
@@ -6219,16 +6413,712 @@
       </p:cxnSp>
       <p:sp>
         <p:nvSpPr>
-          <p:cNvPr id="11" name="Rectangle 10"/>
+          <p:cNvPr id="16" name="Oval 15"/>
           <p:cNvSpPr/>
           <p:nvPr/>
         </p:nvSpPr>
         <p:spPr>
           <a:xfrm>
-            <a:off x="609600" y="1574800"/>
-            <a:ext cx="5410200" cy="1930400"/>
+            <a:off x="609600" y="2667000"/>
+            <a:ext cx="685800" cy="685800"/>
+          </a:xfrm>
+          <a:prstGeom prst="ellipse">
+            <a:avLst/>
+          </a:prstGeom>
+          <a:solidFill>
+            <a:srgbClr val="0B308E"/>
+          </a:solidFill>
+          <a:ln>
+            <a:noFill/>
+          </a:ln>
+          <a:effectLst/>
+        </p:spPr>
+        <p:style>
+          <a:lnRef idx="1">
+            <a:schemeClr val="accent1"/>
+          </a:lnRef>
+          <a:fillRef idx="3">
+            <a:schemeClr val="accent1"/>
+          </a:fillRef>
+          <a:effectRef idx="2">
+            <a:schemeClr val="accent1"/>
+          </a:effectRef>
+          <a:fontRef idx="minor">
+            <a:schemeClr val="lt1"/>
+          </a:fontRef>
+        </p:style>
+        <p:txBody>
+          <a:bodyPr rtlCol="0" anchor="ctr" wrap="square"/>
+          <a:lstStyle/>
+          <a:p>
+            <a:pPr algn="ctr"/>
+          </a:p>
+        </p:txBody>
+      </p:sp>
+      <p:pic>
+        <p:nvPicPr>
+          <p:cNvPr id="17" name="Picture 16" descr="globe_white.png"/>
+          <p:cNvPicPr>
+            <a:picLocks noChangeAspect="1"/>
+          </p:cNvPicPr>
+          <p:nvPr/>
+        </p:nvPicPr>
+        <p:blipFill>
+          <a:blip r:embed="rId3"/>
+          <a:stretch>
+            <a:fillRect/>
+          </a:stretch>
+        </p:blipFill>
+        <p:spPr>
+          <a:xfrm>
+            <a:off x="774192" y="2831592"/>
+            <a:ext cx="356616" cy="356616"/>
           </a:xfrm>
           <a:prstGeom prst="rect">
+            <a:avLst/>
+          </a:prstGeom>
+        </p:spPr>
+      </p:pic>
+      <p:sp>
+        <p:nvSpPr>
+          <p:cNvPr id="18" name="TextBox 17"/>
+          <p:cNvSpPr txBox="1"/>
+          <p:nvPr/>
+        </p:nvSpPr>
+        <p:spPr>
+          <a:xfrm>
+            <a:off x="1549400" y="2641600"/>
+            <a:ext cx="3810000" cy="177800"/>
+          </a:xfrm>
+          <a:prstGeom prst="rect">
+            <a:avLst/>
+          </a:prstGeom>
+          <a:noFill/>
+        </p:spPr>
+        <p:txBody>
+          <a:bodyPr wrap="square" lIns="0" rIns="0" tIns="0" bIns="0" anchor="t">
+            <a:spAutoFit/>
+          </a:bodyPr>
+          <a:lstStyle/>
+          <a:p>
+            <a:pPr algn="l">
+              <a:lnSpc>
+                <a:spcPct val="120000"/>
+              </a:lnSpc>
+              <a:spcAft>
+                <a:spcPts val="0"/>
+              </a:spcAft>
+            </a:pPr>
+            <a:r>
+              <a:rPr sz="900" b="0" spc="120">
+                <a:solidFill>
+                  <a:srgbClr val="7F9B00"/>
+                </a:solidFill>
+                <a:latin typeface="Segoe UI Semibold"/>
+              </a:rPr>
+              <a:t>WHY NOW</a:t>
+            </a:r>
+          </a:p>
+        </p:txBody>
+      </p:sp>
+      <p:sp>
+        <p:nvSpPr>
+          <p:cNvPr id="19" name="TextBox 18"/>
+          <p:cNvSpPr txBox="1"/>
+          <p:nvPr/>
+        </p:nvSpPr>
+        <p:spPr>
+          <a:xfrm>
+            <a:off x="1549400" y="2844800"/>
+            <a:ext cx="4318000" cy="330200"/>
+          </a:xfrm>
+          <a:prstGeom prst="rect">
+            <a:avLst/>
+          </a:prstGeom>
+          <a:noFill/>
+        </p:spPr>
+        <p:txBody>
+          <a:bodyPr wrap="square" lIns="0" rIns="0" tIns="0" bIns="0" anchor="t">
+            <a:spAutoFit/>
+          </a:bodyPr>
+          <a:lstStyle/>
+          <a:p>
+            <a:pPr algn="l">
+              <a:lnSpc>
+                <a:spcPct val="120000"/>
+              </a:lnSpc>
+              <a:spcAft>
+                <a:spcPts val="0"/>
+              </a:spcAft>
+            </a:pPr>
+            <a:r>
+              <a:rPr sz="1900" b="0">
+                <a:solidFill>
+                  <a:srgbClr val="0B308E"/>
+                </a:solidFill>
+                <a:latin typeface="Segoe UI Semibold"/>
+              </a:rPr>
+              <a:t>A mainstream band</a:t>
+            </a:r>
+          </a:p>
+        </p:txBody>
+      </p:sp>
+      <p:sp>
+        <p:nvSpPr>
+          <p:cNvPr id="20" name="TextBox 19"/>
+          <p:cNvSpPr txBox="1"/>
+          <p:nvPr/>
+        </p:nvSpPr>
+        <p:spPr>
+          <a:xfrm>
+            <a:off x="1549400" y="3200400"/>
+            <a:ext cx="4572000" cy="254000"/>
+          </a:xfrm>
+          <a:prstGeom prst="rect">
+            <a:avLst/>
+          </a:prstGeom>
+          <a:noFill/>
+        </p:spPr>
+        <p:txBody>
+          <a:bodyPr wrap="square" lIns="0" rIns="0" tIns="0" bIns="0" anchor="t">
+            <a:spAutoFit/>
+          </a:bodyPr>
+          <a:lstStyle/>
+          <a:p>
+            <a:pPr algn="l">
+              <a:lnSpc>
+                <a:spcPct val="120000"/>
+              </a:lnSpc>
+              <a:spcAft>
+                <a:spcPts val="0"/>
+              </a:spcAft>
+            </a:pPr>
+            <a:r>
+              <a:rPr sz="1300" b="0">
+                <a:solidFill>
+                  <a:srgbClr val="55607A"/>
+                </a:solidFill>
+                <a:latin typeface="Segoe UI"/>
+              </a:rPr>
+              <a:t>77 countries deployed  ·  39 on LTE</a:t>
+            </a:r>
+          </a:p>
+        </p:txBody>
+      </p:sp>
+      <p:cxnSp>
+        <p:nvCxnSpPr>
+          <p:cNvPr id="21" name="Connector 20"/>
+          <p:cNvCxnSpPr/>
+          <p:nvPr/>
+        </p:nvCxnSpPr>
+        <p:spPr>
+          <a:xfrm>
+            <a:off x="1549400" y="3556000"/>
+            <a:ext cx="4419600" cy="0"/>
+          </a:xfrm>
+          <a:prstGeom prst="line">
+            <a:avLst/>
+          </a:prstGeom>
+          <a:ln w="9525">
+            <a:solidFill>
+              <a:srgbClr val="D6E0F0"/>
+            </a:solidFill>
+          </a:ln>
+        </p:spPr>
+        <p:style>
+          <a:lnRef idx="2">
+            <a:schemeClr val="accent1"/>
+          </a:lnRef>
+          <a:fillRef idx="0">
+            <a:schemeClr val="accent1"/>
+          </a:fillRef>
+          <a:effectRef idx="1">
+            <a:schemeClr val="accent1"/>
+          </a:effectRef>
+          <a:fontRef idx="minor">
+            <a:schemeClr val="tx1"/>
+          </a:fontRef>
+        </p:style>
+      </p:cxnSp>
+      <p:sp>
+        <p:nvSpPr>
+          <p:cNvPr id="22" name="Oval 21"/>
+          <p:cNvSpPr/>
+          <p:nvPr/>
+        </p:nvSpPr>
+        <p:spPr>
+          <a:xfrm>
+            <a:off x="609600" y="3708400"/>
+            <a:ext cx="685800" cy="685800"/>
+          </a:xfrm>
+          <a:prstGeom prst="ellipse">
+            <a:avLst/>
+          </a:prstGeom>
+          <a:solidFill>
+            <a:srgbClr val="0B308E"/>
+          </a:solidFill>
+          <a:ln>
+            <a:noFill/>
+          </a:ln>
+          <a:effectLst/>
+        </p:spPr>
+        <p:style>
+          <a:lnRef idx="1">
+            <a:schemeClr val="accent1"/>
+          </a:lnRef>
+          <a:fillRef idx="3">
+            <a:schemeClr val="accent1"/>
+          </a:fillRef>
+          <a:effectRef idx="2">
+            <a:schemeClr val="accent1"/>
+          </a:effectRef>
+          <a:fontRef idx="minor">
+            <a:schemeClr val="lt1"/>
+          </a:fontRef>
+        </p:style>
+        <p:txBody>
+          <a:bodyPr rtlCol="0" anchor="ctr" wrap="square"/>
+          <a:lstStyle/>
+          <a:p>
+            <a:pPr algn="ctr"/>
+          </a:p>
+        </p:txBody>
+      </p:sp>
+      <p:pic>
+        <p:nvPicPr>
+          <p:cNvPr id="23" name="Picture 22" descr="hand-coins_white.png"/>
+          <p:cNvPicPr>
+            <a:picLocks noChangeAspect="1"/>
+          </p:cNvPicPr>
+          <p:nvPr/>
+        </p:nvPicPr>
+        <p:blipFill>
+          <a:blip r:embed="rId4"/>
+          <a:stretch>
+            <a:fillRect/>
+          </a:stretch>
+        </p:blipFill>
+        <p:spPr>
+          <a:xfrm>
+            <a:off x="774192" y="3872991"/>
+            <a:ext cx="356616" cy="356616"/>
+          </a:xfrm>
+          <a:prstGeom prst="rect">
+            <a:avLst/>
+          </a:prstGeom>
+        </p:spPr>
+      </p:pic>
+      <p:sp>
+        <p:nvSpPr>
+          <p:cNvPr id="24" name="TextBox 23"/>
+          <p:cNvSpPr txBox="1"/>
+          <p:nvPr/>
+        </p:nvSpPr>
+        <p:spPr>
+          <a:xfrm>
+            <a:off x="1549400" y="3683000"/>
+            <a:ext cx="3810000" cy="177800"/>
+          </a:xfrm>
+          <a:prstGeom prst="rect">
+            <a:avLst/>
+          </a:prstGeom>
+          <a:noFill/>
+        </p:spPr>
+        <p:txBody>
+          <a:bodyPr wrap="square" lIns="0" rIns="0" tIns="0" bIns="0" anchor="t">
+            <a:spAutoFit/>
+          </a:bodyPr>
+          <a:lstStyle/>
+          <a:p>
+            <a:pPr algn="l">
+              <a:lnSpc>
+                <a:spcPct val="120000"/>
+              </a:lnSpc>
+              <a:spcAft>
+                <a:spcPts val="0"/>
+              </a:spcAft>
+            </a:pPr>
+            <a:r>
+              <a:rPr sz="900" b="0" spc="120">
+                <a:solidFill>
+                  <a:srgbClr val="7F9B00"/>
+                </a:solidFill>
+                <a:latin typeface="Segoe UI Semibold"/>
+              </a:rPr>
+              <a:t>WHO PAYS FIRST</a:t>
+            </a:r>
+          </a:p>
+        </p:txBody>
+      </p:sp>
+      <p:sp>
+        <p:nvSpPr>
+          <p:cNvPr id="25" name="TextBox 24"/>
+          <p:cNvSpPr txBox="1"/>
+          <p:nvPr/>
+        </p:nvSpPr>
+        <p:spPr>
+          <a:xfrm>
+            <a:off x="1549400" y="3886200"/>
+            <a:ext cx="4318000" cy="330200"/>
+          </a:xfrm>
+          <a:prstGeom prst="rect">
+            <a:avLst/>
+          </a:prstGeom>
+          <a:noFill/>
+        </p:spPr>
+        <p:txBody>
+          <a:bodyPr wrap="square" lIns="0" rIns="0" tIns="0" bIns="0" anchor="t">
+            <a:spAutoFit/>
+          </a:bodyPr>
+          <a:lstStyle/>
+          <a:p>
+            <a:pPr algn="l">
+              <a:lnSpc>
+                <a:spcPct val="120000"/>
+              </a:lnSpc>
+              <a:spcAft>
+                <a:spcPts val="0"/>
+              </a:spcAft>
+            </a:pPr>
+            <a:r>
+              <a:rPr sz="1900" b="0">
+                <a:solidFill>
+                  <a:srgbClr val="0B308E"/>
+                </a:solidFill>
+                <a:latin typeface="Segoe UI Semibold"/>
+              </a:rPr>
+              <a:t>The utilities</a:t>
+            </a:r>
+          </a:p>
+        </p:txBody>
+      </p:sp>
+      <p:sp>
+        <p:nvSpPr>
+          <p:cNvPr id="26" name="TextBox 25"/>
+          <p:cNvSpPr txBox="1"/>
+          <p:nvPr/>
+        </p:nvSpPr>
+        <p:spPr>
+          <a:xfrm>
+            <a:off x="1549400" y="4241800"/>
+            <a:ext cx="4572000" cy="254000"/>
+          </a:xfrm>
+          <a:prstGeom prst="rect">
+            <a:avLst/>
+          </a:prstGeom>
+          <a:noFill/>
+        </p:spPr>
+        <p:txBody>
+          <a:bodyPr wrap="square" lIns="0" rIns="0" tIns="0" bIns="0" anchor="t">
+            <a:spAutoFit/>
+          </a:bodyPr>
+          <a:lstStyle/>
+          <a:p>
+            <a:pPr algn="l">
+              <a:lnSpc>
+                <a:spcPct val="120000"/>
+              </a:lnSpc>
+              <a:spcAft>
+                <a:spcPts val="0"/>
+              </a:spcAft>
+            </a:pPr>
+            <a:r>
+              <a:rPr sz="1300" b="0">
+                <a:solidFill>
+                  <a:srgbClr val="55607A"/>
+                </a:solidFill>
+                <a:latin typeface="Segoe UI"/>
+              </a:rPr>
+              <a:t>Power and water anchor the build</a:t>
+            </a:r>
+          </a:p>
+        </p:txBody>
+      </p:sp>
+      <p:cxnSp>
+        <p:nvCxnSpPr>
+          <p:cNvPr id="27" name="Connector 26"/>
+          <p:cNvCxnSpPr/>
+          <p:nvPr/>
+        </p:nvCxnSpPr>
+        <p:spPr>
+          <a:xfrm>
+            <a:off x="1549400" y="4597400"/>
+            <a:ext cx="4419600" cy="0"/>
+          </a:xfrm>
+          <a:prstGeom prst="line">
+            <a:avLst/>
+          </a:prstGeom>
+          <a:ln w="9525">
+            <a:solidFill>
+              <a:srgbClr val="D6E0F0"/>
+            </a:solidFill>
+          </a:ln>
+        </p:spPr>
+        <p:style>
+          <a:lnRef idx="2">
+            <a:schemeClr val="accent1"/>
+          </a:lnRef>
+          <a:fillRef idx="0">
+            <a:schemeClr val="accent1"/>
+          </a:fillRef>
+          <a:effectRef idx="1">
+            <a:schemeClr val="accent1"/>
+          </a:effectRef>
+          <a:fontRef idx="minor">
+            <a:schemeClr val="tx1"/>
+          </a:fontRef>
+        </p:style>
+      </p:cxnSp>
+      <p:sp>
+        <p:nvSpPr>
+          <p:cNvPr id="28" name="Oval 27"/>
+          <p:cNvSpPr/>
+          <p:nvPr/>
+        </p:nvSpPr>
+        <p:spPr>
+          <a:xfrm>
+            <a:off x="609600" y="4749800"/>
+            <a:ext cx="685800" cy="685800"/>
+          </a:xfrm>
+          <a:prstGeom prst="ellipse">
+            <a:avLst/>
+          </a:prstGeom>
+          <a:solidFill>
+            <a:srgbClr val="7F9B00"/>
+          </a:solidFill>
+          <a:ln>
+            <a:noFill/>
+          </a:ln>
+          <a:effectLst/>
+        </p:spPr>
+        <p:style>
+          <a:lnRef idx="1">
+            <a:schemeClr val="accent1"/>
+          </a:lnRef>
+          <a:fillRef idx="3">
+            <a:schemeClr val="accent1"/>
+          </a:fillRef>
+          <a:effectRef idx="2">
+            <a:schemeClr val="accent1"/>
+          </a:effectRef>
+          <a:fontRef idx="minor">
+            <a:schemeClr val="lt1"/>
+          </a:fontRef>
+        </p:style>
+        <p:txBody>
+          <a:bodyPr rtlCol="0" anchor="ctr" wrap="square"/>
+          <a:lstStyle/>
+          <a:p>
+            <a:pPr algn="ctr"/>
+          </a:p>
+        </p:txBody>
+      </p:sp>
+      <p:pic>
+        <p:nvPicPr>
+          <p:cNvPr id="29" name="Picture 28" descr="flag_white.png"/>
+          <p:cNvPicPr>
+            <a:picLocks noChangeAspect="1"/>
+          </p:cNvPicPr>
+          <p:nvPr/>
+        </p:nvPicPr>
+        <p:blipFill>
+          <a:blip r:embed="rId5"/>
+          <a:stretch>
+            <a:fillRect/>
+          </a:stretch>
+        </p:blipFill>
+        <p:spPr>
+          <a:xfrm>
+            <a:off x="774192" y="4914392"/>
+            <a:ext cx="356616" cy="356616"/>
+          </a:xfrm>
+          <a:prstGeom prst="rect">
+            <a:avLst/>
+          </a:prstGeom>
+        </p:spPr>
+      </p:pic>
+      <p:sp>
+        <p:nvSpPr>
+          <p:cNvPr id="30" name="TextBox 29"/>
+          <p:cNvSpPr txBox="1"/>
+          <p:nvPr/>
+        </p:nvSpPr>
+        <p:spPr>
+          <a:xfrm>
+            <a:off x="1549400" y="4724400"/>
+            <a:ext cx="3810000" cy="177800"/>
+          </a:xfrm>
+          <a:prstGeom prst="rect">
+            <a:avLst/>
+          </a:prstGeom>
+          <a:noFill/>
+        </p:spPr>
+        <p:txBody>
+          <a:bodyPr wrap="square" lIns="0" rIns="0" tIns="0" bIns="0" anchor="t">
+            <a:spAutoFit/>
+          </a:bodyPr>
+          <a:lstStyle/>
+          <a:p>
+            <a:pPr algn="l">
+              <a:lnSpc>
+                <a:spcPct val="120000"/>
+              </a:lnSpc>
+              <a:spcAft>
+                <a:spcPts val="0"/>
+              </a:spcAft>
+            </a:pPr>
+            <a:r>
+              <a:rPr sz="900" b="0" spc="120">
+                <a:solidFill>
+                  <a:srgbClr val="7F9B00"/>
+                </a:solidFill>
+                <a:latin typeface="Segoe UI Semibold"/>
+              </a:rPr>
+              <a:t>WHAT WE PROPOSE</a:t>
+            </a:r>
+          </a:p>
+        </p:txBody>
+      </p:sp>
+      <p:sp>
+        <p:nvSpPr>
+          <p:cNvPr id="31" name="TextBox 30"/>
+          <p:cNvSpPr txBox="1"/>
+          <p:nvPr/>
+        </p:nvSpPr>
+        <p:spPr>
+          <a:xfrm>
+            <a:off x="1549400" y="4927600"/>
+            <a:ext cx="4318000" cy="330200"/>
+          </a:xfrm>
+          <a:prstGeom prst="rect">
+            <a:avLst/>
+          </a:prstGeom>
+          <a:noFill/>
+        </p:spPr>
+        <p:txBody>
+          <a:bodyPr wrap="square" lIns="0" rIns="0" tIns="0" bIns="0" anchor="t">
+            <a:spAutoFit/>
+          </a:bodyPr>
+          <a:lstStyle/>
+          <a:p>
+            <a:pPr algn="l">
+              <a:lnSpc>
+                <a:spcPct val="120000"/>
+              </a:lnSpc>
+              <a:spcAft>
+                <a:spcPts val="0"/>
+              </a:spcAft>
+            </a:pPr>
+            <a:r>
+              <a:rPr sz="1900" b="0">
+                <a:solidFill>
+                  <a:srgbClr val="0B308E"/>
+                </a:solidFill>
+                <a:latin typeface="Segoe UI Semibold"/>
+              </a:rPr>
+              <a:t>One pilot province</a:t>
+            </a:r>
+          </a:p>
+        </p:txBody>
+      </p:sp>
+      <p:sp>
+        <p:nvSpPr>
+          <p:cNvPr id="32" name="TextBox 31"/>
+          <p:cNvSpPr txBox="1"/>
+          <p:nvPr/>
+        </p:nvSpPr>
+        <p:spPr>
+          <a:xfrm>
+            <a:off x="1549400" y="5283200"/>
+            <a:ext cx="4572000" cy="254000"/>
+          </a:xfrm>
+          <a:prstGeom prst="rect">
+            <a:avLst/>
+          </a:prstGeom>
+          <a:noFill/>
+        </p:spPr>
+        <p:txBody>
+          <a:bodyPr wrap="square" lIns="0" rIns="0" tIns="0" bIns="0" anchor="t">
+            <a:spAutoFit/>
+          </a:bodyPr>
+          <a:lstStyle/>
+          <a:p>
+            <a:pPr algn="l">
+              <a:lnSpc>
+                <a:spcPct val="120000"/>
+              </a:lnSpc>
+              <a:spcAft>
+                <a:spcPts val="0"/>
+              </a:spcAft>
+            </a:pPr>
+            <a:r>
+              <a:rPr sz="1300" b="0">
+                <a:solidFill>
+                  <a:srgbClr val="55607A"/>
+                </a:solidFill>
+                <a:latin typeface="Segoe UI"/>
+              </a:rPr>
+              <a:t>Two anchor customers, measured</a:t>
+            </a:r>
+          </a:p>
+        </p:txBody>
+      </p:sp>
+      <p:sp>
+        <p:nvSpPr>
+          <p:cNvPr id="33" name="Rectangle 32"/>
+          <p:cNvSpPr/>
+          <p:nvPr/>
+        </p:nvSpPr>
+        <p:spPr>
+          <a:xfrm>
+            <a:off x="6604000" y="1498600"/>
+            <a:ext cx="4978400" cy="4191000"/>
+          </a:xfrm>
+          <a:prstGeom prst="rect">
+            <a:avLst/>
+          </a:prstGeom>
+          <a:solidFill>
+            <a:srgbClr val="F7FAFD"/>
+          </a:solidFill>
+          <a:ln>
+            <a:noFill/>
+          </a:ln>
+          <a:effectLst/>
+        </p:spPr>
+        <p:style>
+          <a:lnRef idx="1">
+            <a:schemeClr val="accent1"/>
+          </a:lnRef>
+          <a:fillRef idx="3">
+            <a:schemeClr val="accent1"/>
+          </a:fillRef>
+          <a:effectRef idx="2">
+            <a:schemeClr val="accent1"/>
+          </a:effectRef>
+          <a:fontRef idx="minor">
+            <a:schemeClr val="lt1"/>
+          </a:fontRef>
+        </p:style>
+        <p:txBody>
+          <a:bodyPr rtlCol="0" anchor="ctr" wrap="square"/>
+          <a:lstStyle/>
+          <a:p>
+            <a:pPr algn="ctr"/>
+          </a:p>
+        </p:txBody>
+      </p:sp>
+      <p:sp>
+        <p:nvSpPr>
+          <p:cNvPr id="34" name="Oval 33"/>
+          <p:cNvSpPr/>
+          <p:nvPr/>
+        </p:nvSpPr>
+        <p:spPr>
+          <a:xfrm>
+            <a:off x="7188200" y="1841500"/>
+            <a:ext cx="3810000" cy="3505200"/>
+          </a:xfrm>
+          <a:prstGeom prst="ellipse">
             <a:avLst/>
           </a:prstGeom>
           <a:solidFill>
@@ -6263,14 +7153,236 @@
       </p:sp>
       <p:sp>
         <p:nvSpPr>
-          <p:cNvPr id="12" name="Rectangle 11"/>
+          <p:cNvPr id="35" name="Oval 34"/>
           <p:cNvSpPr/>
           <p:nvPr/>
         </p:nvSpPr>
         <p:spPr>
           <a:xfrm>
-            <a:off x="609600" y="1574800"/>
-            <a:ext cx="50800" cy="1930400"/>
+            <a:off x="7670800" y="2285491"/>
+            <a:ext cx="2844800" cy="2617216"/>
+          </a:xfrm>
+          <a:prstGeom prst="ellipse">
+            <a:avLst/>
+          </a:prstGeom>
+          <a:solidFill>
+            <a:srgbClr val="E4EBF7"/>
+          </a:solidFill>
+          <a:ln>
+            <a:noFill/>
+          </a:ln>
+          <a:effectLst/>
+        </p:spPr>
+        <p:style>
+          <a:lnRef idx="1">
+            <a:schemeClr val="accent1"/>
+          </a:lnRef>
+          <a:fillRef idx="3">
+            <a:schemeClr val="accent1"/>
+          </a:fillRef>
+          <a:effectRef idx="2">
+            <a:schemeClr val="accent1"/>
+          </a:effectRef>
+          <a:fontRef idx="minor">
+            <a:schemeClr val="lt1"/>
+          </a:fontRef>
+        </p:style>
+        <p:txBody>
+          <a:bodyPr rtlCol="0" anchor="ctr" wrap="square"/>
+          <a:lstStyle/>
+          <a:p>
+            <a:pPr algn="ctr"/>
+          </a:p>
+        </p:txBody>
+      </p:sp>
+      <p:sp>
+        <p:nvSpPr>
+          <p:cNvPr id="36" name="Oval 35"/>
+          <p:cNvSpPr/>
+          <p:nvPr/>
+        </p:nvSpPr>
+        <p:spPr>
+          <a:xfrm>
+            <a:off x="8153400" y="2729484"/>
+            <a:ext cx="1879600" cy="1729232"/>
+          </a:xfrm>
+          <a:prstGeom prst="ellipse">
+            <a:avLst/>
+          </a:prstGeom>
+          <a:solidFill>
+            <a:srgbClr val="DCE5F3"/>
+          </a:solidFill>
+          <a:ln>
+            <a:noFill/>
+          </a:ln>
+          <a:effectLst/>
+        </p:spPr>
+        <p:style>
+          <a:lnRef idx="1">
+            <a:schemeClr val="accent1"/>
+          </a:lnRef>
+          <a:fillRef idx="3">
+            <a:schemeClr val="accent1"/>
+          </a:fillRef>
+          <a:effectRef idx="2">
+            <a:schemeClr val="accent1"/>
+          </a:effectRef>
+          <a:fontRef idx="minor">
+            <a:schemeClr val="lt1"/>
+          </a:fontRef>
+        </p:style>
+        <p:txBody>
+          <a:bodyPr rtlCol="0" anchor="ctr" wrap="square"/>
+          <a:lstStyle/>
+          <a:p>
+            <a:pPr algn="ctr"/>
+          </a:p>
+        </p:txBody>
+      </p:sp>
+      <p:pic>
+        <p:nvPicPr>
+          <p:cNvPr id="37" name="Picture 36" descr="a_64ddced7b1.png"/>
+          <p:cNvPicPr>
+            <a:picLocks noChangeAspect="1"/>
+          </p:cNvPicPr>
+          <p:nvPr/>
+        </p:nvPicPr>
+        <p:blipFill>
+          <a:blip r:embed="rId6"/>
+          <a:stretch>
+            <a:fillRect/>
+          </a:stretch>
+        </p:blipFill>
+        <p:spPr>
+          <a:xfrm>
+            <a:off x="8128000" y="2212622"/>
+            <a:ext cx="1930400" cy="2788355"/>
+          </a:xfrm>
+          <a:prstGeom prst="rect">
+            <a:avLst/>
+          </a:prstGeom>
+        </p:spPr>
+      </p:pic>
+      <p:sp>
+        <p:nvSpPr>
+          <p:cNvPr id="38" name="Oval 37"/>
+          <p:cNvSpPr/>
+          <p:nvPr/>
+        </p:nvSpPr>
+        <p:spPr>
+          <a:xfrm>
+            <a:off x="8763000" y="2997200"/>
+            <a:ext cx="508000" cy="508000"/>
+          </a:xfrm>
+          <a:prstGeom prst="ellipse">
+            <a:avLst/>
+          </a:prstGeom>
+          <a:solidFill>
+            <a:srgbClr val="7F9B00"/>
+          </a:solidFill>
+          <a:ln>
+            <a:noFill/>
+          </a:ln>
+          <a:effectLst/>
+        </p:spPr>
+        <p:style>
+          <a:lnRef idx="1">
+            <a:schemeClr val="accent1"/>
+          </a:lnRef>
+          <a:fillRef idx="3">
+            <a:schemeClr val="accent1"/>
+          </a:fillRef>
+          <a:effectRef idx="2">
+            <a:schemeClr val="accent1"/>
+          </a:effectRef>
+          <a:fontRef idx="minor">
+            <a:schemeClr val="lt1"/>
+          </a:fontRef>
+        </p:style>
+        <p:txBody>
+          <a:bodyPr rtlCol="0" anchor="ctr" wrap="square"/>
+          <a:lstStyle/>
+          <a:p>
+            <a:pPr algn="ctr"/>
+          </a:p>
+        </p:txBody>
+      </p:sp>
+      <p:pic>
+        <p:nvPicPr>
+          <p:cNvPr id="39" name="Picture 38" descr="radio-tower_white.png"/>
+          <p:cNvPicPr>
+            <a:picLocks noChangeAspect="1"/>
+          </p:cNvPicPr>
+          <p:nvPr/>
+        </p:nvPicPr>
+        <p:blipFill>
+          <a:blip r:embed="rId7"/>
+          <a:stretch>
+            <a:fillRect/>
+          </a:stretch>
+        </p:blipFill>
+        <p:spPr>
+          <a:xfrm>
+            <a:off x="8874760" y="3108960"/>
+            <a:ext cx="284480" cy="284480"/>
+          </a:xfrm>
+          <a:prstGeom prst="rect">
+            <a:avLst/>
+          </a:prstGeom>
+        </p:spPr>
+      </p:pic>
+      <p:sp>
+        <p:nvSpPr>
+          <p:cNvPr id="40" name="TextBox 39"/>
+          <p:cNvSpPr txBox="1"/>
+          <p:nvPr/>
+        </p:nvSpPr>
+        <p:spPr>
+          <a:xfrm>
+            <a:off x="6756400" y="5334000"/>
+            <a:ext cx="4699000" cy="228600"/>
+          </a:xfrm>
+          <a:prstGeom prst="rect">
+            <a:avLst/>
+          </a:prstGeom>
+          <a:noFill/>
+        </p:spPr>
+        <p:txBody>
+          <a:bodyPr wrap="square" lIns="0" rIns="0" tIns="0" bIns="0" anchor="t">
+            <a:spAutoFit/>
+          </a:bodyPr>
+          <a:lstStyle/>
+          <a:p>
+            <a:pPr algn="ctr">
+              <a:lnSpc>
+                <a:spcPct val="120000"/>
+              </a:lnSpc>
+              <a:spcAft>
+                <a:spcPts val="0"/>
+              </a:spcAft>
+            </a:pPr>
+            <a:r>
+              <a:rPr sz="1100" b="0">
+                <a:solidFill>
+                  <a:srgbClr val="55607A"/>
+                </a:solidFill>
+                <a:latin typeface="Segoe UI"/>
+              </a:rPr>
+              <a:t>One low-band layer across 7,641 islands</a:t>
+            </a:r>
+          </a:p>
+        </p:txBody>
+      </p:sp>
+      <p:sp>
+        <p:nvSpPr>
+          <p:cNvPr id="41" name="Rectangle 40"/>
+          <p:cNvSpPr/>
+          <p:nvPr/>
+        </p:nvSpPr>
+        <p:spPr>
+          <a:xfrm>
+            <a:off x="609600" y="5867400"/>
+            <a:ext cx="10972800" cy="482600"/>
           </a:xfrm>
           <a:prstGeom prst="rect">
             <a:avLst/>
@@ -6305,16 +7417,40 @@
           </a:p>
         </p:txBody>
       </p:sp>
-      <p:sp>
-        <p:nvSpPr>
-          <p:cNvPr id="13" name="TextBox 12"/>
+      <p:pic>
+        <p:nvPicPr>
+          <p:cNvPr id="42" name="Picture 41" descr="arrow-right_white.png"/>
+          <p:cNvPicPr>
+            <a:picLocks noChangeAspect="1"/>
+          </p:cNvPicPr>
+          <p:nvPr/>
+        </p:nvPicPr>
+        <p:blipFill>
+          <a:blip r:embed="rId8"/>
+          <a:stretch>
+            <a:fillRect/>
+          </a:stretch>
+        </p:blipFill>
+        <p:spPr>
+          <a:xfrm>
+            <a:off x="812800" y="5981700"/>
+            <a:ext cx="254000" cy="254000"/>
+          </a:xfrm>
+          <a:prstGeom prst="rect">
+            <a:avLst/>
+          </a:prstGeom>
+        </p:spPr>
+      </p:pic>
+      <p:sp>
+        <p:nvSpPr>
+          <p:cNvPr id="43" name="TextBox 42"/>
           <p:cNvSpPr txBox="1"/>
           <p:nvPr/>
         </p:nvSpPr>
         <p:spPr>
           <a:xfrm>
-            <a:off x="889000" y="1752600"/>
-            <a:ext cx="635000" cy="406400"/>
+            <a:off x="1193800" y="5867400"/>
+            <a:ext cx="3810000" cy="482600"/>
           </a:xfrm>
           <a:prstGeom prst="rect">
             <a:avLst/>
@@ -6329,34 +7465,34 @@
           <a:p>
             <a:pPr algn="l">
               <a:lnSpc>
-                <a:spcPct val="125000"/>
+                <a:spcPct val="120000"/>
               </a:lnSpc>
               <a:spcAft>
-                <a:spcPts val="300"/>
+                <a:spcPts val="0"/>
               </a:spcAft>
             </a:pPr>
             <a:r>
-              <a:rPr sz="2400" b="1">
+              <a:rPr sz="1300" b="0">
                 <a:solidFill>
                   <a:srgbClr val="8CC63F"/>
                 </a:solidFill>
-                <a:latin typeface="Arial"/>
+                <a:latin typeface="Segoe UI Semibold"/>
               </a:rPr>
-              <a:t>01</a:t>
+              <a:t>Today’s ask</a:t>
             </a:r>
           </a:p>
         </p:txBody>
       </p:sp>
       <p:sp>
         <p:nvSpPr>
-          <p:cNvPr id="14" name="TextBox 13"/>
+          <p:cNvPr id="44" name="TextBox 43"/>
           <p:cNvSpPr txBox="1"/>
           <p:nvPr/>
         </p:nvSpPr>
         <p:spPr>
           <a:xfrm>
-            <a:off x="1549400" y="1752600"/>
-            <a:ext cx="4064000" cy="406400"/>
+            <a:off x="2768600" y="5867400"/>
+            <a:ext cx="8636000" cy="482600"/>
           </a:xfrm>
           <a:prstGeom prst="rect">
             <a:avLst/>
@@ -6371,34 +7507,34 @@
           <a:p>
             <a:pPr algn="l">
               <a:lnSpc>
-                <a:spcPct val="125000"/>
+                <a:spcPct val="120000"/>
               </a:lnSpc>
               <a:spcAft>
-                <a:spcPts val="300"/>
+                <a:spcPts val="0"/>
               </a:spcAft>
             </a:pPr>
             <a:r>
-              <a:rPr sz="1000" b="1">
+              <a:rPr sz="1300" b="0">
                 <a:solidFill>
-                  <a:srgbClr val="7F9B00"/>
+                  <a:srgbClr val="FFFFFF"/>
                 </a:solidFill>
-                <a:latin typeface="Arial"/>
+                <a:latin typeface="Segoe UI"/>
               </a:rPr>
-              <a:t>WHAT IT IS</a:t>
+              <a:t>Confirm the spectrum  ·  Nominate a pilot province</a:t>
             </a:r>
           </a:p>
         </p:txBody>
       </p:sp>
       <p:sp>
         <p:nvSpPr>
-          <p:cNvPr id="15" name="TextBox 14"/>
+          <p:cNvPr id="45" name="TextBox 44"/>
           <p:cNvSpPr txBox="1"/>
           <p:nvPr/>
         </p:nvSpPr>
         <p:spPr>
           <a:xfrm>
-            <a:off x="889000" y="2286000"/>
-            <a:ext cx="4953000" cy="330200"/>
+            <a:off x="609600" y="6502400"/>
+            <a:ext cx="10972800" cy="152400"/>
           </a:xfrm>
           <a:prstGeom prst="rect">
             <a:avLst/>
@@ -6413,964 +7549,20 @@
           <a:p>
             <a:pPr algn="l">
               <a:lnSpc>
-                <a:spcPct val="125000"/>
+                <a:spcPct val="120000"/>
               </a:lnSpc>
               <a:spcAft>
-                <a:spcPts val="300"/>
+                <a:spcPts val="0"/>
               </a:spcAft>
             </a:pPr>
             <a:r>
-              <a:rPr sz="1700" b="1">
-                <a:solidFill>
-                  <a:srgbClr val="0B308E"/>
-                </a:solidFill>
-                <a:latin typeface="Arial"/>
-              </a:rPr>
-              <a:t>A coverage and resilience layer</a:t>
-            </a:r>
-          </a:p>
-        </p:txBody>
-      </p:sp>
-      <p:sp>
-        <p:nvSpPr>
-          <p:cNvPr id="16" name="TextBox 15"/>
-          <p:cNvSpPr txBox="1"/>
-          <p:nvPr/>
-        </p:nvSpPr>
-        <p:spPr>
-          <a:xfrm>
-            <a:off x="889000" y="2692400"/>
-            <a:ext cx="4902200" cy="711200"/>
-          </a:xfrm>
-          <a:prstGeom prst="rect">
-            <a:avLst/>
-          </a:prstGeom>
-          <a:noFill/>
-        </p:spPr>
-        <p:txBody>
-          <a:bodyPr wrap="square" lIns="0" rIns="0" tIns="0" bIns="0" anchor="t">
-            <a:spAutoFit/>
-          </a:bodyPr>
-          <a:lstStyle/>
-          <a:p>
-            <a:pPr algn="l">
-              <a:lnSpc>
-                <a:spcPct val="130000"/>
-              </a:lnSpc>
-              <a:spcAft>
-                <a:spcPts val="300"/>
-              </a:spcAft>
-            </a:pPr>
-            <a:r>
-              <a:rPr sz="1200" b="0">
-                <a:solidFill>
-                  <a:srgbClr val="55607A"/>
-                </a:solidFill>
-                <a:latin typeface="Arial"/>
-              </a:rPr>
-              <a:t>Alongside Globe’s 4G and 5G, not instead of them. Voice, telemetry and low-rate video, not capacity.</a:t>
-            </a:r>
-          </a:p>
-        </p:txBody>
-      </p:sp>
-      <p:sp>
-        <p:nvSpPr>
-          <p:cNvPr id="17" name="Rectangle 16"/>
-          <p:cNvSpPr/>
-          <p:nvPr/>
-        </p:nvSpPr>
-        <p:spPr>
-          <a:xfrm>
-            <a:off x="6172200" y="1574800"/>
-            <a:ext cx="5410200" cy="1930400"/>
-          </a:xfrm>
-          <a:prstGeom prst="rect">
-            <a:avLst/>
-          </a:prstGeom>
-          <a:solidFill>
-            <a:srgbClr val="EEF2F9"/>
-          </a:solidFill>
-          <a:ln>
-            <a:noFill/>
-          </a:ln>
-          <a:effectLst/>
-        </p:spPr>
-        <p:style>
-          <a:lnRef idx="1">
-            <a:schemeClr val="accent1"/>
-          </a:lnRef>
-          <a:fillRef idx="3">
-            <a:schemeClr val="accent1"/>
-          </a:fillRef>
-          <a:effectRef idx="2">
-            <a:schemeClr val="accent1"/>
-          </a:effectRef>
-          <a:fontRef idx="minor">
-            <a:schemeClr val="lt1"/>
-          </a:fontRef>
-        </p:style>
-        <p:txBody>
-          <a:bodyPr rtlCol="0" anchor="ctr" wrap="square"/>
-          <a:lstStyle/>
-          <a:p>
-            <a:pPr algn="ctr"/>
-          </a:p>
-        </p:txBody>
-      </p:sp>
-      <p:sp>
-        <p:nvSpPr>
-          <p:cNvPr id="18" name="Rectangle 17"/>
-          <p:cNvSpPr/>
-          <p:nvPr/>
-        </p:nvSpPr>
-        <p:spPr>
-          <a:xfrm>
-            <a:off x="6172200" y="1574800"/>
-            <a:ext cx="50800" cy="1930400"/>
-          </a:xfrm>
-          <a:prstGeom prst="rect">
-            <a:avLst/>
-          </a:prstGeom>
-          <a:solidFill>
-            <a:srgbClr val="0B308E"/>
-          </a:solidFill>
-          <a:ln>
-            <a:noFill/>
-          </a:ln>
-          <a:effectLst/>
-        </p:spPr>
-        <p:style>
-          <a:lnRef idx="1">
-            <a:schemeClr val="accent1"/>
-          </a:lnRef>
-          <a:fillRef idx="3">
-            <a:schemeClr val="accent1"/>
-          </a:fillRef>
-          <a:effectRef idx="2">
-            <a:schemeClr val="accent1"/>
-          </a:effectRef>
-          <a:fontRef idx="minor">
-            <a:schemeClr val="lt1"/>
-          </a:fontRef>
-        </p:style>
-        <p:txBody>
-          <a:bodyPr rtlCol="0" anchor="ctr" wrap="square"/>
-          <a:lstStyle/>
-          <a:p>
-            <a:pPr algn="ctr"/>
-          </a:p>
-        </p:txBody>
-      </p:sp>
-      <p:sp>
-        <p:nvSpPr>
-          <p:cNvPr id="19" name="TextBox 18"/>
-          <p:cNvSpPr txBox="1"/>
-          <p:nvPr/>
-        </p:nvSpPr>
-        <p:spPr>
-          <a:xfrm>
-            <a:off x="6451600" y="1752600"/>
-            <a:ext cx="635000" cy="406400"/>
-          </a:xfrm>
-          <a:prstGeom prst="rect">
-            <a:avLst/>
-          </a:prstGeom>
-          <a:noFill/>
-        </p:spPr>
-        <p:txBody>
-          <a:bodyPr wrap="square" lIns="0" rIns="0" tIns="0" bIns="0" anchor="ctr">
-            <a:spAutoFit/>
-          </a:bodyPr>
-          <a:lstStyle/>
-          <a:p>
-            <a:pPr algn="l">
-              <a:lnSpc>
-                <a:spcPct val="125000"/>
-              </a:lnSpc>
-              <a:spcAft>
-                <a:spcPts val="300"/>
-              </a:spcAft>
-            </a:pPr>
-            <a:r>
-              <a:rPr sz="2400" b="1">
-                <a:solidFill>
-                  <a:srgbClr val="8CC63F"/>
-                </a:solidFill>
-                <a:latin typeface="Arial"/>
-              </a:rPr>
-              <a:t>02</a:t>
-            </a:r>
-          </a:p>
-        </p:txBody>
-      </p:sp>
-      <p:sp>
-        <p:nvSpPr>
-          <p:cNvPr id="20" name="TextBox 19"/>
-          <p:cNvSpPr txBox="1"/>
-          <p:nvPr/>
-        </p:nvSpPr>
-        <p:spPr>
-          <a:xfrm>
-            <a:off x="7112000" y="1752600"/>
-            <a:ext cx="4064000" cy="406400"/>
-          </a:xfrm>
-          <a:prstGeom prst="rect">
-            <a:avLst/>
-          </a:prstGeom>
-          <a:noFill/>
-        </p:spPr>
-        <p:txBody>
-          <a:bodyPr wrap="square" lIns="0" rIns="0" tIns="0" bIns="0" anchor="ctr">
-            <a:spAutoFit/>
-          </a:bodyPr>
-          <a:lstStyle/>
-          <a:p>
-            <a:pPr algn="l">
-              <a:lnSpc>
-                <a:spcPct val="125000"/>
-              </a:lnSpc>
-              <a:spcAft>
-                <a:spcPts val="300"/>
-              </a:spcAft>
-            </a:pPr>
-            <a:r>
-              <a:rPr sz="1000" b="1">
-                <a:solidFill>
-                  <a:srgbClr val="7F9B00"/>
-                </a:solidFill>
-                <a:latin typeface="Arial"/>
-              </a:rPr>
-              <a:t>WHY NOW</a:t>
-            </a:r>
-          </a:p>
-        </p:txBody>
-      </p:sp>
-      <p:sp>
-        <p:nvSpPr>
-          <p:cNvPr id="21" name="TextBox 20"/>
-          <p:cNvSpPr txBox="1"/>
-          <p:nvPr/>
-        </p:nvSpPr>
-        <p:spPr>
-          <a:xfrm>
-            <a:off x="6451600" y="2286000"/>
-            <a:ext cx="4953000" cy="330200"/>
-          </a:xfrm>
-          <a:prstGeom prst="rect">
-            <a:avLst/>
-          </a:prstGeom>
-          <a:noFill/>
-        </p:spPr>
-        <p:txBody>
-          <a:bodyPr wrap="square" lIns="0" rIns="0" tIns="0" bIns="0" anchor="t">
-            <a:spAutoFit/>
-          </a:bodyPr>
-          <a:lstStyle/>
-          <a:p>
-            <a:pPr algn="l">
-              <a:lnSpc>
-                <a:spcPct val="125000"/>
-              </a:lnSpc>
-              <a:spcAft>
-                <a:spcPts val="300"/>
-              </a:spcAft>
-            </a:pPr>
-            <a:r>
-              <a:rPr sz="1700" b="1">
-                <a:solidFill>
-                  <a:srgbClr val="0B308E"/>
-                </a:solidFill>
-                <a:latin typeface="Arial"/>
-              </a:rPr>
-              <a:t>The band is mainstream</a:t>
-            </a:r>
-          </a:p>
-        </p:txBody>
-      </p:sp>
-      <p:sp>
-        <p:nvSpPr>
-          <p:cNvPr id="22" name="TextBox 21"/>
-          <p:cNvSpPr txBox="1"/>
-          <p:nvPr/>
-        </p:nvSpPr>
-        <p:spPr>
-          <a:xfrm>
-            <a:off x="6451600" y="2692400"/>
-            <a:ext cx="4902200" cy="711200"/>
-          </a:xfrm>
-          <a:prstGeom prst="rect">
-            <a:avLst/>
-          </a:prstGeom>
-          <a:noFill/>
-        </p:spPr>
-        <p:txBody>
-          <a:bodyPr wrap="square" lIns="0" rIns="0" tIns="0" bIns="0" anchor="t">
-            <a:spAutoFit/>
-          </a:bodyPr>
-          <a:lstStyle/>
-          <a:p>
-            <a:pPr algn="l">
-              <a:lnSpc>
-                <a:spcPct val="130000"/>
-              </a:lnSpc>
-              <a:spcAft>
-                <a:spcPts val="300"/>
-              </a:spcAft>
-            </a:pPr>
-            <a:r>
-              <a:rPr sz="1200" b="0">
-                <a:solidFill>
-                  <a:srgbClr val="55607A"/>
-                </a:solidFill>
-                <a:latin typeface="Arial"/>
-              </a:rPr>
-              <a:t>Networks in 77 countries, 39 of them already on LTE. Globe already holds the spectrum.</a:t>
-            </a:r>
-          </a:p>
-        </p:txBody>
-      </p:sp>
-      <p:sp>
-        <p:nvSpPr>
-          <p:cNvPr id="23" name="Rectangle 22"/>
-          <p:cNvSpPr/>
-          <p:nvPr/>
-        </p:nvSpPr>
-        <p:spPr>
-          <a:xfrm>
-            <a:off x="609600" y="3657600"/>
-            <a:ext cx="5410200" cy="1930400"/>
-          </a:xfrm>
-          <a:prstGeom prst="rect">
-            <a:avLst/>
-          </a:prstGeom>
-          <a:solidFill>
-            <a:srgbClr val="EEF2F9"/>
-          </a:solidFill>
-          <a:ln>
-            <a:noFill/>
-          </a:ln>
-          <a:effectLst/>
-        </p:spPr>
-        <p:style>
-          <a:lnRef idx="1">
-            <a:schemeClr val="accent1"/>
-          </a:lnRef>
-          <a:fillRef idx="3">
-            <a:schemeClr val="accent1"/>
-          </a:fillRef>
-          <a:effectRef idx="2">
-            <a:schemeClr val="accent1"/>
-          </a:effectRef>
-          <a:fontRef idx="minor">
-            <a:schemeClr val="lt1"/>
-          </a:fontRef>
-        </p:style>
-        <p:txBody>
-          <a:bodyPr rtlCol="0" anchor="ctr" wrap="square"/>
-          <a:lstStyle/>
-          <a:p>
-            <a:pPr algn="ctr"/>
-          </a:p>
-        </p:txBody>
-      </p:sp>
-      <p:sp>
-        <p:nvSpPr>
-          <p:cNvPr id="24" name="Rectangle 23"/>
-          <p:cNvSpPr/>
-          <p:nvPr/>
-        </p:nvSpPr>
-        <p:spPr>
-          <a:xfrm>
-            <a:off x="609600" y="3657600"/>
-            <a:ext cx="50800" cy="1930400"/>
-          </a:xfrm>
-          <a:prstGeom prst="rect">
-            <a:avLst/>
-          </a:prstGeom>
-          <a:solidFill>
-            <a:srgbClr val="0B308E"/>
-          </a:solidFill>
-          <a:ln>
-            <a:noFill/>
-          </a:ln>
-          <a:effectLst/>
-        </p:spPr>
-        <p:style>
-          <a:lnRef idx="1">
-            <a:schemeClr val="accent1"/>
-          </a:lnRef>
-          <a:fillRef idx="3">
-            <a:schemeClr val="accent1"/>
-          </a:fillRef>
-          <a:effectRef idx="2">
-            <a:schemeClr val="accent1"/>
-          </a:effectRef>
-          <a:fontRef idx="minor">
-            <a:schemeClr val="lt1"/>
-          </a:fontRef>
-        </p:style>
-        <p:txBody>
-          <a:bodyPr rtlCol="0" anchor="ctr" wrap="square"/>
-          <a:lstStyle/>
-          <a:p>
-            <a:pPr algn="ctr"/>
-          </a:p>
-        </p:txBody>
-      </p:sp>
-      <p:sp>
-        <p:nvSpPr>
-          <p:cNvPr id="25" name="TextBox 24"/>
-          <p:cNvSpPr txBox="1"/>
-          <p:nvPr/>
-        </p:nvSpPr>
-        <p:spPr>
-          <a:xfrm>
-            <a:off x="889000" y="3835400"/>
-            <a:ext cx="635000" cy="406400"/>
-          </a:xfrm>
-          <a:prstGeom prst="rect">
-            <a:avLst/>
-          </a:prstGeom>
-          <a:noFill/>
-        </p:spPr>
-        <p:txBody>
-          <a:bodyPr wrap="square" lIns="0" rIns="0" tIns="0" bIns="0" anchor="ctr">
-            <a:spAutoFit/>
-          </a:bodyPr>
-          <a:lstStyle/>
-          <a:p>
-            <a:pPr algn="l">
-              <a:lnSpc>
-                <a:spcPct val="125000"/>
-              </a:lnSpc>
-              <a:spcAft>
-                <a:spcPts val="300"/>
-              </a:spcAft>
-            </a:pPr>
-            <a:r>
-              <a:rPr sz="2400" b="1">
-                <a:solidFill>
-                  <a:srgbClr val="8CC63F"/>
-                </a:solidFill>
-                <a:latin typeface="Arial"/>
-              </a:rPr>
-              <a:t>03</a:t>
-            </a:r>
-          </a:p>
-        </p:txBody>
-      </p:sp>
-      <p:sp>
-        <p:nvSpPr>
-          <p:cNvPr id="26" name="TextBox 25"/>
-          <p:cNvSpPr txBox="1"/>
-          <p:nvPr/>
-        </p:nvSpPr>
-        <p:spPr>
-          <a:xfrm>
-            <a:off x="1549400" y="3835400"/>
-            <a:ext cx="4064000" cy="406400"/>
-          </a:xfrm>
-          <a:prstGeom prst="rect">
-            <a:avLst/>
-          </a:prstGeom>
-          <a:noFill/>
-        </p:spPr>
-        <p:txBody>
-          <a:bodyPr wrap="square" lIns="0" rIns="0" tIns="0" bIns="0" anchor="ctr">
-            <a:spAutoFit/>
-          </a:bodyPr>
-          <a:lstStyle/>
-          <a:p>
-            <a:pPr algn="l">
-              <a:lnSpc>
-                <a:spcPct val="125000"/>
-              </a:lnSpc>
-              <a:spcAft>
-                <a:spcPts val="300"/>
-              </a:spcAft>
-            </a:pPr>
-            <a:r>
-              <a:rPr sz="1000" b="1">
-                <a:solidFill>
-                  <a:srgbClr val="7F9B00"/>
-                </a:solidFill>
-                <a:latin typeface="Arial"/>
-              </a:rPr>
-              <a:t>WHO PAYS FIRST</a:t>
-            </a:r>
-          </a:p>
-        </p:txBody>
-      </p:sp>
-      <p:sp>
-        <p:nvSpPr>
-          <p:cNvPr id="27" name="TextBox 26"/>
-          <p:cNvSpPr txBox="1"/>
-          <p:nvPr/>
-        </p:nvSpPr>
-        <p:spPr>
-          <a:xfrm>
-            <a:off x="889000" y="4368800"/>
-            <a:ext cx="4953000" cy="330200"/>
-          </a:xfrm>
-          <a:prstGeom prst="rect">
-            <a:avLst/>
-          </a:prstGeom>
-          <a:noFill/>
-        </p:spPr>
-        <p:txBody>
-          <a:bodyPr wrap="square" lIns="0" rIns="0" tIns="0" bIns="0" anchor="t">
-            <a:spAutoFit/>
-          </a:bodyPr>
-          <a:lstStyle/>
-          <a:p>
-            <a:pPr algn="l">
-              <a:lnSpc>
-                <a:spcPct val="125000"/>
-              </a:lnSpc>
-              <a:spcAft>
-                <a:spcPts val="300"/>
-              </a:spcAft>
-            </a:pPr>
-            <a:r>
-              <a:rPr sz="1700" b="1">
-                <a:solidFill>
-                  <a:srgbClr val="0B308E"/>
-                </a:solidFill>
-                <a:latin typeface="Arial"/>
-              </a:rPr>
-              <a:t>The utilities anchor the build</a:t>
-            </a:r>
-          </a:p>
-        </p:txBody>
-      </p:sp>
-      <p:sp>
-        <p:nvSpPr>
-          <p:cNvPr id="28" name="TextBox 27"/>
-          <p:cNvSpPr txBox="1"/>
-          <p:nvPr/>
-        </p:nvSpPr>
-        <p:spPr>
-          <a:xfrm>
-            <a:off x="889000" y="4775200"/>
-            <a:ext cx="4902200" cy="711200"/>
-          </a:xfrm>
-          <a:prstGeom prst="rect">
-            <a:avLst/>
-          </a:prstGeom>
-          <a:noFill/>
-        </p:spPr>
-        <p:txBody>
-          <a:bodyPr wrap="square" lIns="0" rIns="0" tIns="0" bIns="0" anchor="t">
-            <a:spAutoFit/>
-          </a:bodyPr>
-          <a:lstStyle/>
-          <a:p>
-            <a:pPr algn="l">
-              <a:lnSpc>
-                <a:spcPct val="130000"/>
-              </a:lnSpc>
-              <a:spcAft>
-                <a:spcPts val="300"/>
-              </a:spcAft>
-            </a:pPr>
-            <a:r>
-              <a:rPr sz="1200" b="0">
-                <a:solidFill>
-                  <a:srgbClr val="55607A"/>
-                </a:solidFill>
-                <a:latin typeface="Arial"/>
-              </a:rPr>
-              <a:t>Electric cooperatives and water districts first; public safety and transport use the same sites.</a:t>
-            </a:r>
-          </a:p>
-        </p:txBody>
-      </p:sp>
-      <p:sp>
-        <p:nvSpPr>
-          <p:cNvPr id="29" name="Rectangle 28"/>
-          <p:cNvSpPr/>
-          <p:nvPr/>
-        </p:nvSpPr>
-        <p:spPr>
-          <a:xfrm>
-            <a:off x="6172200" y="3657600"/>
-            <a:ext cx="5410200" cy="1930400"/>
-          </a:xfrm>
-          <a:prstGeom prst="rect">
-            <a:avLst/>
-          </a:prstGeom>
-          <a:solidFill>
-            <a:srgbClr val="EEF2F9"/>
-          </a:solidFill>
-          <a:ln>
-            <a:noFill/>
-          </a:ln>
-          <a:effectLst/>
-        </p:spPr>
-        <p:style>
-          <a:lnRef idx="1">
-            <a:schemeClr val="accent1"/>
-          </a:lnRef>
-          <a:fillRef idx="3">
-            <a:schemeClr val="accent1"/>
-          </a:fillRef>
-          <a:effectRef idx="2">
-            <a:schemeClr val="accent1"/>
-          </a:effectRef>
-          <a:fontRef idx="minor">
-            <a:schemeClr val="lt1"/>
-          </a:fontRef>
-        </p:style>
-        <p:txBody>
-          <a:bodyPr rtlCol="0" anchor="ctr" wrap="square"/>
-          <a:lstStyle/>
-          <a:p>
-            <a:pPr algn="ctr"/>
-          </a:p>
-        </p:txBody>
-      </p:sp>
-      <p:sp>
-        <p:nvSpPr>
-          <p:cNvPr id="30" name="Rectangle 29"/>
-          <p:cNvSpPr/>
-          <p:nvPr/>
-        </p:nvSpPr>
-        <p:spPr>
-          <a:xfrm>
-            <a:off x="6172200" y="3657600"/>
-            <a:ext cx="50800" cy="1930400"/>
-          </a:xfrm>
-          <a:prstGeom prst="rect">
-            <a:avLst/>
-          </a:prstGeom>
-          <a:solidFill>
-            <a:srgbClr val="7F9B00"/>
-          </a:solidFill>
-          <a:ln>
-            <a:noFill/>
-          </a:ln>
-          <a:effectLst/>
-        </p:spPr>
-        <p:style>
-          <a:lnRef idx="1">
-            <a:schemeClr val="accent1"/>
-          </a:lnRef>
-          <a:fillRef idx="3">
-            <a:schemeClr val="accent1"/>
-          </a:fillRef>
-          <a:effectRef idx="2">
-            <a:schemeClr val="accent1"/>
-          </a:effectRef>
-          <a:fontRef idx="minor">
-            <a:schemeClr val="lt1"/>
-          </a:fontRef>
-        </p:style>
-        <p:txBody>
-          <a:bodyPr rtlCol="0" anchor="ctr" wrap="square"/>
-          <a:lstStyle/>
-          <a:p>
-            <a:pPr algn="ctr"/>
-          </a:p>
-        </p:txBody>
-      </p:sp>
-      <p:sp>
-        <p:nvSpPr>
-          <p:cNvPr id="31" name="TextBox 30"/>
-          <p:cNvSpPr txBox="1"/>
-          <p:nvPr/>
-        </p:nvSpPr>
-        <p:spPr>
-          <a:xfrm>
-            <a:off x="6451600" y="3835400"/>
-            <a:ext cx="635000" cy="406400"/>
-          </a:xfrm>
-          <a:prstGeom prst="rect">
-            <a:avLst/>
-          </a:prstGeom>
-          <a:noFill/>
-        </p:spPr>
-        <p:txBody>
-          <a:bodyPr wrap="square" lIns="0" rIns="0" tIns="0" bIns="0" anchor="ctr">
-            <a:spAutoFit/>
-          </a:bodyPr>
-          <a:lstStyle/>
-          <a:p>
-            <a:pPr algn="l">
-              <a:lnSpc>
-                <a:spcPct val="125000"/>
-              </a:lnSpc>
-              <a:spcAft>
-                <a:spcPts val="300"/>
-              </a:spcAft>
-            </a:pPr>
-            <a:r>
-              <a:rPr sz="2400" b="1">
-                <a:solidFill>
-                  <a:srgbClr val="8CC63F"/>
-                </a:solidFill>
-                <a:latin typeface="Arial"/>
-              </a:rPr>
-              <a:t>04</a:t>
-            </a:r>
-          </a:p>
-        </p:txBody>
-      </p:sp>
-      <p:sp>
-        <p:nvSpPr>
-          <p:cNvPr id="32" name="TextBox 31"/>
-          <p:cNvSpPr txBox="1"/>
-          <p:nvPr/>
-        </p:nvSpPr>
-        <p:spPr>
-          <a:xfrm>
-            <a:off x="7112000" y="3835400"/>
-            <a:ext cx="4064000" cy="406400"/>
-          </a:xfrm>
-          <a:prstGeom prst="rect">
-            <a:avLst/>
-          </a:prstGeom>
-          <a:noFill/>
-        </p:spPr>
-        <p:txBody>
-          <a:bodyPr wrap="square" lIns="0" rIns="0" tIns="0" bIns="0" anchor="ctr">
-            <a:spAutoFit/>
-          </a:bodyPr>
-          <a:lstStyle/>
-          <a:p>
-            <a:pPr algn="l">
-              <a:lnSpc>
-                <a:spcPct val="125000"/>
-              </a:lnSpc>
-              <a:spcAft>
-                <a:spcPts val="300"/>
-              </a:spcAft>
-            </a:pPr>
-            <a:r>
-              <a:rPr sz="1000" b="1">
-                <a:solidFill>
-                  <a:srgbClr val="7F9B00"/>
-                </a:solidFill>
-                <a:latin typeface="Arial"/>
-              </a:rPr>
-              <a:t>WHAT WE PROPOSE</a:t>
-            </a:r>
-          </a:p>
-        </p:txBody>
-      </p:sp>
-      <p:sp>
-        <p:nvSpPr>
-          <p:cNvPr id="33" name="TextBox 32"/>
-          <p:cNvSpPr txBox="1"/>
-          <p:nvPr/>
-        </p:nvSpPr>
-        <p:spPr>
-          <a:xfrm>
-            <a:off x="6451600" y="4368800"/>
-            <a:ext cx="4953000" cy="330200"/>
-          </a:xfrm>
-          <a:prstGeom prst="rect">
-            <a:avLst/>
-          </a:prstGeom>
-          <a:noFill/>
-        </p:spPr>
-        <p:txBody>
-          <a:bodyPr wrap="square" lIns="0" rIns="0" tIns="0" bIns="0" anchor="t">
-            <a:spAutoFit/>
-          </a:bodyPr>
-          <a:lstStyle/>
-          <a:p>
-            <a:pPr algn="l">
-              <a:lnSpc>
-                <a:spcPct val="125000"/>
-              </a:lnSpc>
-              <a:spcAft>
-                <a:spcPts val="300"/>
-              </a:spcAft>
-            </a:pPr>
-            <a:r>
-              <a:rPr sz="1700" b="1">
-                <a:solidFill>
-                  <a:srgbClr val="0B308E"/>
-                </a:solidFill>
-                <a:latin typeface="Arial"/>
-              </a:rPr>
-              <a:t>A pilot, not a build</a:t>
-            </a:r>
-          </a:p>
-        </p:txBody>
-      </p:sp>
-      <p:sp>
-        <p:nvSpPr>
-          <p:cNvPr id="34" name="TextBox 33"/>
-          <p:cNvSpPr txBox="1"/>
-          <p:nvPr/>
-        </p:nvSpPr>
-        <p:spPr>
-          <a:xfrm>
-            <a:off x="6451600" y="4775200"/>
-            <a:ext cx="4902200" cy="711200"/>
-          </a:xfrm>
-          <a:prstGeom prst="rect">
-            <a:avLst/>
-          </a:prstGeom>
-          <a:noFill/>
-        </p:spPr>
-        <p:txBody>
-          <a:bodyPr wrap="square" lIns="0" rIns="0" tIns="0" bIns="0" anchor="t">
-            <a:spAutoFit/>
-          </a:bodyPr>
-          <a:lstStyle/>
-          <a:p>
-            <a:pPr algn="l">
-              <a:lnSpc>
-                <a:spcPct val="130000"/>
-              </a:lnSpc>
-              <a:spcAft>
-                <a:spcPts val="300"/>
-              </a:spcAft>
-            </a:pPr>
-            <a:r>
-              <a:rPr sz="1200" b="0">
-                <a:solidFill>
-                  <a:srgbClr val="55607A"/>
-                </a:solidFill>
-                <a:latin typeface="Arial"/>
-              </a:rPr>
-              <a:t>One typhoon-belt province and two anchor customers, measured in Globe’s own terrain.</a:t>
-            </a:r>
-          </a:p>
-        </p:txBody>
-      </p:sp>
-      <p:sp>
-        <p:nvSpPr>
-          <p:cNvPr id="35" name="Rectangle 34"/>
-          <p:cNvSpPr/>
-          <p:nvPr/>
-        </p:nvSpPr>
-        <p:spPr>
-          <a:xfrm>
-            <a:off x="609600" y="5842000"/>
-            <a:ext cx="10972800" cy="457200"/>
-          </a:xfrm>
-          <a:prstGeom prst="rect">
-            <a:avLst/>
-          </a:prstGeom>
-          <a:solidFill>
-            <a:srgbClr val="F1F6E2"/>
-          </a:solidFill>
-          <a:ln>
-            <a:noFill/>
-          </a:ln>
-          <a:effectLst/>
-        </p:spPr>
-        <p:style>
-          <a:lnRef idx="1">
-            <a:schemeClr val="accent1"/>
-          </a:lnRef>
-          <a:fillRef idx="3">
-            <a:schemeClr val="accent1"/>
-          </a:fillRef>
-          <a:effectRef idx="2">
-            <a:schemeClr val="accent1"/>
-          </a:effectRef>
-          <a:fontRef idx="minor">
-            <a:schemeClr val="lt1"/>
-          </a:fontRef>
-        </p:style>
-        <p:txBody>
-          <a:bodyPr rtlCol="0" anchor="ctr" wrap="square"/>
-          <a:lstStyle/>
-          <a:p>
-            <a:pPr algn="ctr"/>
-          </a:p>
-        </p:txBody>
-      </p:sp>
-      <p:sp>
-        <p:nvSpPr>
-          <p:cNvPr id="36" name="TextBox 35"/>
-          <p:cNvSpPr txBox="1"/>
-          <p:nvPr/>
-        </p:nvSpPr>
-        <p:spPr>
-          <a:xfrm>
-            <a:off x="838200" y="5842000"/>
-            <a:ext cx="10515600" cy="457200"/>
-          </a:xfrm>
-          <a:prstGeom prst="rect">
-            <a:avLst/>
-          </a:prstGeom>
-          <a:noFill/>
-        </p:spPr>
-        <p:txBody>
-          <a:bodyPr wrap="square" lIns="0" rIns="0" tIns="0" bIns="0" anchor="ctr">
-            <a:spAutoFit/>
-          </a:bodyPr>
-          <a:lstStyle/>
-          <a:p>
-            <a:pPr algn="l">
-              <a:lnSpc>
-                <a:spcPct val="130000"/>
-              </a:lnSpc>
-            </a:pPr>
-            <a:r>
-              <a:rPr sz="1200" b="1">
-                <a:solidFill>
-                  <a:srgbClr val="7F9B00"/>
-                </a:solidFill>
-                <a:latin typeface="Arial"/>
-              </a:rPr>
-              <a:t>Today’s ask:  </a:t>
-            </a:r>
-            <a:r>
-              <a:rPr sz="1200" b="0">
-                <a:solidFill>
-                  <a:srgbClr val="16213E"/>
-                </a:solidFill>
-                <a:latin typeface="Arial"/>
-              </a:rPr>
-              <a:t>confirm the spectrum parameters and nominate a pilot province.</a:t>
-            </a:r>
-          </a:p>
-        </p:txBody>
-      </p:sp>
-      <p:sp>
-        <p:nvSpPr>
-          <p:cNvPr id="37" name="TextBox 36"/>
-          <p:cNvSpPr txBox="1"/>
-          <p:nvPr/>
-        </p:nvSpPr>
-        <p:spPr>
-          <a:xfrm>
-            <a:off x="609600" y="6477000"/>
-            <a:ext cx="10972800" cy="177800"/>
-          </a:xfrm>
-          <a:prstGeom prst="rect">
-            <a:avLst/>
-          </a:prstGeom>
-          <a:noFill/>
-        </p:spPr>
-        <p:txBody>
-          <a:bodyPr wrap="square" lIns="0" rIns="0" tIns="0" bIns="0" anchor="t">
-            <a:spAutoFit/>
-          </a:bodyPr>
-          <a:lstStyle/>
-          <a:p>
-            <a:pPr algn="l">
-              <a:lnSpc>
-                <a:spcPct val="125000"/>
-              </a:lnSpc>
-              <a:spcAft>
-                <a:spcPts val="300"/>
-              </a:spcAft>
-            </a:pPr>
-            <a:r>
-              <a:rPr sz="800" b="0">
+              <a:rPr sz="750" b="0">
                 <a:solidFill>
                   <a:srgbClr val="93A0B4"/>
                 </a:solidFill>
-                <a:latin typeface="Arial"/>
+                <a:latin typeface="Segoe UI"/>
               </a:rPr>
-              <a:t>Source: 450 MHz Alliance, Annual Global Update (Dec 2025) p11 Table 1; Brief (Jun 2022) p15</a:t>
+              <a:t>Source: 450 MHz Alliance, Annual Global Update (Dec 2025) p11 Table 1; NAMRIA</a:t>
             </a:r>
           </a:p>
         </p:txBody>
@@ -7445,7 +7637,7 @@
         </p:nvSpPr>
         <p:spPr>
           <a:xfrm>
-            <a:off x="609600" y="279400"/>
+            <a:off x="609600" y="304800"/>
             <a:ext cx="7620000" cy="177800"/>
           </a:xfrm>
           <a:prstGeom prst="rect">
@@ -7461,20 +7653,20 @@
           <a:p>
             <a:pPr algn="l">
               <a:lnSpc>
-                <a:spcPct val="125000"/>
+                <a:spcPct val="120000"/>
               </a:lnSpc>
               <a:spcAft>
-                <a:spcPts val="300"/>
+                <a:spcPts val="0"/>
               </a:spcAft>
             </a:pPr>
             <a:r>
-              <a:rPr sz="950" b="1">
+              <a:rPr sz="900" b="0" spc="120">
                 <a:solidFill>
                   <a:srgbClr val="7F9B00"/>
                 </a:solidFill>
-                <a:latin typeface="Arial"/>
+                <a:latin typeface="Segoe UI Semibold"/>
               </a:rPr>
-              <a:t>C  ·  WHO PAYS FIRST</a:t>
+              <a:t>C   WHO PAYS FIRST</a:t>
             </a:r>
           </a:p>
         </p:txBody>
@@ -7487,8 +7679,8 @@
         </p:nvSpPr>
         <p:spPr>
           <a:xfrm>
-            <a:off x="9550400" y="342900"/>
-            <a:ext cx="330200" cy="50800"/>
+            <a:off x="9677400" y="368300"/>
+            <a:ext cx="304800" cy="38100"/>
           </a:xfrm>
           <a:prstGeom prst="rect">
             <a:avLst/>
@@ -7531,8 +7723,8 @@
         </p:nvSpPr>
         <p:spPr>
           <a:xfrm>
-            <a:off x="9931400" y="342900"/>
-            <a:ext cx="330200" cy="50800"/>
+            <a:off x="10033000" y="368300"/>
+            <a:ext cx="304800" cy="38100"/>
           </a:xfrm>
           <a:prstGeom prst="rect">
             <a:avLst/>
@@ -7575,8 +7767,8 @@
         </p:nvSpPr>
         <p:spPr>
           <a:xfrm>
-            <a:off x="10312400" y="342900"/>
-            <a:ext cx="330200" cy="50800"/>
+            <a:off x="10388600" y="368300"/>
+            <a:ext cx="304800" cy="38100"/>
           </a:xfrm>
           <a:prstGeom prst="rect">
             <a:avLst/>
@@ -7619,8 +7811,8 @@
         </p:nvSpPr>
         <p:spPr>
           <a:xfrm>
-            <a:off x="10693400" y="342900"/>
-            <a:ext cx="330200" cy="50800"/>
+            <a:off x="10744200" y="368300"/>
+            <a:ext cx="304800" cy="38100"/>
           </a:xfrm>
           <a:prstGeom prst="rect">
             <a:avLst/>
@@ -7663,8 +7855,8 @@
         </p:nvSpPr>
         <p:spPr>
           <a:xfrm>
-            <a:off x="11125200" y="228600"/>
-            <a:ext cx="457200" cy="228600"/>
+            <a:off x="11201400" y="266700"/>
+            <a:ext cx="381000" cy="203200"/>
           </a:xfrm>
           <a:prstGeom prst="rect">
             <a:avLst/>
@@ -7679,101 +7871,90 @@
           <a:p>
             <a:pPr algn="r">
               <a:lnSpc>
-                <a:spcPct val="125000"/>
-              </a:lnSpc>
-              <a:spcAft>
-                <a:spcPts val="300"/>
-              </a:spcAft>
-            </a:pPr>
-            <a:r>
-              <a:rPr sz="1200" b="1">
-                <a:solidFill>
-                  <a:srgbClr val="0B308E"/>
-                </a:solidFill>
-                <a:latin typeface="Arial"/>
-              </a:rPr>
-              <a:t>06</a:t>
-            </a:r>
-          </a:p>
-        </p:txBody>
-      </p:sp>
-      <p:sp>
-        <p:nvSpPr>
-          <p:cNvPr id="9" name="TextBox 8"/>
-          <p:cNvSpPr txBox="1"/>
-          <p:nvPr/>
-        </p:nvSpPr>
-        <p:spPr>
-          <a:xfrm>
-            <a:off x="609600" y="508000"/>
-            <a:ext cx="10972800" cy="762000"/>
-          </a:xfrm>
-          <a:prstGeom prst="rect">
-            <a:avLst/>
-          </a:prstGeom>
-          <a:noFill/>
-        </p:spPr>
-        <p:txBody>
-          <a:bodyPr wrap="square" lIns="0" rIns="0" tIns="0" bIns="0" anchor="b">
-            <a:spAutoFit/>
-          </a:bodyPr>
-          <a:lstStyle/>
-          <a:p>
-            <a:pPr algn="l">
-              <a:lnSpc>
-                <a:spcPct val="108000"/>
+                <a:spcPct val="120000"/>
               </a:lnSpc>
               <a:spcAft>
                 <a:spcPts val="0"/>
               </a:spcAft>
             </a:pPr>
             <a:r>
-              <a:rPr sz="2200" b="1">
+              <a:rPr sz="1100" b="0">
                 <a:solidFill>
                   <a:srgbClr val="0B308E"/>
                 </a:solidFill>
-                <a:latin typeface="Arial"/>
+                <a:latin typeface="Segoe UI Semibold"/>
               </a:rPr>
-              <a:t>Start where the money and the fit are both highest: the utilities</a:t>
+              <a:t>06</a:t>
             </a:r>
           </a:p>
         </p:txBody>
       </p:sp>
-      <p:cxnSp>
-        <p:nvCxnSpPr>
-          <p:cNvPr id="10" name="Connector 9"/>
-          <p:cNvCxnSpPr/>
-          <p:nvPr/>
-        </p:nvCxnSpPr>
-        <p:spPr>
-          <a:xfrm>
-            <a:off x="609600" y="1371600"/>
-            <a:ext cx="10972800" cy="0"/>
-          </a:xfrm>
-          <a:prstGeom prst="line">
-            <a:avLst/>
-          </a:prstGeom>
-          <a:ln w="12700">
-            <a:solidFill>
-              <a:srgbClr val="D6E0F0"/>
-            </a:solidFill>
-          </a:ln>
-        </p:spPr>
-        <p:style>
-          <a:lnRef idx="2">
-            <a:schemeClr val="accent1"/>
-          </a:lnRef>
-          <a:fillRef idx="0">
-            <a:schemeClr val="accent1"/>
-          </a:fillRef>
-          <a:effectRef idx="1">
-            <a:schemeClr val="accent1"/>
-          </a:effectRef>
-          <a:fontRef idx="minor">
-            <a:schemeClr val="tx1"/>
-          </a:fontRef>
-        </p:style>
-      </p:cxnSp>
+      <p:sp>
+        <p:nvSpPr>
+          <p:cNvPr id="9" name="TextBox 8"/>
+          <p:cNvSpPr txBox="1"/>
+          <p:nvPr/>
+        </p:nvSpPr>
+        <p:spPr>
+          <a:xfrm>
+            <a:off x="609600" y="508000"/>
+            <a:ext cx="10972800" cy="889000"/>
+          </a:xfrm>
+          <a:prstGeom prst="rect">
+            <a:avLst/>
+          </a:prstGeom>
+          <a:noFill/>
+        </p:spPr>
+        <p:txBody>
+          <a:bodyPr wrap="square" lIns="0" rIns="0" tIns="0" bIns="0" anchor="ctr">
+            <a:spAutoFit/>
+          </a:bodyPr>
+          <a:lstStyle/>
+          <a:p>
+            <a:pPr algn="l">
+              <a:lnSpc>
+                <a:spcPct val="105000"/>
+              </a:lnSpc>
+              <a:spcAft>
+                <a:spcPts val="0"/>
+              </a:spcAft>
+            </a:pPr>
+            <a:r>
+              <a:rPr sz="2200" b="0">
+                <a:solidFill>
+                  <a:srgbClr val="0B308E"/>
+                </a:solidFill>
+                <a:latin typeface="Segoe UI Semibold"/>
+              </a:rPr>
+              <a:t>Start with the utilities: they pay first and fit best</a:t>
+            </a:r>
+          </a:p>
+        </p:txBody>
+      </p:sp>
+      <p:pic>
+        <p:nvPicPr>
+          <p:cNvPr id="10" name="Picture 9" descr="hand-coins_steel.png"/>
+          <p:cNvPicPr>
+            <a:picLocks noChangeAspect="1"/>
+          </p:cNvPicPr>
+          <p:nvPr/>
+        </p:nvPicPr>
+        <p:blipFill>
+          <a:blip r:embed="rId2"/>
+          <a:stretch>
+            <a:fillRect/>
+          </a:stretch>
+        </p:blipFill>
+        <p:spPr>
+          <a:xfrm>
+            <a:off x="4622800" y="1447800"/>
+            <a:ext cx="228600" cy="228600"/>
+          </a:xfrm>
+          <a:prstGeom prst="rect">
+            <a:avLst/>
+          </a:prstGeom>
+        </p:spPr>
+      </p:pic>
       <p:sp>
         <p:nvSpPr>
           <p:cNvPr id="11" name="TextBox 10"/>
@@ -7782,8 +7963,8 @@
         </p:nvSpPr>
         <p:spPr>
           <a:xfrm>
-            <a:off x="1168400" y="1498600"/>
-            <a:ext cx="1524000" cy="177800"/>
+            <a:off x="4089400" y="1727200"/>
+            <a:ext cx="1320800" cy="177800"/>
           </a:xfrm>
           <a:prstGeom prst="rect">
             <a:avLst/>
@@ -7796,36 +7977,60 @@
           </a:bodyPr>
           <a:lstStyle/>
           <a:p>
-            <a:pPr algn="l">
+            <a:pPr algn="ctr">
               <a:lnSpc>
-                <a:spcPct val="125000"/>
+                <a:spcPct val="120000"/>
               </a:lnSpc>
               <a:spcAft>
-                <a:spcPts val="300"/>
+                <a:spcPts val="0"/>
               </a:spcAft>
             </a:pPr>
             <a:r>
-              <a:rPr sz="1000" b="1">
+              <a:rPr sz="800" b="0" spc="120">
                 <a:solidFill>
                   <a:srgbClr val="55607A"/>
                 </a:solidFill>
-                <a:latin typeface="Arial"/>
+                <a:latin typeface="Segoe UI Semibold"/>
               </a:rPr>
-              <a:t>INDUSTRY</a:t>
+              <a:t>ABILITY TO PAY</a:t>
             </a:r>
           </a:p>
         </p:txBody>
       </p:sp>
-      <p:sp>
-        <p:nvSpPr>
-          <p:cNvPr id="12" name="TextBox 11"/>
+      <p:pic>
+        <p:nvPicPr>
+          <p:cNvPr id="12" name="Picture 11" descr="target_steel.png"/>
+          <p:cNvPicPr>
+            <a:picLocks noChangeAspect="1"/>
+          </p:cNvPicPr>
+          <p:nvPr/>
+        </p:nvPicPr>
+        <p:blipFill>
+          <a:blip r:embed="rId3"/>
+          <a:stretch>
+            <a:fillRect/>
+          </a:stretch>
+        </p:blipFill>
+        <p:spPr>
+          <a:xfrm>
+            <a:off x="6121400" y="1447800"/>
+            <a:ext cx="228600" cy="228600"/>
+          </a:xfrm>
+          <a:prstGeom prst="rect">
+            <a:avLst/>
+          </a:prstGeom>
+        </p:spPr>
+      </p:pic>
+      <p:sp>
+        <p:nvSpPr>
+          <p:cNvPr id="13" name="TextBox 12"/>
           <p:cNvSpPr txBox="1"/>
           <p:nvPr/>
         </p:nvSpPr>
         <p:spPr>
           <a:xfrm>
-            <a:off x="4013200" y="1498600"/>
-            <a:ext cx="1168400" cy="177800"/>
+            <a:off x="5588000" y="1727200"/>
+            <a:ext cx="1320800" cy="177800"/>
           </a:xfrm>
           <a:prstGeom prst="rect">
             <a:avLst/>
@@ -7840,34 +8045,58 @@
           <a:p>
             <a:pPr algn="ctr">
               <a:lnSpc>
-                <a:spcPct val="125000"/>
+                <a:spcPct val="120000"/>
               </a:lnSpc>
               <a:spcAft>
-                <a:spcPts val="300"/>
+                <a:spcPts val="0"/>
               </a:spcAft>
             </a:pPr>
             <a:r>
-              <a:rPr sz="900" b="1">
+              <a:rPr sz="800" b="0" spc="120">
                 <a:solidFill>
                   <a:srgbClr val="55607A"/>
                 </a:solidFill>
-                <a:latin typeface="Arial"/>
+                <a:latin typeface="Segoe UI Semibold"/>
               </a:rPr>
-              <a:t>ABILITY TO PAY</a:t>
+              <a:t>FIT WITH 450</a:t>
             </a:r>
           </a:p>
         </p:txBody>
       </p:sp>
-      <p:sp>
-        <p:nvSpPr>
-          <p:cNvPr id="13" name="TextBox 12"/>
+      <p:pic>
+        <p:nvPicPr>
+          <p:cNvPr id="14" name="Picture 13" descr="clock_steel.png"/>
+          <p:cNvPicPr>
+            <a:picLocks noChangeAspect="1"/>
+          </p:cNvPicPr>
+          <p:nvPr/>
+        </p:nvPicPr>
+        <p:blipFill>
+          <a:blip r:embed="rId4"/>
+          <a:stretch>
+            <a:fillRect/>
+          </a:stretch>
+        </p:blipFill>
+        <p:spPr>
+          <a:xfrm>
+            <a:off x="7620000" y="1447800"/>
+            <a:ext cx="228600" cy="228600"/>
+          </a:xfrm>
+          <a:prstGeom prst="rect">
+            <a:avLst/>
+          </a:prstGeom>
+        </p:spPr>
+      </p:pic>
+      <p:sp>
+        <p:nvSpPr>
+          <p:cNvPr id="15" name="TextBox 14"/>
           <p:cNvSpPr txBox="1"/>
           <p:nvPr/>
         </p:nvSpPr>
         <p:spPr>
           <a:xfrm>
-            <a:off x="5156200" y="1498600"/>
-            <a:ext cx="1168400" cy="177800"/>
+            <a:off x="7086600" y="1727200"/>
+            <a:ext cx="1320800" cy="177800"/>
           </a:xfrm>
           <a:prstGeom prst="rect">
             <a:avLst/>
@@ -7882,34 +8111,34 @@
           <a:p>
             <a:pPr algn="ctr">
               <a:lnSpc>
-                <a:spcPct val="125000"/>
+                <a:spcPct val="120000"/>
               </a:lnSpc>
               <a:spcAft>
-                <a:spcPts val="300"/>
+                <a:spcPts val="0"/>
               </a:spcAft>
             </a:pPr>
             <a:r>
-              <a:rPr sz="900" b="1">
+              <a:rPr sz="800" b="0" spc="120">
                 <a:solidFill>
                   <a:srgbClr val="55607A"/>
                 </a:solidFill>
-                <a:latin typeface="Arial"/>
+                <a:latin typeface="Segoe UI Semibold"/>
               </a:rPr>
-              <a:t>FIT WITH 450 MHZ</a:t>
+              <a:t>SPEED TO REVENUE</a:t>
             </a:r>
           </a:p>
         </p:txBody>
       </p:sp>
       <p:sp>
         <p:nvSpPr>
-          <p:cNvPr id="14" name="TextBox 13"/>
+          <p:cNvPr id="16" name="TextBox 15"/>
           <p:cNvSpPr txBox="1"/>
           <p:nvPr/>
         </p:nvSpPr>
         <p:spPr>
           <a:xfrm>
-            <a:off x="6299200" y="1498600"/>
-            <a:ext cx="1168400" cy="177800"/>
+            <a:off x="8890000" y="1727200"/>
+            <a:ext cx="2540000" cy="177800"/>
           </a:xfrm>
           <a:prstGeom prst="rect">
             <a:avLst/>
@@ -7922,78 +8151,36 @@
           </a:bodyPr>
           <a:lstStyle/>
           <a:p>
-            <a:pPr algn="ctr">
+            <a:pPr algn="l">
               <a:lnSpc>
-                <a:spcPct val="125000"/>
+                <a:spcPct val="120000"/>
               </a:lnSpc>
               <a:spcAft>
-                <a:spcPts val="300"/>
+                <a:spcPts val="0"/>
               </a:spcAft>
             </a:pPr>
             <a:r>
-              <a:rPr sz="900" b="1">
+              <a:rPr sz="800" b="0" spc="120">
                 <a:solidFill>
                   <a:srgbClr val="55607A"/>
                 </a:solidFill>
-                <a:latin typeface="Arial"/>
+                <a:latin typeface="Segoe UI Semibold"/>
               </a:rPr>
-              <a:t>TIME TO REVENUE</a:t>
+              <a:t>KEY POINT</a:t>
             </a:r>
           </a:p>
         </p:txBody>
       </p:sp>
       <p:sp>
         <p:nvSpPr>
-          <p:cNvPr id="15" name="TextBox 14"/>
-          <p:cNvSpPr txBox="1"/>
-          <p:nvPr/>
-        </p:nvSpPr>
-        <p:spPr>
-          <a:xfrm>
-            <a:off x="7747000" y="1498600"/>
-            <a:ext cx="3810000" cy="177800"/>
-          </a:xfrm>
-          <a:prstGeom prst="rect">
-            <a:avLst/>
-          </a:prstGeom>
-          <a:noFill/>
-        </p:spPr>
-        <p:txBody>
-          <a:bodyPr wrap="square" lIns="0" rIns="0" tIns="0" bIns="0" anchor="t">
-            <a:spAutoFit/>
-          </a:bodyPr>
-          <a:lstStyle/>
-          <a:p>
-            <a:pPr algn="l">
-              <a:lnSpc>
-                <a:spcPct val="125000"/>
-              </a:lnSpc>
-              <a:spcAft>
-                <a:spcPts val="300"/>
-              </a:spcAft>
-            </a:pPr>
-            <a:r>
-              <a:rPr sz="1000" b="1">
-                <a:solidFill>
-                  <a:srgbClr val="55607A"/>
-                </a:solidFill>
-                <a:latin typeface="Arial"/>
-              </a:rPr>
-              <a:t>WHY</a:t>
-            </a:r>
-          </a:p>
-        </p:txBody>
-      </p:sp>
-      <p:sp>
-        <p:nvSpPr>
-          <p:cNvPr id="16" name="Rectangle 15"/>
+          <p:cNvPr id="17" name="Rectangle 16"/>
           <p:cNvSpPr/>
           <p:nvPr/>
         </p:nvSpPr>
         <p:spPr>
           <a:xfrm>
-            <a:off x="609600" y="1752600"/>
-            <a:ext cx="10972800" cy="584200"/>
+            <a:off x="609600" y="1981200"/>
+            <a:ext cx="10972800" cy="558800"/>
           </a:xfrm>
           <a:prstGeom prst="rect">
             <a:avLst/>
@@ -8030,14 +8217,14 @@
       </p:sp>
       <p:sp>
         <p:nvSpPr>
-          <p:cNvPr id="17" name="TextBox 16"/>
+          <p:cNvPr id="18" name="TextBox 17"/>
           <p:cNvSpPr txBox="1"/>
           <p:nvPr/>
         </p:nvSpPr>
         <p:spPr>
           <a:xfrm>
-            <a:off x="736600" y="1752600"/>
-            <a:ext cx="330200" cy="584200"/>
+            <a:off x="787400" y="1981200"/>
+            <a:ext cx="304800" cy="558800"/>
           </a:xfrm>
           <a:prstGeom prst="rect">
             <a:avLst/>
@@ -8052,100 +8239,34 @@
           <a:p>
             <a:pPr algn="ctr">
               <a:lnSpc>
-                <a:spcPct val="125000"/>
+                <a:spcPct val="120000"/>
               </a:lnSpc>
               <a:spcAft>
-                <a:spcPts val="300"/>
+                <a:spcPts val="0"/>
               </a:spcAft>
             </a:pPr>
             <a:r>
-              <a:rPr sz="2000" b="1">
+              <a:rPr sz="2000" b="0">
                 <a:solidFill>
                   <a:srgbClr val="7F9B00"/>
                 </a:solidFill>
-                <a:latin typeface="Arial"/>
+                <a:latin typeface="Segoe UI Light"/>
               </a:rPr>
               <a:t>1</a:t>
             </a:r>
           </a:p>
         </p:txBody>
       </p:sp>
-      <p:pic>
-        <p:nvPicPr>
-          <p:cNvPr id="18" name="Picture 17" descr="a_2adbfbb316.png"/>
-          <p:cNvPicPr>
-            <a:picLocks noChangeAspect="1"/>
-          </p:cNvPicPr>
-          <p:nvPr/>
-        </p:nvPicPr>
-        <p:blipFill>
-          <a:blip r:embed="rId2"/>
-          <a:stretch>
-            <a:fillRect/>
-          </a:stretch>
-        </p:blipFill>
-        <p:spPr>
-          <a:xfrm>
-            <a:off x="1168400" y="1820510"/>
-            <a:ext cx="558800" cy="448378"/>
-          </a:xfrm>
-          <a:prstGeom prst="rect">
-            <a:avLst/>
-          </a:prstGeom>
-        </p:spPr>
-      </p:pic>
-      <p:sp>
-        <p:nvSpPr>
-          <p:cNvPr id="19" name="TextBox 18"/>
-          <p:cNvSpPr txBox="1"/>
-          <p:nvPr/>
-        </p:nvSpPr>
-        <p:spPr>
-          <a:xfrm>
-            <a:off x="1854200" y="1752600"/>
-            <a:ext cx="2032000" cy="584200"/>
-          </a:xfrm>
-          <a:prstGeom prst="rect">
-            <a:avLst/>
-          </a:prstGeom>
-          <a:noFill/>
-        </p:spPr>
-        <p:txBody>
-          <a:bodyPr wrap="square" lIns="0" rIns="0" tIns="0" bIns="0" anchor="ctr">
-            <a:spAutoFit/>
-          </a:bodyPr>
-          <a:lstStyle/>
-          <a:p>
-            <a:pPr algn="l">
-              <a:lnSpc>
-                <a:spcPct val="125000"/>
-              </a:lnSpc>
-              <a:spcAft>
-                <a:spcPts val="300"/>
-              </a:spcAft>
-            </a:pPr>
-            <a:r>
-              <a:rPr sz="1400" b="1">
-                <a:solidFill>
-                  <a:srgbClr val="0B308E"/>
-                </a:solidFill>
-                <a:latin typeface="Arial"/>
-              </a:rPr>
-              <a:t>Power</a:t>
-            </a:r>
-          </a:p>
-        </p:txBody>
-      </p:sp>
-      <p:sp>
-        <p:nvSpPr>
-          <p:cNvPr id="20" name="Oval 19"/>
+      <p:sp>
+        <p:nvSpPr>
+          <p:cNvPr id="19" name="Oval 18"/>
           <p:cNvSpPr/>
           <p:nvPr/>
         </p:nvSpPr>
         <p:spPr>
           <a:xfrm>
-            <a:off x="4318000" y="1981200"/>
-            <a:ext cx="114300" cy="114300"/>
+            <a:off x="1244600" y="2070100"/>
+            <a:ext cx="381000" cy="381000"/>
           </a:xfrm>
           <a:prstGeom prst="ellipse">
             <a:avLst/>
@@ -8180,16 +8301,82 @@
           </a:p>
         </p:txBody>
       </p:sp>
-      <p:sp>
-        <p:nvSpPr>
-          <p:cNvPr id="21" name="Oval 20"/>
+      <p:pic>
+        <p:nvPicPr>
+          <p:cNvPr id="20" name="Picture 19" descr="zap_white.png"/>
+          <p:cNvPicPr>
+            <a:picLocks noChangeAspect="1"/>
+          </p:cNvPicPr>
+          <p:nvPr/>
+        </p:nvPicPr>
+        <p:blipFill>
+          <a:blip r:embed="rId5"/>
+          <a:stretch>
+            <a:fillRect/>
+          </a:stretch>
+        </p:blipFill>
+        <p:spPr>
+          <a:xfrm>
+            <a:off x="1336040" y="2161540"/>
+            <a:ext cx="198120" cy="198120"/>
+          </a:xfrm>
+          <a:prstGeom prst="rect">
+            <a:avLst/>
+          </a:prstGeom>
+        </p:spPr>
+      </p:pic>
+      <p:sp>
+        <p:nvSpPr>
+          <p:cNvPr id="21" name="TextBox 20"/>
+          <p:cNvSpPr txBox="1"/>
+          <p:nvPr/>
+        </p:nvSpPr>
+        <p:spPr>
+          <a:xfrm>
+            <a:off x="1803400" y="1981200"/>
+            <a:ext cx="2032000" cy="558800"/>
+          </a:xfrm>
+          <a:prstGeom prst="rect">
+            <a:avLst/>
+          </a:prstGeom>
+          <a:noFill/>
+        </p:spPr>
+        <p:txBody>
+          <a:bodyPr wrap="square" lIns="0" rIns="0" tIns="0" bIns="0" anchor="ctr">
+            <a:spAutoFit/>
+          </a:bodyPr>
+          <a:lstStyle/>
+          <a:p>
+            <a:pPr algn="l">
+              <a:lnSpc>
+                <a:spcPct val="120000"/>
+              </a:lnSpc>
+              <a:spcAft>
+                <a:spcPts val="0"/>
+              </a:spcAft>
+            </a:pPr>
+            <a:r>
+              <a:rPr sz="1500" b="0">
+                <a:solidFill>
+                  <a:srgbClr val="0B308E"/>
+                </a:solidFill>
+                <a:latin typeface="Segoe UI Semibold"/>
+              </a:rPr>
+              <a:t>Power</a:t>
+            </a:r>
+          </a:p>
+        </p:txBody>
+      </p:sp>
+      <p:sp>
+        <p:nvSpPr>
+          <p:cNvPr id="22" name="Oval 21"/>
           <p:cNvSpPr/>
           <p:nvPr/>
         </p:nvSpPr>
         <p:spPr>
           <a:xfrm>
-            <a:off x="4508500" y="1981200"/>
-            <a:ext cx="114300" cy="114300"/>
+            <a:off x="4521200" y="2197100"/>
+            <a:ext cx="127000" cy="127000"/>
           </a:xfrm>
           <a:prstGeom prst="ellipse">
             <a:avLst/>
@@ -8226,14 +8413,14 @@
       </p:sp>
       <p:sp>
         <p:nvSpPr>
-          <p:cNvPr id="22" name="Oval 21"/>
+          <p:cNvPr id="23" name="Oval 22"/>
           <p:cNvSpPr/>
           <p:nvPr/>
         </p:nvSpPr>
         <p:spPr>
           <a:xfrm>
-            <a:off x="4699000" y="1981200"/>
-            <a:ext cx="114300" cy="114300"/>
+            <a:off x="4724400" y="2197100"/>
+            <a:ext cx="127000" cy="127000"/>
           </a:xfrm>
           <a:prstGeom prst="ellipse">
             <a:avLst/>
@@ -8270,14 +8457,14 @@
       </p:sp>
       <p:sp>
         <p:nvSpPr>
-          <p:cNvPr id="23" name="Oval 22"/>
+          <p:cNvPr id="24" name="Oval 23"/>
           <p:cNvSpPr/>
           <p:nvPr/>
         </p:nvSpPr>
         <p:spPr>
           <a:xfrm>
-            <a:off x="5461000" y="1981200"/>
-            <a:ext cx="114300" cy="114300"/>
+            <a:off x="4927600" y="2197100"/>
+            <a:ext cx="127000" cy="127000"/>
           </a:xfrm>
           <a:prstGeom prst="ellipse">
             <a:avLst/>
@@ -8314,14 +8501,14 @@
       </p:sp>
       <p:sp>
         <p:nvSpPr>
-          <p:cNvPr id="24" name="Oval 23"/>
+          <p:cNvPr id="25" name="Oval 24"/>
           <p:cNvSpPr/>
           <p:nvPr/>
         </p:nvSpPr>
         <p:spPr>
           <a:xfrm>
-            <a:off x="5651500" y="1981200"/>
-            <a:ext cx="114300" cy="114300"/>
+            <a:off x="6019800" y="2197100"/>
+            <a:ext cx="127000" cy="127000"/>
           </a:xfrm>
           <a:prstGeom prst="ellipse">
             <a:avLst/>
@@ -8358,14 +8545,14 @@
       </p:sp>
       <p:sp>
         <p:nvSpPr>
-          <p:cNvPr id="25" name="Oval 24"/>
+          <p:cNvPr id="26" name="Oval 25"/>
           <p:cNvSpPr/>
           <p:nvPr/>
         </p:nvSpPr>
         <p:spPr>
           <a:xfrm>
-            <a:off x="5842000" y="1981200"/>
-            <a:ext cx="114300" cy="114300"/>
+            <a:off x="6223000" y="2197100"/>
+            <a:ext cx="127000" cy="127000"/>
           </a:xfrm>
           <a:prstGeom prst="ellipse">
             <a:avLst/>
@@ -8402,14 +8589,14 @@
       </p:sp>
       <p:sp>
         <p:nvSpPr>
-          <p:cNvPr id="26" name="Oval 25"/>
+          <p:cNvPr id="27" name="Oval 26"/>
           <p:cNvSpPr/>
           <p:nvPr/>
         </p:nvSpPr>
         <p:spPr>
           <a:xfrm>
-            <a:off x="6604000" y="1981200"/>
-            <a:ext cx="114300" cy="114300"/>
+            <a:off x="6426200" y="2197100"/>
+            <a:ext cx="127000" cy="127000"/>
           </a:xfrm>
           <a:prstGeom prst="ellipse">
             <a:avLst/>
@@ -8446,14 +8633,14 @@
       </p:sp>
       <p:sp>
         <p:nvSpPr>
-          <p:cNvPr id="27" name="Oval 26"/>
+          <p:cNvPr id="28" name="Oval 27"/>
           <p:cNvSpPr/>
           <p:nvPr/>
         </p:nvSpPr>
         <p:spPr>
           <a:xfrm>
-            <a:off x="6794500" y="1981200"/>
-            <a:ext cx="114300" cy="114300"/>
+            <a:off x="7518400" y="2197100"/>
+            <a:ext cx="127000" cy="127000"/>
           </a:xfrm>
           <a:prstGeom prst="ellipse">
             <a:avLst/>
@@ -8490,14 +8677,14 @@
       </p:sp>
       <p:sp>
         <p:nvSpPr>
-          <p:cNvPr id="28" name="Oval 27"/>
+          <p:cNvPr id="29" name="Oval 28"/>
           <p:cNvSpPr/>
           <p:nvPr/>
         </p:nvSpPr>
         <p:spPr>
           <a:xfrm>
-            <a:off x="6985000" y="1981200"/>
-            <a:ext cx="114300" cy="114300"/>
+            <a:off x="7721600" y="2197100"/>
+            <a:ext cx="127000" cy="127000"/>
           </a:xfrm>
           <a:prstGeom prst="ellipse">
             <a:avLst/>
@@ -8534,14 +8721,58 @@
       </p:sp>
       <p:sp>
         <p:nvSpPr>
-          <p:cNvPr id="29" name="TextBox 28"/>
+          <p:cNvPr id="30" name="Oval 29"/>
+          <p:cNvSpPr/>
+          <p:nvPr/>
+        </p:nvSpPr>
+        <p:spPr>
+          <a:xfrm>
+            <a:off x="7924800" y="2197100"/>
+            <a:ext cx="127000" cy="127000"/>
+          </a:xfrm>
+          <a:prstGeom prst="ellipse">
+            <a:avLst/>
+          </a:prstGeom>
+          <a:solidFill>
+            <a:srgbClr val="7F9B00"/>
+          </a:solidFill>
+          <a:ln>
+            <a:noFill/>
+          </a:ln>
+          <a:effectLst/>
+        </p:spPr>
+        <p:style>
+          <a:lnRef idx="1">
+            <a:schemeClr val="accent1"/>
+          </a:lnRef>
+          <a:fillRef idx="3">
+            <a:schemeClr val="accent1"/>
+          </a:fillRef>
+          <a:effectRef idx="2">
+            <a:schemeClr val="accent1"/>
+          </a:effectRef>
+          <a:fontRef idx="minor">
+            <a:schemeClr val="lt1"/>
+          </a:fontRef>
+        </p:style>
+        <p:txBody>
+          <a:bodyPr rtlCol="0" anchor="ctr" wrap="square"/>
+          <a:lstStyle/>
+          <a:p>
+            <a:pPr algn="ctr"/>
+          </a:p>
+        </p:txBody>
+      </p:sp>
+      <p:sp>
+        <p:nvSpPr>
+          <p:cNvPr id="31" name="TextBox 30"/>
           <p:cNvSpPr txBox="1"/>
           <p:nvPr/>
         </p:nvSpPr>
         <p:spPr>
           <a:xfrm>
-            <a:off x="7747000" y="1752600"/>
-            <a:ext cx="3759200" cy="584200"/>
+            <a:off x="8890000" y="1981200"/>
+            <a:ext cx="2616200" cy="558800"/>
           </a:xfrm>
           <a:prstGeom prst="rect">
             <a:avLst/>
@@ -8559,31 +8790,31 @@
                 <a:spcPct val="120000"/>
               </a:lnSpc>
               <a:spcAft>
-                <a:spcPts val="300"/>
+                <a:spcPts val="0"/>
               </a:spcAft>
             </a:pPr>
             <a:r>
-              <a:rPr sz="1050" b="0">
+              <a:rPr sz="1200" b="0">
                 <a:solidFill>
                   <a:srgbClr val="16213E"/>
                 </a:solidFill>
-                <a:latin typeface="Arial"/>
+                <a:latin typeface="Segoe UI"/>
               </a:rPr>
-              <a:t>The utilities anchor 450connect in Germany and TNB in Malaysia; scattered assets need a private data path.</a:t>
+              <a:t>Proven anchor abroad</a:t>
             </a:r>
           </a:p>
         </p:txBody>
       </p:sp>
       <p:sp>
         <p:nvSpPr>
-          <p:cNvPr id="30" name="Rectangle 29"/>
+          <p:cNvPr id="32" name="Rectangle 31"/>
           <p:cNvSpPr/>
           <p:nvPr/>
         </p:nvSpPr>
         <p:spPr>
           <a:xfrm>
-            <a:off x="609600" y="2413000"/>
-            <a:ext cx="10972800" cy="584200"/>
+            <a:off x="609600" y="2616200"/>
+            <a:ext cx="10972800" cy="558800"/>
           </a:xfrm>
           <a:prstGeom prst="rect">
             <a:avLst/>
@@ -8620,14 +8851,14 @@
       </p:sp>
       <p:sp>
         <p:nvSpPr>
-          <p:cNvPr id="31" name="TextBox 30"/>
+          <p:cNvPr id="33" name="TextBox 32"/>
           <p:cNvSpPr txBox="1"/>
           <p:nvPr/>
         </p:nvSpPr>
         <p:spPr>
           <a:xfrm>
-            <a:off x="736600" y="2413000"/>
-            <a:ext cx="330200" cy="584200"/>
+            <a:off x="787400" y="2616200"/>
+            <a:ext cx="304800" cy="558800"/>
           </a:xfrm>
           <a:prstGeom prst="rect">
             <a:avLst/>
@@ -8642,90 +8873,24 @@
           <a:p>
             <a:pPr algn="ctr">
               <a:lnSpc>
-                <a:spcPct val="125000"/>
+                <a:spcPct val="120000"/>
               </a:lnSpc>
               <a:spcAft>
-                <a:spcPts val="300"/>
+                <a:spcPts val="0"/>
               </a:spcAft>
             </a:pPr>
             <a:r>
-              <a:rPr sz="2000" b="1">
+              <a:rPr sz="2000" b="0">
                 <a:solidFill>
                   <a:srgbClr val="7F9B00"/>
                 </a:solidFill>
-                <a:latin typeface="Arial"/>
+                <a:latin typeface="Segoe UI Light"/>
               </a:rPr>
               <a:t>2</a:t>
             </a:r>
           </a:p>
         </p:txBody>
       </p:sp>
-      <p:pic>
-        <p:nvPicPr>
-          <p:cNvPr id="32" name="Picture 31" descr="a_365a95ab5e.png"/>
-          <p:cNvPicPr>
-            <a:picLocks noChangeAspect="1"/>
-          </p:cNvPicPr>
-          <p:nvPr/>
-        </p:nvPicPr>
-        <p:blipFill>
-          <a:blip r:embed="rId3"/>
-          <a:stretch>
-            <a:fillRect/>
-          </a:stretch>
-        </p:blipFill>
-        <p:spPr>
-          <a:xfrm>
-            <a:off x="1168400" y="2480174"/>
-            <a:ext cx="558800" cy="449851"/>
-          </a:xfrm>
-          <a:prstGeom prst="rect">
-            <a:avLst/>
-          </a:prstGeom>
-        </p:spPr>
-      </p:pic>
-      <p:sp>
-        <p:nvSpPr>
-          <p:cNvPr id="33" name="TextBox 32"/>
-          <p:cNvSpPr txBox="1"/>
-          <p:nvPr/>
-        </p:nvSpPr>
-        <p:spPr>
-          <a:xfrm>
-            <a:off x="1854200" y="2413000"/>
-            <a:ext cx="2032000" cy="584200"/>
-          </a:xfrm>
-          <a:prstGeom prst="rect">
-            <a:avLst/>
-          </a:prstGeom>
-          <a:noFill/>
-        </p:spPr>
-        <p:txBody>
-          <a:bodyPr wrap="square" lIns="0" rIns="0" tIns="0" bIns="0" anchor="ctr">
-            <a:spAutoFit/>
-          </a:bodyPr>
-          <a:lstStyle/>
-          <a:p>
-            <a:pPr algn="l">
-              <a:lnSpc>
-                <a:spcPct val="125000"/>
-              </a:lnSpc>
-              <a:spcAft>
-                <a:spcPts val="300"/>
-              </a:spcAft>
-            </a:pPr>
-            <a:r>
-              <a:rPr sz="1400" b="1">
-                <a:solidFill>
-                  <a:srgbClr val="0B308E"/>
-                </a:solidFill>
-                <a:latin typeface="Arial"/>
-              </a:rPr>
-              <a:t>Water</a:t>
-            </a:r>
-          </a:p>
-        </p:txBody>
-      </p:sp>
       <p:sp>
         <p:nvSpPr>
           <p:cNvPr id="34" name="Oval 33"/>
@@ -8734,8 +8899,8 @@
         </p:nvSpPr>
         <p:spPr>
           <a:xfrm>
-            <a:off x="4318000" y="2641600"/>
-            <a:ext cx="114300" cy="114300"/>
+            <a:off x="1244600" y="2705100"/>
+            <a:ext cx="381000" cy="381000"/>
           </a:xfrm>
           <a:prstGeom prst="ellipse">
             <a:avLst/>
@@ -8770,16 +8935,82 @@
           </a:p>
         </p:txBody>
       </p:sp>
-      <p:sp>
-        <p:nvSpPr>
-          <p:cNvPr id="35" name="Oval 34"/>
+      <p:pic>
+        <p:nvPicPr>
+          <p:cNvPr id="35" name="Picture 34" descr="droplets_white.png"/>
+          <p:cNvPicPr>
+            <a:picLocks noChangeAspect="1"/>
+          </p:cNvPicPr>
+          <p:nvPr/>
+        </p:nvPicPr>
+        <p:blipFill>
+          <a:blip r:embed="rId6"/>
+          <a:stretch>
+            <a:fillRect/>
+          </a:stretch>
+        </p:blipFill>
+        <p:spPr>
+          <a:xfrm>
+            <a:off x="1336040" y="2796540"/>
+            <a:ext cx="198120" cy="198120"/>
+          </a:xfrm>
+          <a:prstGeom prst="rect">
+            <a:avLst/>
+          </a:prstGeom>
+        </p:spPr>
+      </p:pic>
+      <p:sp>
+        <p:nvSpPr>
+          <p:cNvPr id="36" name="TextBox 35"/>
+          <p:cNvSpPr txBox="1"/>
+          <p:nvPr/>
+        </p:nvSpPr>
+        <p:spPr>
+          <a:xfrm>
+            <a:off x="1803400" y="2616200"/>
+            <a:ext cx="2032000" cy="558800"/>
+          </a:xfrm>
+          <a:prstGeom prst="rect">
+            <a:avLst/>
+          </a:prstGeom>
+          <a:noFill/>
+        </p:spPr>
+        <p:txBody>
+          <a:bodyPr wrap="square" lIns="0" rIns="0" tIns="0" bIns="0" anchor="ctr">
+            <a:spAutoFit/>
+          </a:bodyPr>
+          <a:lstStyle/>
+          <a:p>
+            <a:pPr algn="l">
+              <a:lnSpc>
+                <a:spcPct val="120000"/>
+              </a:lnSpc>
+              <a:spcAft>
+                <a:spcPts val="0"/>
+              </a:spcAft>
+            </a:pPr>
+            <a:r>
+              <a:rPr sz="1500" b="0">
+                <a:solidFill>
+                  <a:srgbClr val="0B308E"/>
+                </a:solidFill>
+                <a:latin typeface="Segoe UI Semibold"/>
+              </a:rPr>
+              <a:t>Water</a:t>
+            </a:r>
+          </a:p>
+        </p:txBody>
+      </p:sp>
+      <p:sp>
+        <p:nvSpPr>
+          <p:cNvPr id="37" name="Oval 36"/>
           <p:cNvSpPr/>
           <p:nvPr/>
         </p:nvSpPr>
         <p:spPr>
           <a:xfrm>
-            <a:off x="4508500" y="2641600"/>
-            <a:ext cx="114300" cy="114300"/>
+            <a:off x="4521200" y="2832100"/>
+            <a:ext cx="127000" cy="127000"/>
           </a:xfrm>
           <a:prstGeom prst="ellipse">
             <a:avLst/>
@@ -8816,14 +9047,58 @@
       </p:sp>
       <p:sp>
         <p:nvSpPr>
-          <p:cNvPr id="36" name="Oval 35"/>
+          <p:cNvPr id="38" name="Oval 37"/>
           <p:cNvSpPr/>
           <p:nvPr/>
         </p:nvSpPr>
         <p:spPr>
           <a:xfrm>
-            <a:off x="4699000" y="2641600"/>
-            <a:ext cx="114300" cy="114300"/>
+            <a:off x="4724400" y="2832100"/>
+            <a:ext cx="127000" cy="127000"/>
+          </a:xfrm>
+          <a:prstGeom prst="ellipse">
+            <a:avLst/>
+          </a:prstGeom>
+          <a:solidFill>
+            <a:srgbClr val="7F9B00"/>
+          </a:solidFill>
+          <a:ln>
+            <a:noFill/>
+          </a:ln>
+          <a:effectLst/>
+        </p:spPr>
+        <p:style>
+          <a:lnRef idx="1">
+            <a:schemeClr val="accent1"/>
+          </a:lnRef>
+          <a:fillRef idx="3">
+            <a:schemeClr val="accent1"/>
+          </a:fillRef>
+          <a:effectRef idx="2">
+            <a:schemeClr val="accent1"/>
+          </a:effectRef>
+          <a:fontRef idx="minor">
+            <a:schemeClr val="lt1"/>
+          </a:fontRef>
+        </p:style>
+        <p:txBody>
+          <a:bodyPr rtlCol="0" anchor="ctr" wrap="square"/>
+          <a:lstStyle/>
+          <a:p>
+            <a:pPr algn="ctr"/>
+          </a:p>
+        </p:txBody>
+      </p:sp>
+      <p:sp>
+        <p:nvSpPr>
+          <p:cNvPr id="39" name="Oval 38"/>
+          <p:cNvSpPr/>
+          <p:nvPr/>
+        </p:nvSpPr>
+        <p:spPr>
+          <a:xfrm>
+            <a:off x="4927600" y="2832100"/>
+            <a:ext cx="127000" cy="127000"/>
           </a:xfrm>
           <a:prstGeom prst="ellipse">
             <a:avLst/>
@@ -8860,14 +9135,14 @@
       </p:sp>
       <p:sp>
         <p:nvSpPr>
-          <p:cNvPr id="37" name="Oval 36"/>
+          <p:cNvPr id="40" name="Oval 39"/>
           <p:cNvSpPr/>
           <p:nvPr/>
         </p:nvSpPr>
         <p:spPr>
           <a:xfrm>
-            <a:off x="5461000" y="2641600"/>
-            <a:ext cx="114300" cy="114300"/>
+            <a:off x="6019800" y="2832100"/>
+            <a:ext cx="127000" cy="127000"/>
           </a:xfrm>
           <a:prstGeom prst="ellipse">
             <a:avLst/>
@@ -8904,14 +9179,14 @@
       </p:sp>
       <p:sp>
         <p:nvSpPr>
-          <p:cNvPr id="38" name="Oval 37"/>
+          <p:cNvPr id="41" name="Oval 40"/>
           <p:cNvSpPr/>
           <p:nvPr/>
         </p:nvSpPr>
         <p:spPr>
           <a:xfrm>
-            <a:off x="5651500" y="2641600"/>
-            <a:ext cx="114300" cy="114300"/>
+            <a:off x="6223000" y="2832100"/>
+            <a:ext cx="127000" cy="127000"/>
           </a:xfrm>
           <a:prstGeom prst="ellipse">
             <a:avLst/>
@@ -8948,14 +9223,14 @@
       </p:sp>
       <p:sp>
         <p:nvSpPr>
-          <p:cNvPr id="39" name="Oval 38"/>
+          <p:cNvPr id="42" name="Oval 41"/>
           <p:cNvSpPr/>
           <p:nvPr/>
         </p:nvSpPr>
         <p:spPr>
           <a:xfrm>
-            <a:off x="5842000" y="2641600"/>
-            <a:ext cx="114300" cy="114300"/>
+            <a:off x="6426200" y="2832100"/>
+            <a:ext cx="127000" cy="127000"/>
           </a:xfrm>
           <a:prstGeom prst="ellipse">
             <a:avLst/>
@@ -8992,14 +9267,14 @@
       </p:sp>
       <p:sp>
         <p:nvSpPr>
-          <p:cNvPr id="40" name="Oval 39"/>
+          <p:cNvPr id="43" name="Oval 42"/>
           <p:cNvSpPr/>
           <p:nvPr/>
         </p:nvSpPr>
         <p:spPr>
           <a:xfrm>
-            <a:off x="6604000" y="2641600"/>
-            <a:ext cx="114300" cy="114300"/>
+            <a:off x="7518400" y="2832100"/>
+            <a:ext cx="127000" cy="127000"/>
           </a:xfrm>
           <a:prstGeom prst="ellipse">
             <a:avLst/>
@@ -9036,14 +9311,14 @@
       </p:sp>
       <p:sp>
         <p:nvSpPr>
-          <p:cNvPr id="41" name="Oval 40"/>
+          <p:cNvPr id="44" name="Oval 43"/>
           <p:cNvSpPr/>
           <p:nvPr/>
         </p:nvSpPr>
         <p:spPr>
           <a:xfrm>
-            <a:off x="6794500" y="2641600"/>
-            <a:ext cx="114300" cy="114300"/>
+            <a:off x="7721600" y="2832100"/>
+            <a:ext cx="127000" cy="127000"/>
           </a:xfrm>
           <a:prstGeom prst="ellipse">
             <a:avLst/>
@@ -9080,14 +9355,14 @@
       </p:sp>
       <p:sp>
         <p:nvSpPr>
-          <p:cNvPr id="42" name="Oval 41"/>
+          <p:cNvPr id="45" name="Oval 44"/>
           <p:cNvSpPr/>
           <p:nvPr/>
         </p:nvSpPr>
         <p:spPr>
           <a:xfrm>
-            <a:off x="6985000" y="2641600"/>
-            <a:ext cx="114300" cy="114300"/>
+            <a:off x="7924800" y="2832100"/>
+            <a:ext cx="127000" cy="127000"/>
           </a:xfrm>
           <a:prstGeom prst="ellipse">
             <a:avLst/>
@@ -9124,14 +9399,14 @@
       </p:sp>
       <p:sp>
         <p:nvSpPr>
-          <p:cNvPr id="43" name="TextBox 42"/>
+          <p:cNvPr id="46" name="TextBox 45"/>
           <p:cNvSpPr txBox="1"/>
           <p:nvPr/>
         </p:nvSpPr>
         <p:spPr>
           <a:xfrm>
-            <a:off x="7747000" y="2413000"/>
-            <a:ext cx="3759200" cy="584200"/>
+            <a:off x="8890000" y="2616200"/>
+            <a:ext cx="2616200" cy="558800"/>
           </a:xfrm>
           <a:prstGeom prst="rect">
             <a:avLst/>
@@ -9149,31 +9424,31 @@
                 <a:spcPct val="120000"/>
               </a:lnSpc>
               <a:spcAft>
-                <a:spcPts val="300"/>
+                <a:spcPts val="0"/>
               </a:spcAft>
             </a:pPr>
             <a:r>
-              <a:rPr sz="1050" b="0">
+              <a:rPr sz="1200" b="0">
                 <a:solidFill>
                   <a:srgbClr val="16213E"/>
                 </a:solidFill>
-                <a:latin typeface="Arial"/>
+                <a:latin typeface="Segoe UI"/>
               </a:rPr>
-              <a:t>Same sites and same IoT as power. Budgets vary: only 149 of 532 districts meet the 20% loss limit.</a:t>
+              <a:t>Same sites as power</a:t>
             </a:r>
           </a:p>
         </p:txBody>
       </p:sp>
       <p:sp>
         <p:nvSpPr>
-          <p:cNvPr id="44" name="Rectangle 43"/>
+          <p:cNvPr id="47" name="Rectangle 46"/>
           <p:cNvSpPr/>
           <p:nvPr/>
         </p:nvSpPr>
         <p:spPr>
           <a:xfrm>
-            <a:off x="609600" y="3073400"/>
-            <a:ext cx="10972800" cy="584200"/>
+            <a:off x="609600" y="3251200"/>
+            <a:ext cx="10972800" cy="558800"/>
           </a:xfrm>
           <a:prstGeom prst="rect">
             <a:avLst/>
@@ -9210,14 +9485,14 @@
       </p:sp>
       <p:sp>
         <p:nvSpPr>
-          <p:cNvPr id="45" name="TextBox 44"/>
+          <p:cNvPr id="48" name="TextBox 47"/>
           <p:cNvSpPr txBox="1"/>
           <p:nvPr/>
         </p:nvSpPr>
         <p:spPr>
           <a:xfrm>
-            <a:off x="736600" y="3073400"/>
-            <a:ext cx="330200" cy="584200"/>
+            <a:off x="787400" y="3251200"/>
+            <a:ext cx="304800" cy="558800"/>
           </a:xfrm>
           <a:prstGeom prst="rect">
             <a:avLst/>
@@ -9232,100 +9507,34 @@
           <a:p>
             <a:pPr algn="ctr">
               <a:lnSpc>
-                <a:spcPct val="125000"/>
+                <a:spcPct val="120000"/>
               </a:lnSpc>
               <a:spcAft>
-                <a:spcPts val="300"/>
+                <a:spcPts val="0"/>
               </a:spcAft>
             </a:pPr>
             <a:r>
-              <a:rPr sz="2000" b="1">
+              <a:rPr sz="2000" b="0">
                 <a:solidFill>
-                  <a:srgbClr val="0B308E"/>
+                  <a:srgbClr val="93A0B4"/>
                 </a:solidFill>
-                <a:latin typeface="Arial"/>
+                <a:latin typeface="Segoe UI Light"/>
               </a:rPr>
               <a:t>3</a:t>
             </a:r>
           </a:p>
         </p:txBody>
       </p:sp>
-      <p:pic>
-        <p:nvPicPr>
-          <p:cNvPr id="46" name="Picture 45" descr="a_01a451a5bc.png"/>
-          <p:cNvPicPr>
-            <a:picLocks noChangeAspect="1"/>
-          </p:cNvPicPr>
-          <p:nvPr/>
-        </p:nvPicPr>
-        <p:blipFill>
-          <a:blip r:embed="rId4"/>
-          <a:stretch>
-            <a:fillRect/>
-          </a:stretch>
-        </p:blipFill>
-        <p:spPr>
-          <a:xfrm>
-            <a:off x="1168400" y="3130657"/>
-            <a:ext cx="558800" cy="469685"/>
-          </a:xfrm>
-          <a:prstGeom prst="rect">
-            <a:avLst/>
-          </a:prstGeom>
-        </p:spPr>
-      </p:pic>
-      <p:sp>
-        <p:nvSpPr>
-          <p:cNvPr id="47" name="TextBox 46"/>
-          <p:cNvSpPr txBox="1"/>
-          <p:nvPr/>
-        </p:nvSpPr>
-        <p:spPr>
-          <a:xfrm>
-            <a:off x="1854200" y="3073400"/>
-            <a:ext cx="2032000" cy="584200"/>
-          </a:xfrm>
-          <a:prstGeom prst="rect">
-            <a:avLst/>
-          </a:prstGeom>
-          <a:noFill/>
-        </p:spPr>
-        <p:txBody>
-          <a:bodyPr wrap="square" lIns="0" rIns="0" tIns="0" bIns="0" anchor="ctr">
-            <a:spAutoFit/>
-          </a:bodyPr>
-          <a:lstStyle/>
-          <a:p>
-            <a:pPr algn="l">
-              <a:lnSpc>
-                <a:spcPct val="125000"/>
-              </a:lnSpc>
-              <a:spcAft>
-                <a:spcPts val="300"/>
-              </a:spcAft>
-            </a:pPr>
-            <a:r>
-              <a:rPr sz="1400" b="1">
-                <a:solidFill>
-                  <a:srgbClr val="0B308E"/>
-                </a:solidFill>
-                <a:latin typeface="Arial"/>
-              </a:rPr>
-              <a:t>Emergency</a:t>
-            </a:r>
-          </a:p>
-        </p:txBody>
-      </p:sp>
-      <p:sp>
-        <p:nvSpPr>
-          <p:cNvPr id="48" name="Oval 47"/>
+      <p:sp>
+        <p:nvSpPr>
+          <p:cNvPr id="49" name="Oval 48"/>
           <p:cNvSpPr/>
           <p:nvPr/>
         </p:nvSpPr>
         <p:spPr>
           <a:xfrm>
-            <a:off x="4318000" y="3302000"/>
-            <a:ext cx="114300" cy="114300"/>
+            <a:off x="1244600" y="3340100"/>
+            <a:ext cx="381000" cy="381000"/>
           </a:xfrm>
           <a:prstGeom prst="ellipse">
             <a:avLst/>
@@ -9360,16 +9569,82 @@
           </a:p>
         </p:txBody>
       </p:sp>
-      <p:sp>
-        <p:nvSpPr>
-          <p:cNvPr id="49" name="Oval 48"/>
+      <p:pic>
+        <p:nvPicPr>
+          <p:cNvPr id="50" name="Picture 49" descr="siren_white.png"/>
+          <p:cNvPicPr>
+            <a:picLocks noChangeAspect="1"/>
+          </p:cNvPicPr>
+          <p:nvPr/>
+        </p:nvPicPr>
+        <p:blipFill>
+          <a:blip r:embed="rId7"/>
+          <a:stretch>
+            <a:fillRect/>
+          </a:stretch>
+        </p:blipFill>
+        <p:spPr>
+          <a:xfrm>
+            <a:off x="1336040" y="3431540"/>
+            <a:ext cx="198120" cy="198120"/>
+          </a:xfrm>
+          <a:prstGeom prst="rect">
+            <a:avLst/>
+          </a:prstGeom>
+        </p:spPr>
+      </p:pic>
+      <p:sp>
+        <p:nvSpPr>
+          <p:cNvPr id="51" name="TextBox 50"/>
+          <p:cNvSpPr txBox="1"/>
+          <p:nvPr/>
+        </p:nvSpPr>
+        <p:spPr>
+          <a:xfrm>
+            <a:off x="1803400" y="3251200"/>
+            <a:ext cx="2032000" cy="558800"/>
+          </a:xfrm>
+          <a:prstGeom prst="rect">
+            <a:avLst/>
+          </a:prstGeom>
+          <a:noFill/>
+        </p:spPr>
+        <p:txBody>
+          <a:bodyPr wrap="square" lIns="0" rIns="0" tIns="0" bIns="0" anchor="ctr">
+            <a:spAutoFit/>
+          </a:bodyPr>
+          <a:lstStyle/>
+          <a:p>
+            <a:pPr algn="l">
+              <a:lnSpc>
+                <a:spcPct val="120000"/>
+              </a:lnSpc>
+              <a:spcAft>
+                <a:spcPts val="0"/>
+              </a:spcAft>
+            </a:pPr>
+            <a:r>
+              <a:rPr sz="1500" b="0">
+                <a:solidFill>
+                  <a:srgbClr val="0B308E"/>
+                </a:solidFill>
+                <a:latin typeface="Segoe UI Semibold"/>
+              </a:rPr>
+              <a:t>Emergency</a:t>
+            </a:r>
+          </a:p>
+        </p:txBody>
+      </p:sp>
+      <p:sp>
+        <p:nvSpPr>
+          <p:cNvPr id="52" name="Oval 51"/>
           <p:cNvSpPr/>
           <p:nvPr/>
         </p:nvSpPr>
         <p:spPr>
           <a:xfrm>
-            <a:off x="4508500" y="3302000"/>
-            <a:ext cx="114300" cy="114300"/>
+            <a:off x="4521200" y="3467100"/>
+            <a:ext cx="127000" cy="127000"/>
           </a:xfrm>
           <a:prstGeom prst="ellipse">
             <a:avLst/>
@@ -9406,14 +9681,58 @@
       </p:sp>
       <p:sp>
         <p:nvSpPr>
-          <p:cNvPr id="50" name="Oval 49"/>
+          <p:cNvPr id="53" name="Oval 52"/>
           <p:cNvSpPr/>
           <p:nvPr/>
         </p:nvSpPr>
         <p:spPr>
           <a:xfrm>
-            <a:off x="4699000" y="3302000"/>
-            <a:ext cx="114300" cy="114300"/>
+            <a:off x="4724400" y="3467100"/>
+            <a:ext cx="127000" cy="127000"/>
+          </a:xfrm>
+          <a:prstGeom prst="ellipse">
+            <a:avLst/>
+          </a:prstGeom>
+          <a:solidFill>
+            <a:srgbClr val="0B308E"/>
+          </a:solidFill>
+          <a:ln>
+            <a:noFill/>
+          </a:ln>
+          <a:effectLst/>
+        </p:spPr>
+        <p:style>
+          <a:lnRef idx="1">
+            <a:schemeClr val="accent1"/>
+          </a:lnRef>
+          <a:fillRef idx="3">
+            <a:schemeClr val="accent1"/>
+          </a:fillRef>
+          <a:effectRef idx="2">
+            <a:schemeClr val="accent1"/>
+          </a:effectRef>
+          <a:fontRef idx="minor">
+            <a:schemeClr val="lt1"/>
+          </a:fontRef>
+        </p:style>
+        <p:txBody>
+          <a:bodyPr rtlCol="0" anchor="ctr" wrap="square"/>
+          <a:lstStyle/>
+          <a:p>
+            <a:pPr algn="ctr"/>
+          </a:p>
+        </p:txBody>
+      </p:sp>
+      <p:sp>
+        <p:nvSpPr>
+          <p:cNvPr id="54" name="Oval 53"/>
+          <p:cNvSpPr/>
+          <p:nvPr/>
+        </p:nvSpPr>
+        <p:spPr>
+          <a:xfrm>
+            <a:off x="4927600" y="3467100"/>
+            <a:ext cx="127000" cy="127000"/>
           </a:xfrm>
           <a:prstGeom prst="ellipse">
             <a:avLst/>
@@ -9450,14 +9769,14 @@
       </p:sp>
       <p:sp>
         <p:nvSpPr>
-          <p:cNvPr id="51" name="Oval 50"/>
+          <p:cNvPr id="55" name="Oval 54"/>
           <p:cNvSpPr/>
           <p:nvPr/>
         </p:nvSpPr>
         <p:spPr>
           <a:xfrm>
-            <a:off x="5461000" y="3302000"/>
-            <a:ext cx="114300" cy="114300"/>
+            <a:off x="6019800" y="3467100"/>
+            <a:ext cx="127000" cy="127000"/>
           </a:xfrm>
           <a:prstGeom prst="ellipse">
             <a:avLst/>
@@ -9494,14 +9813,14 @@
       </p:sp>
       <p:sp>
         <p:nvSpPr>
-          <p:cNvPr id="52" name="Oval 51"/>
+          <p:cNvPr id="56" name="Oval 55"/>
           <p:cNvSpPr/>
           <p:nvPr/>
         </p:nvSpPr>
         <p:spPr>
           <a:xfrm>
-            <a:off x="5651500" y="3302000"/>
-            <a:ext cx="114300" cy="114300"/>
+            <a:off x="6223000" y="3467100"/>
+            <a:ext cx="127000" cy="127000"/>
           </a:xfrm>
           <a:prstGeom prst="ellipse">
             <a:avLst/>
@@ -9538,14 +9857,14 @@
       </p:sp>
       <p:sp>
         <p:nvSpPr>
-          <p:cNvPr id="53" name="Oval 52"/>
+          <p:cNvPr id="57" name="Oval 56"/>
           <p:cNvSpPr/>
           <p:nvPr/>
         </p:nvSpPr>
         <p:spPr>
           <a:xfrm>
-            <a:off x="5842000" y="3302000"/>
-            <a:ext cx="114300" cy="114300"/>
+            <a:off x="6426200" y="3467100"/>
+            <a:ext cx="127000" cy="127000"/>
           </a:xfrm>
           <a:prstGeom prst="ellipse">
             <a:avLst/>
@@ -9582,14 +9901,14 @@
       </p:sp>
       <p:sp>
         <p:nvSpPr>
-          <p:cNvPr id="54" name="Oval 53"/>
+          <p:cNvPr id="58" name="Oval 57"/>
           <p:cNvSpPr/>
           <p:nvPr/>
         </p:nvSpPr>
         <p:spPr>
           <a:xfrm>
-            <a:off x="6604000" y="3302000"/>
-            <a:ext cx="114300" cy="114300"/>
+            <a:off x="7518400" y="3467100"/>
+            <a:ext cx="127000" cy="127000"/>
           </a:xfrm>
           <a:prstGeom prst="ellipse">
             <a:avLst/>
@@ -9626,14 +9945,14 @@
       </p:sp>
       <p:sp>
         <p:nvSpPr>
-          <p:cNvPr id="55" name="Oval 54"/>
+          <p:cNvPr id="59" name="Oval 58"/>
           <p:cNvSpPr/>
           <p:nvPr/>
         </p:nvSpPr>
         <p:spPr>
           <a:xfrm>
-            <a:off x="6794500" y="3302000"/>
-            <a:ext cx="114300" cy="114300"/>
+            <a:off x="7721600" y="3467100"/>
+            <a:ext cx="127000" cy="127000"/>
           </a:xfrm>
           <a:prstGeom prst="ellipse">
             <a:avLst/>
@@ -9670,14 +9989,14 @@
       </p:sp>
       <p:sp>
         <p:nvSpPr>
-          <p:cNvPr id="56" name="Oval 55"/>
+          <p:cNvPr id="60" name="Oval 59"/>
           <p:cNvSpPr/>
           <p:nvPr/>
         </p:nvSpPr>
         <p:spPr>
           <a:xfrm>
-            <a:off x="6985000" y="3302000"/>
-            <a:ext cx="114300" cy="114300"/>
+            <a:off x="7924800" y="3467100"/>
+            <a:ext cx="127000" cy="127000"/>
           </a:xfrm>
           <a:prstGeom prst="ellipse">
             <a:avLst/>
@@ -9714,14 +10033,14 @@
       </p:sp>
       <p:sp>
         <p:nvSpPr>
-          <p:cNvPr id="57" name="TextBox 56"/>
+          <p:cNvPr id="61" name="TextBox 60"/>
           <p:cNvSpPr txBox="1"/>
           <p:nvPr/>
         </p:nvSpPr>
         <p:spPr>
           <a:xfrm>
-            <a:off x="7747000" y="3073400"/>
-            <a:ext cx="3759200" cy="584200"/>
+            <a:off x="8890000" y="3251200"/>
+            <a:ext cx="2616200" cy="558800"/>
           </a:xfrm>
           <a:prstGeom prst="rect">
             <a:avLst/>
@@ -9739,31 +10058,31 @@
                 <a:spcPct val="120000"/>
               </a:lnSpc>
               <a:spcAft>
-                <a:spcPts val="300"/>
+                <a:spcPts val="0"/>
               </a:spcAft>
             </a:pPr>
             <a:r>
-              <a:rPr sz="1050" b="0">
+              <a:rPr sz="1200" b="0">
                 <a:solidFill>
                   <a:srgbClr val="16213E"/>
                 </a:solidFill>
-                <a:latin typeface="Arial"/>
+                <a:latin typeface="Segoe UI"/>
               </a:rPr>
-              <a:t>The direct answer to the typhoon risk. Paid as standby readiness, not by usage.</a:t>
+              <a:t>Typhoon readiness</a:t>
             </a:r>
           </a:p>
         </p:txBody>
       </p:sp>
       <p:sp>
         <p:nvSpPr>
-          <p:cNvPr id="58" name="Rectangle 57"/>
+          <p:cNvPr id="62" name="Rectangle 61"/>
           <p:cNvSpPr/>
           <p:nvPr/>
         </p:nvSpPr>
         <p:spPr>
           <a:xfrm>
-            <a:off x="609600" y="3733800"/>
-            <a:ext cx="10972800" cy="584200"/>
+            <a:off x="609600" y="3886200"/>
+            <a:ext cx="10972800" cy="558800"/>
           </a:xfrm>
           <a:prstGeom prst="rect">
             <a:avLst/>
@@ -9800,14 +10119,14 @@
       </p:sp>
       <p:sp>
         <p:nvSpPr>
-          <p:cNvPr id="59" name="TextBox 58"/>
+          <p:cNvPr id="63" name="TextBox 62"/>
           <p:cNvSpPr txBox="1"/>
           <p:nvPr/>
         </p:nvSpPr>
         <p:spPr>
           <a:xfrm>
-            <a:off x="736600" y="3733800"/>
-            <a:ext cx="330200" cy="584200"/>
+            <a:off x="787400" y="3886200"/>
+            <a:ext cx="304800" cy="558800"/>
           </a:xfrm>
           <a:prstGeom prst="rect">
             <a:avLst/>
@@ -9822,100 +10141,34 @@
           <a:p>
             <a:pPr algn="ctr">
               <a:lnSpc>
-                <a:spcPct val="125000"/>
+                <a:spcPct val="120000"/>
               </a:lnSpc>
               <a:spcAft>
-                <a:spcPts val="300"/>
+                <a:spcPts val="0"/>
               </a:spcAft>
             </a:pPr>
             <a:r>
-              <a:rPr sz="2000" b="1">
+              <a:rPr sz="2000" b="0">
                 <a:solidFill>
-                  <a:srgbClr val="0B308E"/>
+                  <a:srgbClr val="93A0B4"/>
                 </a:solidFill>
-                <a:latin typeface="Arial"/>
+                <a:latin typeface="Segoe UI Light"/>
               </a:rPr>
               <a:t>4</a:t>
             </a:r>
           </a:p>
         </p:txBody>
       </p:sp>
-      <p:pic>
-        <p:nvPicPr>
-          <p:cNvPr id="60" name="Picture 59" descr="a_bd2b5a0db8.png"/>
-          <p:cNvPicPr>
-            <a:picLocks noChangeAspect="1"/>
-          </p:cNvPicPr>
-          <p:nvPr/>
-        </p:nvPicPr>
-        <p:blipFill>
-          <a:blip r:embed="rId5"/>
-          <a:stretch>
-            <a:fillRect/>
-          </a:stretch>
-        </p:blipFill>
-        <p:spPr>
-          <a:xfrm>
-            <a:off x="1227769" y="3784600"/>
-            <a:ext cx="440060" cy="482600"/>
-          </a:xfrm>
-          <a:prstGeom prst="rect">
-            <a:avLst/>
-          </a:prstGeom>
-        </p:spPr>
-      </p:pic>
-      <p:sp>
-        <p:nvSpPr>
-          <p:cNvPr id="61" name="TextBox 60"/>
-          <p:cNvSpPr txBox="1"/>
-          <p:nvPr/>
-        </p:nvSpPr>
-        <p:spPr>
-          <a:xfrm>
-            <a:off x="1854200" y="3733800"/>
-            <a:ext cx="2032000" cy="584200"/>
-          </a:xfrm>
-          <a:prstGeom prst="rect">
-            <a:avLst/>
-          </a:prstGeom>
-          <a:noFill/>
-        </p:spPr>
-        <p:txBody>
-          <a:bodyPr wrap="square" lIns="0" rIns="0" tIns="0" bIns="0" anchor="ctr">
-            <a:spAutoFit/>
-          </a:bodyPr>
-          <a:lstStyle/>
-          <a:p>
-            <a:pPr algn="l">
-              <a:lnSpc>
-                <a:spcPct val="125000"/>
-              </a:lnSpc>
-              <a:spcAft>
-                <a:spcPts val="300"/>
-              </a:spcAft>
-            </a:pPr>
-            <a:r>
-              <a:rPr sz="1400" b="1">
-                <a:solidFill>
-                  <a:srgbClr val="0B308E"/>
-                </a:solidFill>
-                <a:latin typeface="Arial"/>
-              </a:rPr>
-              <a:t>Police</a:t>
-            </a:r>
-          </a:p>
-        </p:txBody>
-      </p:sp>
-      <p:sp>
-        <p:nvSpPr>
-          <p:cNvPr id="62" name="Oval 61"/>
+      <p:sp>
+        <p:nvSpPr>
+          <p:cNvPr id="64" name="Oval 63"/>
           <p:cNvSpPr/>
           <p:nvPr/>
         </p:nvSpPr>
         <p:spPr>
           <a:xfrm>
-            <a:off x="4318000" y="3962400"/>
-            <a:ext cx="114300" cy="114300"/>
+            <a:off x="1244600" y="3975100"/>
+            <a:ext cx="381000" cy="381000"/>
           </a:xfrm>
           <a:prstGeom prst="ellipse">
             <a:avLst/>
@@ -9950,16 +10203,82 @@
           </a:p>
         </p:txBody>
       </p:sp>
-      <p:sp>
-        <p:nvSpPr>
-          <p:cNvPr id="63" name="Oval 62"/>
+      <p:pic>
+        <p:nvPicPr>
+          <p:cNvPr id="65" name="Picture 64" descr="shield_white.png"/>
+          <p:cNvPicPr>
+            <a:picLocks noChangeAspect="1"/>
+          </p:cNvPicPr>
+          <p:nvPr/>
+        </p:nvPicPr>
+        <p:blipFill>
+          <a:blip r:embed="rId8"/>
+          <a:stretch>
+            <a:fillRect/>
+          </a:stretch>
+        </p:blipFill>
+        <p:spPr>
+          <a:xfrm>
+            <a:off x="1336040" y="4066540"/>
+            <a:ext cx="198120" cy="198120"/>
+          </a:xfrm>
+          <a:prstGeom prst="rect">
+            <a:avLst/>
+          </a:prstGeom>
+        </p:spPr>
+      </p:pic>
+      <p:sp>
+        <p:nvSpPr>
+          <p:cNvPr id="66" name="TextBox 65"/>
+          <p:cNvSpPr txBox="1"/>
+          <p:nvPr/>
+        </p:nvSpPr>
+        <p:spPr>
+          <a:xfrm>
+            <a:off x="1803400" y="3886200"/>
+            <a:ext cx="2032000" cy="558800"/>
+          </a:xfrm>
+          <a:prstGeom prst="rect">
+            <a:avLst/>
+          </a:prstGeom>
+          <a:noFill/>
+        </p:spPr>
+        <p:txBody>
+          <a:bodyPr wrap="square" lIns="0" rIns="0" tIns="0" bIns="0" anchor="ctr">
+            <a:spAutoFit/>
+          </a:bodyPr>
+          <a:lstStyle/>
+          <a:p>
+            <a:pPr algn="l">
+              <a:lnSpc>
+                <a:spcPct val="120000"/>
+              </a:lnSpc>
+              <a:spcAft>
+                <a:spcPts val="0"/>
+              </a:spcAft>
+            </a:pPr>
+            <a:r>
+              <a:rPr sz="1500" b="0">
+                <a:solidFill>
+                  <a:srgbClr val="0B308E"/>
+                </a:solidFill>
+                <a:latin typeface="Segoe UI Semibold"/>
+              </a:rPr>
+              <a:t>Police</a:t>
+            </a:r>
+          </a:p>
+        </p:txBody>
+      </p:sp>
+      <p:sp>
+        <p:nvSpPr>
+          <p:cNvPr id="67" name="Oval 66"/>
           <p:cNvSpPr/>
           <p:nvPr/>
         </p:nvSpPr>
         <p:spPr>
           <a:xfrm>
-            <a:off x="4508500" y="3962400"/>
-            <a:ext cx="114300" cy="114300"/>
+            <a:off x="4521200" y="4102100"/>
+            <a:ext cx="127000" cy="127000"/>
           </a:xfrm>
           <a:prstGeom prst="ellipse">
             <a:avLst/>
@@ -9996,14 +10315,14 @@
       </p:sp>
       <p:sp>
         <p:nvSpPr>
-          <p:cNvPr id="64" name="Oval 63"/>
+          <p:cNvPr id="68" name="Oval 67"/>
           <p:cNvSpPr/>
           <p:nvPr/>
         </p:nvSpPr>
         <p:spPr>
           <a:xfrm>
-            <a:off x="4699000" y="3962400"/>
-            <a:ext cx="114300" cy="114300"/>
+            <a:off x="4724400" y="4102100"/>
+            <a:ext cx="127000" cy="127000"/>
           </a:xfrm>
           <a:prstGeom prst="ellipse">
             <a:avLst/>
@@ -10040,14 +10359,14 @@
       </p:sp>
       <p:sp>
         <p:nvSpPr>
-          <p:cNvPr id="65" name="Oval 64"/>
+          <p:cNvPr id="69" name="Oval 68"/>
           <p:cNvSpPr/>
           <p:nvPr/>
         </p:nvSpPr>
         <p:spPr>
           <a:xfrm>
-            <a:off x="5461000" y="3962400"/>
-            <a:ext cx="114300" cy="114300"/>
+            <a:off x="4927600" y="4102100"/>
+            <a:ext cx="127000" cy="127000"/>
           </a:xfrm>
           <a:prstGeom prst="ellipse">
             <a:avLst/>
@@ -10084,14 +10403,14 @@
       </p:sp>
       <p:sp>
         <p:nvSpPr>
-          <p:cNvPr id="66" name="Oval 65"/>
+          <p:cNvPr id="70" name="Oval 69"/>
           <p:cNvSpPr/>
           <p:nvPr/>
         </p:nvSpPr>
         <p:spPr>
           <a:xfrm>
-            <a:off x="5651500" y="3962400"/>
-            <a:ext cx="114300" cy="114300"/>
+            <a:off x="6019800" y="4102100"/>
+            <a:ext cx="127000" cy="127000"/>
           </a:xfrm>
           <a:prstGeom prst="ellipse">
             <a:avLst/>
@@ -10128,14 +10447,58 @@
       </p:sp>
       <p:sp>
         <p:nvSpPr>
-          <p:cNvPr id="67" name="Oval 66"/>
+          <p:cNvPr id="71" name="Oval 70"/>
           <p:cNvSpPr/>
           <p:nvPr/>
         </p:nvSpPr>
         <p:spPr>
           <a:xfrm>
-            <a:off x="5842000" y="3962400"/>
-            <a:ext cx="114300" cy="114300"/>
+            <a:off x="6223000" y="4102100"/>
+            <a:ext cx="127000" cy="127000"/>
+          </a:xfrm>
+          <a:prstGeom prst="ellipse">
+            <a:avLst/>
+          </a:prstGeom>
+          <a:solidFill>
+            <a:srgbClr val="0B308E"/>
+          </a:solidFill>
+          <a:ln>
+            <a:noFill/>
+          </a:ln>
+          <a:effectLst/>
+        </p:spPr>
+        <p:style>
+          <a:lnRef idx="1">
+            <a:schemeClr val="accent1"/>
+          </a:lnRef>
+          <a:fillRef idx="3">
+            <a:schemeClr val="accent1"/>
+          </a:fillRef>
+          <a:effectRef idx="2">
+            <a:schemeClr val="accent1"/>
+          </a:effectRef>
+          <a:fontRef idx="minor">
+            <a:schemeClr val="lt1"/>
+          </a:fontRef>
+        </p:style>
+        <p:txBody>
+          <a:bodyPr rtlCol="0" anchor="ctr" wrap="square"/>
+          <a:lstStyle/>
+          <a:p>
+            <a:pPr algn="ctr"/>
+          </a:p>
+        </p:txBody>
+      </p:sp>
+      <p:sp>
+        <p:nvSpPr>
+          <p:cNvPr id="72" name="Oval 71"/>
+          <p:cNvSpPr/>
+          <p:nvPr/>
+        </p:nvSpPr>
+        <p:spPr>
+          <a:xfrm>
+            <a:off x="6426200" y="4102100"/>
+            <a:ext cx="127000" cy="127000"/>
           </a:xfrm>
           <a:prstGeom prst="ellipse">
             <a:avLst/>
@@ -10172,14 +10535,14 @@
       </p:sp>
       <p:sp>
         <p:nvSpPr>
-          <p:cNvPr id="68" name="Oval 67"/>
+          <p:cNvPr id="73" name="Oval 72"/>
           <p:cNvSpPr/>
           <p:nvPr/>
         </p:nvSpPr>
         <p:spPr>
           <a:xfrm>
-            <a:off x="6604000" y="3962400"/>
-            <a:ext cx="114300" cy="114300"/>
+            <a:off x="7518400" y="4102100"/>
+            <a:ext cx="127000" cy="127000"/>
           </a:xfrm>
           <a:prstGeom prst="ellipse">
             <a:avLst/>
@@ -10216,14 +10579,14 @@
       </p:sp>
       <p:sp>
         <p:nvSpPr>
-          <p:cNvPr id="69" name="Oval 68"/>
+          <p:cNvPr id="74" name="Oval 73"/>
           <p:cNvSpPr/>
           <p:nvPr/>
         </p:nvSpPr>
         <p:spPr>
           <a:xfrm>
-            <a:off x="6794500" y="3962400"/>
-            <a:ext cx="114300" cy="114300"/>
+            <a:off x="7721600" y="4102100"/>
+            <a:ext cx="127000" cy="127000"/>
           </a:xfrm>
           <a:prstGeom prst="ellipse">
             <a:avLst/>
@@ -10260,14 +10623,14 @@
       </p:sp>
       <p:sp>
         <p:nvSpPr>
-          <p:cNvPr id="70" name="Oval 69"/>
+          <p:cNvPr id="75" name="Oval 74"/>
           <p:cNvSpPr/>
           <p:nvPr/>
         </p:nvSpPr>
         <p:spPr>
           <a:xfrm>
-            <a:off x="6985000" y="3962400"/>
-            <a:ext cx="114300" cy="114300"/>
+            <a:off x="7924800" y="4102100"/>
+            <a:ext cx="127000" cy="127000"/>
           </a:xfrm>
           <a:prstGeom prst="ellipse">
             <a:avLst/>
@@ -10304,14 +10667,14 @@
       </p:sp>
       <p:sp>
         <p:nvSpPr>
-          <p:cNvPr id="71" name="TextBox 70"/>
+          <p:cNvPr id="76" name="TextBox 75"/>
           <p:cNvSpPr txBox="1"/>
           <p:nvPr/>
         </p:nvSpPr>
         <p:spPr>
           <a:xfrm>
-            <a:off x="7747000" y="3733800"/>
-            <a:ext cx="3759200" cy="584200"/>
+            <a:off x="8890000" y="3886200"/>
+            <a:ext cx="2616200" cy="558800"/>
           </a:xfrm>
           <a:prstGeom prst="rect">
             <a:avLst/>
@@ -10329,31 +10692,31 @@
                 <a:spcPct val="120000"/>
               </a:lnSpc>
               <a:spcAft>
-                <a:spcPts val="300"/>
+                <a:spcPts val="0"/>
               </a:spcAft>
             </a:pPr>
             <a:r>
-              <a:rPr sz="1050" b="0">
+              <a:rPr sz="1200" b="0">
                 <a:solidFill>
                   <a:srgbClr val="16213E"/>
                 </a:solidFill>
-                <a:latin typeface="Arial"/>
+                <a:latin typeface="Segoe UI"/>
               </a:rPr>
-              <a:t>Large user base, but DMR and TETRA are already in service. The entry point is interoperability.</a:t>
+              <a:t>Interoperate, not replace</a:t>
             </a:r>
           </a:p>
         </p:txBody>
       </p:sp>
       <p:sp>
         <p:nvSpPr>
-          <p:cNvPr id="72" name="Rectangle 71"/>
+          <p:cNvPr id="77" name="Rectangle 76"/>
           <p:cNvSpPr/>
           <p:nvPr/>
         </p:nvSpPr>
         <p:spPr>
           <a:xfrm>
-            <a:off x="609600" y="4394200"/>
-            <a:ext cx="10972800" cy="584200"/>
+            <a:off x="609600" y="4521200"/>
+            <a:ext cx="10972800" cy="558800"/>
           </a:xfrm>
           <a:prstGeom prst="rect">
             <a:avLst/>
@@ -10390,14 +10753,14 @@
       </p:sp>
       <p:sp>
         <p:nvSpPr>
-          <p:cNvPr id="73" name="TextBox 72"/>
+          <p:cNvPr id="78" name="TextBox 77"/>
           <p:cNvSpPr txBox="1"/>
           <p:nvPr/>
         </p:nvSpPr>
         <p:spPr>
           <a:xfrm>
-            <a:off x="736600" y="4394200"/>
-            <a:ext cx="330200" cy="584200"/>
+            <a:off x="787400" y="4521200"/>
+            <a:ext cx="304800" cy="558800"/>
           </a:xfrm>
           <a:prstGeom prst="rect">
             <a:avLst/>
@@ -10412,100 +10775,34 @@
           <a:p>
             <a:pPr algn="ctr">
               <a:lnSpc>
-                <a:spcPct val="125000"/>
+                <a:spcPct val="120000"/>
               </a:lnSpc>
               <a:spcAft>
-                <a:spcPts val="300"/>
+                <a:spcPts val="0"/>
               </a:spcAft>
             </a:pPr>
             <a:r>
-              <a:rPr sz="2000" b="1">
+              <a:rPr sz="2000" b="0">
                 <a:solidFill>
-                  <a:srgbClr val="0B308E"/>
+                  <a:srgbClr val="93A0B4"/>
                 </a:solidFill>
-                <a:latin typeface="Arial"/>
+                <a:latin typeface="Segoe UI Light"/>
               </a:rPr>
               <a:t>5</a:t>
             </a:r>
           </a:p>
         </p:txBody>
       </p:sp>
-      <p:pic>
-        <p:nvPicPr>
-          <p:cNvPr id="74" name="Picture 73" descr="a_033b685a7a.png"/>
-          <p:cNvPicPr>
-            <a:picLocks noChangeAspect="1"/>
-          </p:cNvPicPr>
-          <p:nvPr/>
-        </p:nvPicPr>
-        <p:blipFill>
-          <a:blip r:embed="rId6"/>
-          <a:stretch>
-            <a:fillRect/>
-          </a:stretch>
-        </p:blipFill>
-        <p:spPr>
-          <a:xfrm>
-            <a:off x="1168400" y="4490199"/>
-            <a:ext cx="558800" cy="392201"/>
-          </a:xfrm>
-          <a:prstGeom prst="rect">
-            <a:avLst/>
-          </a:prstGeom>
-        </p:spPr>
-      </p:pic>
-      <p:sp>
-        <p:nvSpPr>
-          <p:cNvPr id="75" name="TextBox 74"/>
-          <p:cNvSpPr txBox="1"/>
-          <p:nvPr/>
-        </p:nvSpPr>
-        <p:spPr>
-          <a:xfrm>
-            <a:off x="1854200" y="4394200"/>
-            <a:ext cx="2032000" cy="584200"/>
-          </a:xfrm>
-          <a:prstGeom prst="rect">
-            <a:avLst/>
-          </a:prstGeom>
-          <a:noFill/>
-        </p:spPr>
-        <p:txBody>
-          <a:bodyPr wrap="square" lIns="0" rIns="0" tIns="0" bIns="0" anchor="ctr">
-            <a:spAutoFit/>
-          </a:bodyPr>
-          <a:lstStyle/>
-          <a:p>
-            <a:pPr algn="l">
-              <a:lnSpc>
-                <a:spcPct val="125000"/>
-              </a:lnSpc>
-              <a:spcAft>
-                <a:spcPts val="300"/>
-              </a:spcAft>
-            </a:pPr>
-            <a:r>
-              <a:rPr sz="1400" b="1">
-                <a:solidFill>
-                  <a:srgbClr val="0B308E"/>
-                </a:solidFill>
-                <a:latin typeface="Arial"/>
-              </a:rPr>
-              <a:t>Rail</a:t>
-            </a:r>
-          </a:p>
-        </p:txBody>
-      </p:sp>
-      <p:sp>
-        <p:nvSpPr>
-          <p:cNvPr id="76" name="Oval 75"/>
+      <p:sp>
+        <p:nvSpPr>
+          <p:cNvPr id="79" name="Oval 78"/>
           <p:cNvSpPr/>
           <p:nvPr/>
         </p:nvSpPr>
         <p:spPr>
           <a:xfrm>
-            <a:off x="4318000" y="4622800"/>
-            <a:ext cx="114300" cy="114300"/>
+            <a:off x="1244600" y="4610100"/>
+            <a:ext cx="381000" cy="381000"/>
           </a:xfrm>
           <a:prstGeom prst="ellipse">
             <a:avLst/>
@@ -10540,16 +10837,82 @@
           </a:p>
         </p:txBody>
       </p:sp>
-      <p:sp>
-        <p:nvSpPr>
-          <p:cNvPr id="77" name="Oval 76"/>
+      <p:pic>
+        <p:nvPicPr>
+          <p:cNvPr id="80" name="Picture 79" descr="train-front_white.png"/>
+          <p:cNvPicPr>
+            <a:picLocks noChangeAspect="1"/>
+          </p:cNvPicPr>
+          <p:nvPr/>
+        </p:nvPicPr>
+        <p:blipFill>
+          <a:blip r:embed="rId9"/>
+          <a:stretch>
+            <a:fillRect/>
+          </a:stretch>
+        </p:blipFill>
+        <p:spPr>
+          <a:xfrm>
+            <a:off x="1336040" y="4701540"/>
+            <a:ext cx="198120" cy="198120"/>
+          </a:xfrm>
+          <a:prstGeom prst="rect">
+            <a:avLst/>
+          </a:prstGeom>
+        </p:spPr>
+      </p:pic>
+      <p:sp>
+        <p:nvSpPr>
+          <p:cNvPr id="81" name="TextBox 80"/>
+          <p:cNvSpPr txBox="1"/>
+          <p:nvPr/>
+        </p:nvSpPr>
+        <p:spPr>
+          <a:xfrm>
+            <a:off x="1803400" y="4521200"/>
+            <a:ext cx="2032000" cy="558800"/>
+          </a:xfrm>
+          <a:prstGeom prst="rect">
+            <a:avLst/>
+          </a:prstGeom>
+          <a:noFill/>
+        </p:spPr>
+        <p:txBody>
+          <a:bodyPr wrap="square" lIns="0" rIns="0" tIns="0" bIns="0" anchor="ctr">
+            <a:spAutoFit/>
+          </a:bodyPr>
+          <a:lstStyle/>
+          <a:p>
+            <a:pPr algn="l">
+              <a:lnSpc>
+                <a:spcPct val="120000"/>
+              </a:lnSpc>
+              <a:spcAft>
+                <a:spcPts val="0"/>
+              </a:spcAft>
+            </a:pPr>
+            <a:r>
+              <a:rPr sz="1500" b="0">
+                <a:solidFill>
+                  <a:srgbClr val="0B308E"/>
+                </a:solidFill>
+                <a:latin typeface="Segoe UI Semibold"/>
+              </a:rPr>
+              <a:t>Rail</a:t>
+            </a:r>
+          </a:p>
+        </p:txBody>
+      </p:sp>
+      <p:sp>
+        <p:nvSpPr>
+          <p:cNvPr id="82" name="Oval 81"/>
           <p:cNvSpPr/>
           <p:nvPr/>
         </p:nvSpPr>
         <p:spPr>
           <a:xfrm>
-            <a:off x="4508500" y="4622800"/>
-            <a:ext cx="114300" cy="114300"/>
+            <a:off x="4521200" y="4737100"/>
+            <a:ext cx="127000" cy="127000"/>
           </a:xfrm>
           <a:prstGeom prst="ellipse">
             <a:avLst/>
@@ -10586,14 +10949,58 @@
       </p:sp>
       <p:sp>
         <p:nvSpPr>
-          <p:cNvPr id="78" name="Oval 77"/>
+          <p:cNvPr id="83" name="Oval 82"/>
           <p:cNvSpPr/>
           <p:nvPr/>
         </p:nvSpPr>
         <p:spPr>
           <a:xfrm>
-            <a:off x="4699000" y="4622800"/>
-            <a:ext cx="114300" cy="114300"/>
+            <a:off x="4724400" y="4737100"/>
+            <a:ext cx="127000" cy="127000"/>
+          </a:xfrm>
+          <a:prstGeom prst="ellipse">
+            <a:avLst/>
+          </a:prstGeom>
+          <a:solidFill>
+            <a:srgbClr val="0B308E"/>
+          </a:solidFill>
+          <a:ln>
+            <a:noFill/>
+          </a:ln>
+          <a:effectLst/>
+        </p:spPr>
+        <p:style>
+          <a:lnRef idx="1">
+            <a:schemeClr val="accent1"/>
+          </a:lnRef>
+          <a:fillRef idx="3">
+            <a:schemeClr val="accent1"/>
+          </a:fillRef>
+          <a:effectRef idx="2">
+            <a:schemeClr val="accent1"/>
+          </a:effectRef>
+          <a:fontRef idx="minor">
+            <a:schemeClr val="lt1"/>
+          </a:fontRef>
+        </p:style>
+        <p:txBody>
+          <a:bodyPr rtlCol="0" anchor="ctr" wrap="square"/>
+          <a:lstStyle/>
+          <a:p>
+            <a:pPr algn="ctr"/>
+          </a:p>
+        </p:txBody>
+      </p:sp>
+      <p:sp>
+        <p:nvSpPr>
+          <p:cNvPr id="84" name="Oval 83"/>
+          <p:cNvSpPr/>
+          <p:nvPr/>
+        </p:nvSpPr>
+        <p:spPr>
+          <a:xfrm>
+            <a:off x="4927600" y="4737100"/>
+            <a:ext cx="127000" cy="127000"/>
           </a:xfrm>
           <a:prstGeom prst="ellipse">
             <a:avLst/>
@@ -10630,14 +11037,14 @@
       </p:sp>
       <p:sp>
         <p:nvSpPr>
-          <p:cNvPr id="79" name="Oval 78"/>
+          <p:cNvPr id="85" name="Oval 84"/>
           <p:cNvSpPr/>
           <p:nvPr/>
         </p:nvSpPr>
         <p:spPr>
           <a:xfrm>
-            <a:off x="5461000" y="4622800"/>
-            <a:ext cx="114300" cy="114300"/>
+            <a:off x="6019800" y="4737100"/>
+            <a:ext cx="127000" cy="127000"/>
           </a:xfrm>
           <a:prstGeom prst="ellipse">
             <a:avLst/>
@@ -10674,14 +11081,14 @@
       </p:sp>
       <p:sp>
         <p:nvSpPr>
-          <p:cNvPr id="80" name="Oval 79"/>
+          <p:cNvPr id="86" name="Oval 85"/>
           <p:cNvSpPr/>
           <p:nvPr/>
         </p:nvSpPr>
         <p:spPr>
           <a:xfrm>
-            <a:off x="5651500" y="4622800"/>
-            <a:ext cx="114300" cy="114300"/>
+            <a:off x="6223000" y="4737100"/>
+            <a:ext cx="127000" cy="127000"/>
           </a:xfrm>
           <a:prstGeom prst="ellipse">
             <a:avLst/>
@@ -10718,14 +11125,14 @@
       </p:sp>
       <p:sp>
         <p:nvSpPr>
-          <p:cNvPr id="81" name="Oval 80"/>
+          <p:cNvPr id="87" name="Oval 86"/>
           <p:cNvSpPr/>
           <p:nvPr/>
         </p:nvSpPr>
         <p:spPr>
           <a:xfrm>
-            <a:off x="5842000" y="4622800"/>
-            <a:ext cx="114300" cy="114300"/>
+            <a:off x="6426200" y="4737100"/>
+            <a:ext cx="127000" cy="127000"/>
           </a:xfrm>
           <a:prstGeom prst="ellipse">
             <a:avLst/>
@@ -10762,14 +11169,14 @@
       </p:sp>
       <p:sp>
         <p:nvSpPr>
-          <p:cNvPr id="82" name="Oval 81"/>
+          <p:cNvPr id="88" name="Oval 87"/>
           <p:cNvSpPr/>
           <p:nvPr/>
         </p:nvSpPr>
         <p:spPr>
           <a:xfrm>
-            <a:off x="6604000" y="4622800"/>
-            <a:ext cx="114300" cy="114300"/>
+            <a:off x="7518400" y="4737100"/>
+            <a:ext cx="127000" cy="127000"/>
           </a:xfrm>
           <a:prstGeom prst="ellipse">
             <a:avLst/>
@@ -10806,14 +11213,14 @@
       </p:sp>
       <p:sp>
         <p:nvSpPr>
-          <p:cNvPr id="83" name="Oval 82"/>
+          <p:cNvPr id="89" name="Oval 88"/>
           <p:cNvSpPr/>
           <p:nvPr/>
         </p:nvSpPr>
         <p:spPr>
           <a:xfrm>
-            <a:off x="6794500" y="4622800"/>
-            <a:ext cx="114300" cy="114300"/>
+            <a:off x="7721600" y="4737100"/>
+            <a:ext cx="127000" cy="127000"/>
           </a:xfrm>
           <a:prstGeom prst="ellipse">
             <a:avLst/>
@@ -10850,14 +11257,14 @@
       </p:sp>
       <p:sp>
         <p:nvSpPr>
-          <p:cNvPr id="84" name="Oval 83"/>
+          <p:cNvPr id="90" name="Oval 89"/>
           <p:cNvSpPr/>
           <p:nvPr/>
         </p:nvSpPr>
         <p:spPr>
           <a:xfrm>
-            <a:off x="6985000" y="4622800"/>
-            <a:ext cx="114300" cy="114300"/>
+            <a:off x="7924800" y="4737100"/>
+            <a:ext cx="127000" cy="127000"/>
           </a:xfrm>
           <a:prstGeom prst="ellipse">
             <a:avLst/>
@@ -10894,14 +11301,14 @@
       </p:sp>
       <p:sp>
         <p:nvSpPr>
-          <p:cNvPr id="85" name="TextBox 84"/>
+          <p:cNvPr id="91" name="TextBox 90"/>
           <p:cNvSpPr txBox="1"/>
           <p:nvPr/>
         </p:nvSpPr>
         <p:spPr>
           <a:xfrm>
-            <a:off x="7747000" y="4394200"/>
-            <a:ext cx="3759200" cy="584200"/>
+            <a:off x="8890000" y="4521200"/>
+            <a:ext cx="2616200" cy="558800"/>
           </a:xfrm>
           <a:prstGeom prst="rect">
             <a:avLst/>
@@ -10919,31 +11326,31 @@
                 <a:spcPct val="120000"/>
               </a:lnSpc>
               <a:spcAft>
-                <a:spcPts val="300"/>
+                <a:spcPts val="0"/>
               </a:spcAft>
             </a:pPr>
             <a:r>
-              <a:rPr sz="1050" b="0">
+              <a:rPr sz="1200" b="0">
                 <a:solidFill>
                   <a:srgbClr val="16213E"/>
                 </a:solidFill>
-                <a:latin typeface="Arial"/>
+                <a:latin typeface="Segoe UI"/>
               </a:rPr>
-              <a:t>Corridor coverage suits the band, but the rail network is limited and projects run long.</a:t>
+              <a:t>Long project cycles</a:t>
             </a:r>
           </a:p>
         </p:txBody>
       </p:sp>
       <p:sp>
         <p:nvSpPr>
-          <p:cNvPr id="86" name="Rectangle 85"/>
+          <p:cNvPr id="92" name="Rectangle 91"/>
           <p:cNvSpPr/>
           <p:nvPr/>
         </p:nvSpPr>
         <p:spPr>
           <a:xfrm>
-            <a:off x="609600" y="5054600"/>
-            <a:ext cx="10972800" cy="584200"/>
+            <a:off x="609600" y="5156200"/>
+            <a:ext cx="10972800" cy="558800"/>
           </a:xfrm>
           <a:prstGeom prst="rect">
             <a:avLst/>
@@ -10980,14 +11387,14 @@
       </p:sp>
       <p:sp>
         <p:nvSpPr>
-          <p:cNvPr id="87" name="TextBox 86"/>
+          <p:cNvPr id="93" name="TextBox 92"/>
           <p:cNvSpPr txBox="1"/>
           <p:nvPr/>
         </p:nvSpPr>
         <p:spPr>
           <a:xfrm>
-            <a:off x="736600" y="5054600"/>
-            <a:ext cx="330200" cy="584200"/>
+            <a:off x="787400" y="5156200"/>
+            <a:ext cx="304800" cy="558800"/>
           </a:xfrm>
           <a:prstGeom prst="rect">
             <a:avLst/>
@@ -11002,100 +11409,34 @@
           <a:p>
             <a:pPr algn="ctr">
               <a:lnSpc>
-                <a:spcPct val="125000"/>
+                <a:spcPct val="120000"/>
               </a:lnSpc>
               <a:spcAft>
-                <a:spcPts val="300"/>
+                <a:spcPts val="0"/>
               </a:spcAft>
             </a:pPr>
             <a:r>
-              <a:rPr sz="2000" b="1">
+              <a:rPr sz="2000" b="0">
                 <a:solidFill>
-                  <a:srgbClr val="0B308E"/>
+                  <a:srgbClr val="93A0B4"/>
                 </a:solidFill>
-                <a:latin typeface="Arial"/>
+                <a:latin typeface="Segoe UI Light"/>
               </a:rPr>
               <a:t>6</a:t>
             </a:r>
           </a:p>
         </p:txBody>
       </p:sp>
-      <p:pic>
-        <p:nvPicPr>
-          <p:cNvPr id="88" name="Picture 87" descr="a_cf44be03ed.png"/>
-          <p:cNvPicPr>
-            <a:picLocks noChangeAspect="1"/>
-          </p:cNvPicPr>
-          <p:nvPr/>
-        </p:nvPicPr>
-        <p:blipFill>
-          <a:blip r:embed="rId7"/>
-          <a:stretch>
-            <a:fillRect/>
-          </a:stretch>
-        </p:blipFill>
-        <p:spPr>
-          <a:xfrm>
-            <a:off x="1168400" y="5145692"/>
-            <a:ext cx="558800" cy="402014"/>
-          </a:xfrm>
-          <a:prstGeom prst="rect">
-            <a:avLst/>
-          </a:prstGeom>
-        </p:spPr>
-      </p:pic>
-      <p:sp>
-        <p:nvSpPr>
-          <p:cNvPr id="89" name="TextBox 88"/>
-          <p:cNvSpPr txBox="1"/>
-          <p:nvPr/>
-        </p:nvSpPr>
-        <p:spPr>
-          <a:xfrm>
-            <a:off x="1854200" y="5054600"/>
-            <a:ext cx="2032000" cy="584200"/>
-          </a:xfrm>
-          <a:prstGeom prst="rect">
-            <a:avLst/>
-          </a:prstGeom>
-          <a:noFill/>
-        </p:spPr>
-        <p:txBody>
-          <a:bodyPr wrap="square" lIns="0" rIns="0" tIns="0" bIns="0" anchor="ctr">
-            <a:spAutoFit/>
-          </a:bodyPr>
-          <a:lstStyle/>
-          <a:p>
-            <a:pPr algn="l">
-              <a:lnSpc>
-                <a:spcPct val="125000"/>
-              </a:lnSpc>
-              <a:spcAft>
-                <a:spcPts val="300"/>
-              </a:spcAft>
-            </a:pPr>
-            <a:r>
-              <a:rPr sz="1400" b="1">
-                <a:solidFill>
-                  <a:srgbClr val="0B308E"/>
-                </a:solidFill>
-                <a:latin typeface="Arial"/>
-              </a:rPr>
-              <a:t>Port</a:t>
-            </a:r>
-          </a:p>
-        </p:txBody>
-      </p:sp>
-      <p:sp>
-        <p:nvSpPr>
-          <p:cNvPr id="90" name="Oval 89"/>
+      <p:sp>
+        <p:nvSpPr>
+          <p:cNvPr id="94" name="Oval 93"/>
           <p:cNvSpPr/>
           <p:nvPr/>
         </p:nvSpPr>
         <p:spPr>
           <a:xfrm>
-            <a:off x="4318000" y="5283200"/>
-            <a:ext cx="114300" cy="114300"/>
+            <a:off x="1244600" y="5245100"/>
+            <a:ext cx="381000" cy="381000"/>
           </a:xfrm>
           <a:prstGeom prst="ellipse">
             <a:avLst/>
@@ -11130,16 +11471,82 @@
           </a:p>
         </p:txBody>
       </p:sp>
-      <p:sp>
-        <p:nvSpPr>
-          <p:cNvPr id="91" name="Oval 90"/>
+      <p:pic>
+        <p:nvPicPr>
+          <p:cNvPr id="95" name="Picture 94" descr="ship_white.png"/>
+          <p:cNvPicPr>
+            <a:picLocks noChangeAspect="1"/>
+          </p:cNvPicPr>
+          <p:nvPr/>
+        </p:nvPicPr>
+        <p:blipFill>
+          <a:blip r:embed="rId10"/>
+          <a:stretch>
+            <a:fillRect/>
+          </a:stretch>
+        </p:blipFill>
+        <p:spPr>
+          <a:xfrm>
+            <a:off x="1336040" y="5336540"/>
+            <a:ext cx="198120" cy="198120"/>
+          </a:xfrm>
+          <a:prstGeom prst="rect">
+            <a:avLst/>
+          </a:prstGeom>
+        </p:spPr>
+      </p:pic>
+      <p:sp>
+        <p:nvSpPr>
+          <p:cNvPr id="96" name="TextBox 95"/>
+          <p:cNvSpPr txBox="1"/>
+          <p:nvPr/>
+        </p:nvSpPr>
+        <p:spPr>
+          <a:xfrm>
+            <a:off x="1803400" y="5156200"/>
+            <a:ext cx="2032000" cy="558800"/>
+          </a:xfrm>
+          <a:prstGeom prst="rect">
+            <a:avLst/>
+          </a:prstGeom>
+          <a:noFill/>
+        </p:spPr>
+        <p:txBody>
+          <a:bodyPr wrap="square" lIns="0" rIns="0" tIns="0" bIns="0" anchor="ctr">
+            <a:spAutoFit/>
+          </a:bodyPr>
+          <a:lstStyle/>
+          <a:p>
+            <a:pPr algn="l">
+              <a:lnSpc>
+                <a:spcPct val="120000"/>
+              </a:lnSpc>
+              <a:spcAft>
+                <a:spcPts val="0"/>
+              </a:spcAft>
+            </a:pPr>
+            <a:r>
+              <a:rPr sz="1500" b="0">
+                <a:solidFill>
+                  <a:srgbClr val="0B308E"/>
+                </a:solidFill>
+                <a:latin typeface="Segoe UI Semibold"/>
+              </a:rPr>
+              <a:t>Port</a:t>
+            </a:r>
+          </a:p>
+        </p:txBody>
+      </p:sp>
+      <p:sp>
+        <p:nvSpPr>
+          <p:cNvPr id="97" name="Oval 96"/>
           <p:cNvSpPr/>
           <p:nvPr/>
         </p:nvSpPr>
         <p:spPr>
           <a:xfrm>
-            <a:off x="4508500" y="5283200"/>
-            <a:ext cx="114300" cy="114300"/>
+            <a:off x="4521200" y="5372100"/>
+            <a:ext cx="127000" cy="127000"/>
           </a:xfrm>
           <a:prstGeom prst="ellipse">
             <a:avLst/>
@@ -11176,14 +11583,58 @@
       </p:sp>
       <p:sp>
         <p:nvSpPr>
-          <p:cNvPr id="92" name="Oval 91"/>
+          <p:cNvPr id="98" name="Oval 97"/>
           <p:cNvSpPr/>
           <p:nvPr/>
         </p:nvSpPr>
         <p:spPr>
           <a:xfrm>
-            <a:off x="4699000" y="5283200"/>
-            <a:ext cx="114300" cy="114300"/>
+            <a:off x="4724400" y="5372100"/>
+            <a:ext cx="127000" cy="127000"/>
+          </a:xfrm>
+          <a:prstGeom prst="ellipse">
+            <a:avLst/>
+          </a:prstGeom>
+          <a:solidFill>
+            <a:srgbClr val="0B308E"/>
+          </a:solidFill>
+          <a:ln>
+            <a:noFill/>
+          </a:ln>
+          <a:effectLst/>
+        </p:spPr>
+        <p:style>
+          <a:lnRef idx="1">
+            <a:schemeClr val="accent1"/>
+          </a:lnRef>
+          <a:fillRef idx="3">
+            <a:schemeClr val="accent1"/>
+          </a:fillRef>
+          <a:effectRef idx="2">
+            <a:schemeClr val="accent1"/>
+          </a:effectRef>
+          <a:fontRef idx="minor">
+            <a:schemeClr val="lt1"/>
+          </a:fontRef>
+        </p:style>
+        <p:txBody>
+          <a:bodyPr rtlCol="0" anchor="ctr" wrap="square"/>
+          <a:lstStyle/>
+          <a:p>
+            <a:pPr algn="ctr"/>
+          </a:p>
+        </p:txBody>
+      </p:sp>
+      <p:sp>
+        <p:nvSpPr>
+          <p:cNvPr id="99" name="Oval 98"/>
+          <p:cNvSpPr/>
+          <p:nvPr/>
+        </p:nvSpPr>
+        <p:spPr>
+          <a:xfrm>
+            <a:off x="4927600" y="5372100"/>
+            <a:ext cx="127000" cy="127000"/>
           </a:xfrm>
           <a:prstGeom prst="ellipse">
             <a:avLst/>
@@ -11220,14 +11671,14 @@
       </p:sp>
       <p:sp>
         <p:nvSpPr>
-          <p:cNvPr id="93" name="Oval 92"/>
+          <p:cNvPr id="100" name="Oval 99"/>
           <p:cNvSpPr/>
           <p:nvPr/>
         </p:nvSpPr>
         <p:spPr>
           <a:xfrm>
-            <a:off x="5461000" y="5283200"/>
-            <a:ext cx="114300" cy="114300"/>
+            <a:off x="6019800" y="5372100"/>
+            <a:ext cx="127000" cy="127000"/>
           </a:xfrm>
           <a:prstGeom prst="ellipse">
             <a:avLst/>
@@ -11264,14 +11715,14 @@
       </p:sp>
       <p:sp>
         <p:nvSpPr>
-          <p:cNvPr id="94" name="Oval 93"/>
+          <p:cNvPr id="101" name="Oval 100"/>
           <p:cNvSpPr/>
           <p:nvPr/>
         </p:nvSpPr>
         <p:spPr>
           <a:xfrm>
-            <a:off x="5651500" y="5283200"/>
-            <a:ext cx="114300" cy="114300"/>
+            <a:off x="6223000" y="5372100"/>
+            <a:ext cx="127000" cy="127000"/>
           </a:xfrm>
           <a:prstGeom prst="ellipse">
             <a:avLst/>
@@ -11308,14 +11759,14 @@
       </p:sp>
       <p:sp>
         <p:nvSpPr>
-          <p:cNvPr id="95" name="Oval 94"/>
+          <p:cNvPr id="102" name="Oval 101"/>
           <p:cNvSpPr/>
           <p:nvPr/>
         </p:nvSpPr>
         <p:spPr>
           <a:xfrm>
-            <a:off x="5842000" y="5283200"/>
-            <a:ext cx="114300" cy="114300"/>
+            <a:off x="6426200" y="5372100"/>
+            <a:ext cx="127000" cy="127000"/>
           </a:xfrm>
           <a:prstGeom prst="ellipse">
             <a:avLst/>
@@ -11352,14 +11803,14 @@
       </p:sp>
       <p:sp>
         <p:nvSpPr>
-          <p:cNvPr id="96" name="Oval 95"/>
+          <p:cNvPr id="103" name="Oval 102"/>
           <p:cNvSpPr/>
           <p:nvPr/>
         </p:nvSpPr>
         <p:spPr>
           <a:xfrm>
-            <a:off x="6604000" y="5283200"/>
-            <a:ext cx="114300" cy="114300"/>
+            <a:off x="7518400" y="5372100"/>
+            <a:ext cx="127000" cy="127000"/>
           </a:xfrm>
           <a:prstGeom prst="ellipse">
             <a:avLst/>
@@ -11396,14 +11847,14 @@
       </p:sp>
       <p:sp>
         <p:nvSpPr>
-          <p:cNvPr id="97" name="Oval 96"/>
+          <p:cNvPr id="104" name="Oval 103"/>
           <p:cNvSpPr/>
           <p:nvPr/>
         </p:nvSpPr>
         <p:spPr>
           <a:xfrm>
-            <a:off x="6794500" y="5283200"/>
-            <a:ext cx="114300" cy="114300"/>
+            <a:off x="7721600" y="5372100"/>
+            <a:ext cx="127000" cy="127000"/>
           </a:xfrm>
           <a:prstGeom prst="ellipse">
             <a:avLst/>
@@ -11440,14 +11891,14 @@
       </p:sp>
       <p:sp>
         <p:nvSpPr>
-          <p:cNvPr id="98" name="Oval 97"/>
+          <p:cNvPr id="105" name="Oval 104"/>
           <p:cNvSpPr/>
           <p:nvPr/>
         </p:nvSpPr>
         <p:spPr>
           <a:xfrm>
-            <a:off x="6985000" y="5283200"/>
-            <a:ext cx="114300" cy="114300"/>
+            <a:off x="7924800" y="5372100"/>
+            <a:ext cx="127000" cy="127000"/>
           </a:xfrm>
           <a:prstGeom prst="ellipse">
             <a:avLst/>
@@ -11484,14 +11935,14 @@
       </p:sp>
       <p:sp>
         <p:nvSpPr>
-          <p:cNvPr id="99" name="TextBox 98"/>
+          <p:cNvPr id="106" name="TextBox 105"/>
           <p:cNvSpPr txBox="1"/>
           <p:nvPr/>
         </p:nvSpPr>
         <p:spPr>
           <a:xfrm>
-            <a:off x="7747000" y="5054600"/>
-            <a:ext cx="3759200" cy="584200"/>
+            <a:off x="8890000" y="5156200"/>
+            <a:ext cx="2616200" cy="558800"/>
           </a:xfrm>
           <a:prstGeom prst="rect">
             <a:avLst/>
@@ -11509,75 +11960,55 @@
                 <a:spcPct val="120000"/>
               </a:lnSpc>
               <a:spcAft>
-                <a:spcPts val="300"/>
+                <a:spcPts val="0"/>
               </a:spcAft>
             </a:pPr>
             <a:r>
-              <a:rPr sz="1050" b="0">
+              <a:rPr sz="1200" b="0">
                 <a:solidFill>
                   <a:srgbClr val="16213E"/>
                 </a:solidFill>
-                <a:latin typeface="Arial"/>
+                <a:latin typeface="Segoe UI"/>
               </a:rPr>
-              <a:t>Coverage over water is an advantage, but there is no 450 MHz port deployment to point to yet.</a:t>
+              <a:t>No 450 MHz precedent yet</a:t>
             </a:r>
           </a:p>
         </p:txBody>
       </p:sp>
-      <p:sp>
-        <p:nvSpPr>
-          <p:cNvPr id="100" name="Rectangle 99"/>
-          <p:cNvSpPr/>
-          <p:nvPr/>
-        </p:nvSpPr>
-        <p:spPr>
-          <a:xfrm>
-            <a:off x="508000" y="1752600"/>
-            <a:ext cx="50800" cy="1244600"/>
+      <p:pic>
+        <p:nvPicPr>
+          <p:cNvPr id="107" name="Picture 106" descr="check_green.png"/>
+          <p:cNvPicPr>
+            <a:picLocks noChangeAspect="1"/>
+          </p:cNvPicPr>
+          <p:nvPr/>
+        </p:nvPicPr>
+        <p:blipFill>
+          <a:blip r:embed="rId11"/>
+          <a:stretch>
+            <a:fillRect/>
+          </a:stretch>
+        </p:blipFill>
+        <p:spPr>
+          <a:xfrm>
+            <a:off x="609600" y="5867400"/>
+            <a:ext cx="203200" cy="203200"/>
           </a:xfrm>
           <a:prstGeom prst="rect">
             <a:avLst/>
           </a:prstGeom>
-          <a:solidFill>
-            <a:srgbClr val="7F9B00"/>
-          </a:solidFill>
-          <a:ln>
-            <a:noFill/>
-          </a:ln>
-          <a:effectLst/>
-        </p:spPr>
-        <p:style>
-          <a:lnRef idx="1">
-            <a:schemeClr val="accent1"/>
-          </a:lnRef>
-          <a:fillRef idx="3">
-            <a:schemeClr val="accent1"/>
-          </a:fillRef>
-          <a:effectRef idx="2">
-            <a:schemeClr val="accent1"/>
-          </a:effectRef>
-          <a:fontRef idx="minor">
-            <a:schemeClr val="lt1"/>
-          </a:fontRef>
-        </p:style>
-        <p:txBody>
-          <a:bodyPr rtlCol="0" anchor="ctr" wrap="square"/>
-          <a:lstStyle/>
-          <a:p>
-            <a:pPr algn="ctr"/>
-          </a:p>
-        </p:txBody>
-      </p:sp>
-      <p:sp>
-        <p:nvSpPr>
-          <p:cNvPr id="101" name="TextBox 100"/>
+        </p:spPr>
+      </p:pic>
+      <p:sp>
+        <p:nvSpPr>
+          <p:cNvPr id="108" name="TextBox 107"/>
           <p:cNvSpPr txBox="1"/>
           <p:nvPr/>
         </p:nvSpPr>
         <p:spPr>
           <a:xfrm>
-            <a:off x="609600" y="5791200"/>
-            <a:ext cx="6350000" cy="203200"/>
+            <a:off x="889000" y="5842000"/>
+            <a:ext cx="7620000" cy="254000"/>
           </a:xfrm>
           <a:prstGeom prst="rect">
             <a:avLst/>
@@ -11592,34 +12023,34 @@
           <a:p>
             <a:pPr algn="l">
               <a:lnSpc>
-                <a:spcPct val="125000"/>
+                <a:spcPct val="120000"/>
               </a:lnSpc>
               <a:spcAft>
-                <a:spcPts val="300"/>
+                <a:spcPts val="0"/>
               </a:spcAft>
             </a:pPr>
             <a:r>
-              <a:rPr sz="950" b="1">
+              <a:rPr sz="1100" b="0">
                 <a:solidFill>
                   <a:srgbClr val="7F9B00"/>
                 </a:solidFill>
-                <a:latin typeface="Arial"/>
+                <a:latin typeface="Segoe UI Semibold"/>
               </a:rPr>
-              <a:t>GREEN ROWS = ANCHOR CUSTOMERS</a:t>
+              <a:t>Green rows: the anchor customers</a:t>
             </a:r>
           </a:p>
         </p:txBody>
       </p:sp>
       <p:sp>
         <p:nvSpPr>
-          <p:cNvPr id="102" name="TextBox 101"/>
+          <p:cNvPr id="109" name="TextBox 108"/>
           <p:cNvSpPr txBox="1"/>
           <p:nvPr/>
         </p:nvSpPr>
         <p:spPr>
           <a:xfrm>
-            <a:off x="609600" y="6019800"/>
-            <a:ext cx="10972800" cy="381000"/>
+            <a:off x="889000" y="6070600"/>
+            <a:ext cx="8890000" cy="228600"/>
           </a:xfrm>
           <a:prstGeom prst="rect">
             <a:avLst/>
@@ -11634,34 +12065,34 @@
           <a:p>
             <a:pPr algn="l">
               <a:lnSpc>
-                <a:spcPct val="125000"/>
+                <a:spcPct val="120000"/>
               </a:lnSpc>
               <a:spcAft>
-                <a:spcPts val="300"/>
+                <a:spcPts val="0"/>
               </a:spcAft>
             </a:pPr>
             <a:r>
-              <a:rPr sz="1050" b="0">
+              <a:rPr sz="1100" b="0">
                 <a:solidFill>
                   <a:srgbClr val="55607A"/>
                 </a:solidFill>
-                <a:latin typeface="Arial"/>
+                <a:latin typeface="Segoe UI"/>
               </a:rPr>
-              <a:t>Our reading, to be tested in the pilot. Three dots = strongest. Police has the largest budget but the slowest path to revenue.</a:t>
+              <a:t>Our reading, to be tested in the pilot</a:t>
             </a:r>
           </a:p>
         </p:txBody>
       </p:sp>
       <p:sp>
         <p:nvSpPr>
-          <p:cNvPr id="103" name="TextBox 102"/>
+          <p:cNvPr id="110" name="TextBox 109"/>
           <p:cNvSpPr txBox="1"/>
           <p:nvPr/>
         </p:nvSpPr>
         <p:spPr>
           <a:xfrm>
-            <a:off x="609600" y="6477000"/>
-            <a:ext cx="10972800" cy="177800"/>
+            <a:off x="609600" y="6502400"/>
+            <a:ext cx="10972800" cy="152400"/>
           </a:xfrm>
           <a:prstGeom prst="rect">
             <a:avLst/>
@@ -11676,18 +12107,18 @@
           <a:p>
             <a:pPr algn="l">
               <a:lnSpc>
-                <a:spcPct val="125000"/>
+                <a:spcPct val="120000"/>
               </a:lnSpc>
               <a:spcAft>
-                <a:spcPts val="300"/>
+                <a:spcPts val="0"/>
               </a:spcAft>
             </a:pPr>
             <a:r>
-              <a:rPr sz="800" b="0">
+              <a:rPr sz="750" b="0">
                 <a:solidFill>
                   <a:srgbClr val="93A0B4"/>
                 </a:solidFill>
-                <a:latin typeface="Arial"/>
+                <a:latin typeface="Segoe UI"/>
               </a:rPr>
               <a:t>Source: Hytera assessment; 450 MHz Alliance, Annual Global Update (Dec 2025) p8-p9; LWUA NRW data (2025)</a:t>
             </a:r>
@@ -11764,7 +12195,7 @@
         </p:nvSpPr>
         <p:spPr>
           <a:xfrm>
-            <a:off x="609600" y="279400"/>
+            <a:off x="609600" y="304800"/>
             <a:ext cx="7620000" cy="177800"/>
           </a:xfrm>
           <a:prstGeom prst="rect">
@@ -11780,20 +12211,20 @@
           <a:p>
             <a:pPr algn="l">
               <a:lnSpc>
-                <a:spcPct val="125000"/>
+                <a:spcPct val="120000"/>
               </a:lnSpc>
               <a:spcAft>
-                <a:spcPts val="300"/>
+                <a:spcPts val="0"/>
               </a:spcAft>
             </a:pPr>
             <a:r>
-              <a:rPr sz="950" b="1">
+              <a:rPr sz="900" b="0" spc="120">
                 <a:solidFill>
                   <a:srgbClr val="7F9B00"/>
                 </a:solidFill>
-                <a:latin typeface="Arial"/>
+                <a:latin typeface="Segoe UI Semibold"/>
               </a:rPr>
-              <a:t>C  ·  PRIORITY 1 OF 6  ·  POWER</a:t>
+              <a:t>C   PRIORITY 1 OF 6  ·  POWER</a:t>
             </a:r>
           </a:p>
         </p:txBody>
@@ -11806,8 +12237,8 @@
         </p:nvSpPr>
         <p:spPr>
           <a:xfrm>
-            <a:off x="9550400" y="342900"/>
-            <a:ext cx="330200" cy="50800"/>
+            <a:off x="9677400" y="368300"/>
+            <a:ext cx="304800" cy="38100"/>
           </a:xfrm>
           <a:prstGeom prst="rect">
             <a:avLst/>
@@ -11850,8 +12281,8 @@
         </p:nvSpPr>
         <p:spPr>
           <a:xfrm>
-            <a:off x="9931400" y="342900"/>
-            <a:ext cx="330200" cy="50800"/>
+            <a:off x="10033000" y="368300"/>
+            <a:ext cx="304800" cy="38100"/>
           </a:xfrm>
           <a:prstGeom prst="rect">
             <a:avLst/>
@@ -11894,8 +12325,8 @@
         </p:nvSpPr>
         <p:spPr>
           <a:xfrm>
-            <a:off x="10312400" y="342900"/>
-            <a:ext cx="330200" cy="50800"/>
+            <a:off x="10388600" y="368300"/>
+            <a:ext cx="304800" cy="38100"/>
           </a:xfrm>
           <a:prstGeom prst="rect">
             <a:avLst/>
@@ -11938,8 +12369,8 @@
         </p:nvSpPr>
         <p:spPr>
           <a:xfrm>
-            <a:off x="10693400" y="342900"/>
-            <a:ext cx="330200" cy="50800"/>
+            <a:off x="10744200" y="368300"/>
+            <a:ext cx="304800" cy="38100"/>
           </a:xfrm>
           <a:prstGeom prst="rect">
             <a:avLst/>
@@ -11982,8 +12413,8 @@
         </p:nvSpPr>
         <p:spPr>
           <a:xfrm>
-            <a:off x="11125200" y="228600"/>
-            <a:ext cx="457200" cy="228600"/>
+            <a:off x="11201400" y="266700"/>
+            <a:ext cx="381000" cy="203200"/>
           </a:xfrm>
           <a:prstGeom prst="rect">
             <a:avLst/>
@@ -11998,81 +12429,422 @@
           <a:p>
             <a:pPr algn="r">
               <a:lnSpc>
-                <a:spcPct val="125000"/>
-              </a:lnSpc>
-              <a:spcAft>
-                <a:spcPts val="300"/>
-              </a:spcAft>
-            </a:pPr>
-            <a:r>
-              <a:rPr sz="1200" b="1">
-                <a:solidFill>
-                  <a:srgbClr val="0B308E"/>
-                </a:solidFill>
-                <a:latin typeface="Arial"/>
-              </a:rPr>
-              <a:t>07</a:t>
-            </a:r>
-          </a:p>
-        </p:txBody>
-      </p:sp>
-      <p:sp>
-        <p:nvSpPr>
-          <p:cNvPr id="9" name="TextBox 8"/>
-          <p:cNvSpPr txBox="1"/>
-          <p:nvPr/>
-        </p:nvSpPr>
-        <p:spPr>
-          <a:xfrm>
-            <a:off x="609600" y="508000"/>
-            <a:ext cx="10972800" cy="762000"/>
-          </a:xfrm>
-          <a:prstGeom prst="rect">
-            <a:avLst/>
-          </a:prstGeom>
-          <a:noFill/>
-        </p:spPr>
-        <p:txBody>
-          <a:bodyPr wrap="square" lIns="0" rIns="0" tIns="0" bIns="0" anchor="b">
-            <a:spAutoFit/>
-          </a:bodyPr>
-          <a:lstStyle/>
-          <a:p>
-            <a:pPr algn="l">
-              <a:lnSpc>
-                <a:spcPct val="108000"/>
+                <a:spcPct val="120000"/>
               </a:lnSpc>
               <a:spcAft>
                 <a:spcPts val="0"/>
               </a:spcAft>
             </a:pPr>
             <a:r>
-              <a:rPr sz="2200" b="1">
+              <a:rPr sz="1100" b="0">
                 <a:solidFill>
                   <a:srgbClr val="0B308E"/>
                 </a:solidFill>
-                <a:latin typeface="Arial"/>
+                <a:latin typeface="Segoe UI Semibold"/>
               </a:rPr>
-              <a:t>Power is the anchor customer - as it is for 450connect in Germany and TNB in Malaysia</a:t>
+              <a:t>07</a:t>
+            </a:r>
+          </a:p>
+        </p:txBody>
+      </p:sp>
+      <p:sp>
+        <p:nvSpPr>
+          <p:cNvPr id="9" name="TextBox 8"/>
+          <p:cNvSpPr txBox="1"/>
+          <p:nvPr/>
+        </p:nvSpPr>
+        <p:spPr>
+          <a:xfrm>
+            <a:off x="609600" y="508000"/>
+            <a:ext cx="10972800" cy="889000"/>
+          </a:xfrm>
+          <a:prstGeom prst="rect">
+            <a:avLst/>
+          </a:prstGeom>
+          <a:noFill/>
+        </p:spPr>
+        <p:txBody>
+          <a:bodyPr wrap="square" lIns="0" rIns="0" tIns="0" bIns="0" anchor="ctr">
+            <a:spAutoFit/>
+          </a:bodyPr>
+          <a:lstStyle/>
+          <a:p>
+            <a:pPr algn="l">
+              <a:lnSpc>
+                <a:spcPct val="105000"/>
+              </a:lnSpc>
+              <a:spcAft>
+                <a:spcPts val="0"/>
+              </a:spcAft>
+            </a:pPr>
+            <a:r>
+              <a:rPr sz="2200" b="0">
+                <a:solidFill>
+                  <a:srgbClr val="0B308E"/>
+                </a:solidFill>
+                <a:latin typeface="Segoe UI Semibold"/>
+              </a:rPr>
+              <a:t>Power anchors the network, as it does in Germany and Malaysia</a:t>
+            </a:r>
+          </a:p>
+        </p:txBody>
+      </p:sp>
+      <p:pic>
+        <p:nvPicPr>
+          <p:cNvPr id="10" name="Picture 9" descr="v6_13015b8219.jpg"/>
+          <p:cNvPicPr>
+            <a:picLocks noChangeAspect="1"/>
+          </p:cNvPicPr>
+          <p:nvPr/>
+        </p:nvPicPr>
+        <p:blipFill>
+          <a:blip r:embed="rId2"/>
+          <a:srcRect l="6800" r="6800"/>
+          <a:stretch>
+            <a:fillRect/>
+          </a:stretch>
+        </p:blipFill>
+        <p:spPr>
+          <a:xfrm>
+            <a:off x="609600" y="1549400"/>
+            <a:ext cx="4876800" cy="3175000"/>
+          </a:xfrm>
+          <a:prstGeom prst="rect">
+            <a:avLst/>
+          </a:prstGeom>
+        </p:spPr>
+      </p:pic>
+      <p:sp>
+        <p:nvSpPr>
+          <p:cNvPr id="11" name="Oval 10"/>
+          <p:cNvSpPr/>
+          <p:nvPr/>
+        </p:nvSpPr>
+        <p:spPr>
+          <a:xfrm>
+            <a:off x="787400" y="1727200"/>
+            <a:ext cx="558800" cy="558800"/>
+          </a:xfrm>
+          <a:prstGeom prst="ellipse">
+            <a:avLst/>
+          </a:prstGeom>
+          <a:solidFill>
+            <a:srgbClr val="0B308E"/>
+          </a:solidFill>
+          <a:ln>
+            <a:noFill/>
+          </a:ln>
+          <a:effectLst/>
+        </p:spPr>
+        <p:style>
+          <a:lnRef idx="1">
+            <a:schemeClr val="accent1"/>
+          </a:lnRef>
+          <a:fillRef idx="3">
+            <a:schemeClr val="accent1"/>
+          </a:fillRef>
+          <a:effectRef idx="2">
+            <a:schemeClr val="accent1"/>
+          </a:effectRef>
+          <a:fontRef idx="minor">
+            <a:schemeClr val="lt1"/>
+          </a:fontRef>
+        </p:style>
+        <p:txBody>
+          <a:bodyPr rtlCol="0" anchor="ctr" wrap="square"/>
+          <a:lstStyle/>
+          <a:p>
+            <a:pPr algn="ctr"/>
+          </a:p>
+        </p:txBody>
+      </p:sp>
+      <p:pic>
+        <p:nvPicPr>
+          <p:cNvPr id="12" name="Picture 11" descr="zap_white.png"/>
+          <p:cNvPicPr>
+            <a:picLocks noChangeAspect="1"/>
+          </p:cNvPicPr>
+          <p:nvPr/>
+        </p:nvPicPr>
+        <p:blipFill>
+          <a:blip r:embed="rId3"/>
+          <a:stretch>
+            <a:fillRect/>
+          </a:stretch>
+        </p:blipFill>
+        <p:spPr>
+          <a:xfrm>
+            <a:off x="921512" y="1861312"/>
+            <a:ext cx="290576" cy="290576"/>
+          </a:xfrm>
+          <a:prstGeom prst="rect">
+            <a:avLst/>
+          </a:prstGeom>
+        </p:spPr>
+      </p:pic>
+      <p:sp>
+        <p:nvSpPr>
+          <p:cNvPr id="13" name="TextBox 12"/>
+          <p:cNvSpPr txBox="1"/>
+          <p:nvPr/>
+        </p:nvSpPr>
+        <p:spPr>
+          <a:xfrm>
+            <a:off x="609600" y="4775200"/>
+            <a:ext cx="4876800" cy="152400"/>
+          </a:xfrm>
+          <a:prstGeom prst="rect">
+            <a:avLst/>
+          </a:prstGeom>
+          <a:noFill/>
+        </p:spPr>
+        <p:txBody>
+          <a:bodyPr wrap="square" lIns="0" rIns="0" tIns="0" bIns="0" anchor="t">
+            <a:spAutoFit/>
+          </a:bodyPr>
+          <a:lstStyle/>
+          <a:p>
+            <a:pPr algn="l">
+              <a:lnSpc>
+                <a:spcPct val="120000"/>
+              </a:lnSpc>
+              <a:spcAft>
+                <a:spcPts val="0"/>
+              </a:spcAft>
+            </a:pPr>
+            <a:r>
+              <a:rPr sz="800" b="0">
+                <a:solidFill>
+                  <a:srgbClr val="93A0B4"/>
+                </a:solidFill>
+                <a:latin typeface="Segoe UI"/>
+              </a:rPr>
+              <a:t>Illustrative imagery</a:t>
+            </a:r>
+          </a:p>
+        </p:txBody>
+      </p:sp>
+      <p:sp>
+        <p:nvSpPr>
+          <p:cNvPr id="14" name="TextBox 13"/>
+          <p:cNvSpPr txBox="1"/>
+          <p:nvPr/>
+        </p:nvSpPr>
+        <p:spPr>
+          <a:xfrm>
+            <a:off x="5791200" y="1473200"/>
+            <a:ext cx="2794000" cy="635000"/>
+          </a:xfrm>
+          <a:prstGeom prst="rect">
+            <a:avLst/>
+          </a:prstGeom>
+          <a:noFill/>
+        </p:spPr>
+        <p:txBody>
+          <a:bodyPr wrap="square" lIns="0" rIns="0" tIns="0" bIns="0" anchor="t">
+            <a:spAutoFit/>
+          </a:bodyPr>
+          <a:lstStyle/>
+          <a:p>
+            <a:pPr algn="l">
+              <a:lnSpc>
+                <a:spcPct val="120000"/>
+              </a:lnSpc>
+              <a:spcAft>
+                <a:spcPts val="0"/>
+              </a:spcAft>
+            </a:pPr>
+            <a:r>
+              <a:rPr sz="4000" b="0">
+                <a:solidFill>
+                  <a:srgbClr val="0B308E"/>
+                </a:solidFill>
+                <a:latin typeface="Segoe UI Light"/>
+              </a:rPr>
+              <a:t>121</a:t>
+            </a:r>
+          </a:p>
+        </p:txBody>
+      </p:sp>
+      <p:sp>
+        <p:nvSpPr>
+          <p:cNvPr id="15" name="TextBox 14"/>
+          <p:cNvSpPr txBox="1"/>
+          <p:nvPr/>
+        </p:nvSpPr>
+        <p:spPr>
+          <a:xfrm>
+            <a:off x="5791200" y="2133600"/>
+            <a:ext cx="2794000" cy="457200"/>
+          </a:xfrm>
+          <a:prstGeom prst="rect">
+            <a:avLst/>
+          </a:prstGeom>
+          <a:noFill/>
+        </p:spPr>
+        <p:txBody>
+          <a:bodyPr wrap="square" lIns="0" rIns="0" tIns="0" bIns="0" anchor="t">
+            <a:spAutoFit/>
+          </a:bodyPr>
+          <a:lstStyle/>
+          <a:p>
+            <a:pPr algn="l">
+              <a:lnSpc>
+                <a:spcPct val="115000"/>
+              </a:lnSpc>
+              <a:spcAft>
+                <a:spcPts val="0"/>
+              </a:spcAft>
+            </a:pPr>
+            <a:r>
+              <a:rPr sz="1200" b="0">
+                <a:solidFill>
+                  <a:srgbClr val="55607A"/>
+                </a:solidFill>
+                <a:latin typeface="Segoe UI"/>
+              </a:rPr>
+              <a:t>electric cooperatives</a:t>
+            </a:r>
+          </a:p>
+          <a:p>
+            <a:pPr algn="l">
+              <a:lnSpc>
+                <a:spcPct val="115000"/>
+              </a:lnSpc>
+              <a:spcAft>
+                <a:spcPts val="0"/>
+              </a:spcAft>
+            </a:pPr>
+            <a:r>
+              <a:rPr sz="1200" b="0">
+                <a:solidFill>
+                  <a:srgbClr val="55607A"/>
+                </a:solidFill>
+                <a:latin typeface="Segoe UI"/>
+              </a:rPr>
+              <a:t>under NEA</a:t>
+            </a:r>
+          </a:p>
+        </p:txBody>
+      </p:sp>
+      <p:sp>
+        <p:nvSpPr>
+          <p:cNvPr id="16" name="TextBox 15"/>
+          <p:cNvSpPr txBox="1"/>
+          <p:nvPr/>
+        </p:nvSpPr>
+        <p:spPr>
+          <a:xfrm>
+            <a:off x="8712200" y="1473200"/>
+            <a:ext cx="2794000" cy="635000"/>
+          </a:xfrm>
+          <a:prstGeom prst="rect">
+            <a:avLst/>
+          </a:prstGeom>
+          <a:noFill/>
+        </p:spPr>
+        <p:txBody>
+          <a:bodyPr wrap="square" lIns="0" rIns="0" tIns="0" bIns="0" anchor="t">
+            <a:spAutoFit/>
+          </a:bodyPr>
+          <a:lstStyle/>
+          <a:p>
+            <a:pPr algn="l">
+              <a:lnSpc>
+                <a:spcPct val="120000"/>
+              </a:lnSpc>
+              <a:spcAft>
+                <a:spcPts val="0"/>
+              </a:spcAft>
+            </a:pPr>
+            <a:r>
+              <a:rPr sz="4000" b="0">
+                <a:solidFill>
+                  <a:srgbClr val="0B308E"/>
+                </a:solidFill>
+                <a:latin typeface="Segoe UI Light"/>
+              </a:rPr>
+              <a:t>1.4M</a:t>
+            </a:r>
+          </a:p>
+        </p:txBody>
+      </p:sp>
+      <p:sp>
+        <p:nvSpPr>
+          <p:cNvPr id="17" name="TextBox 16"/>
+          <p:cNvSpPr txBox="1"/>
+          <p:nvPr/>
+        </p:nvSpPr>
+        <p:spPr>
+          <a:xfrm>
+            <a:off x="8712200" y="2133600"/>
+            <a:ext cx="2794000" cy="457200"/>
+          </a:xfrm>
+          <a:prstGeom prst="rect">
+            <a:avLst/>
+          </a:prstGeom>
+          <a:noFill/>
+        </p:spPr>
+        <p:txBody>
+          <a:bodyPr wrap="square" lIns="0" rIns="0" tIns="0" bIns="0" anchor="t">
+            <a:spAutoFit/>
+          </a:bodyPr>
+          <a:lstStyle/>
+          <a:p>
+            <a:pPr algn="l">
+              <a:lnSpc>
+                <a:spcPct val="115000"/>
+              </a:lnSpc>
+              <a:spcAft>
+                <a:spcPts val="0"/>
+              </a:spcAft>
+            </a:pPr>
+            <a:r>
+              <a:rPr sz="1200" b="0">
+                <a:solidFill>
+                  <a:srgbClr val="55607A"/>
+                </a:solidFill>
+                <a:latin typeface="Segoe UI"/>
+              </a:rPr>
+              <a:t>consumers cut off</a:t>
+            </a:r>
+          </a:p>
+          <a:p>
+            <a:pPr algn="l">
+              <a:lnSpc>
+                <a:spcPct val="115000"/>
+              </a:lnSpc>
+              <a:spcAft>
+                <a:spcPts val="0"/>
+              </a:spcAft>
+            </a:pPr>
+            <a:r>
+              <a:rPr sz="1200" b="0">
+                <a:solidFill>
+                  <a:srgbClr val="55607A"/>
+                </a:solidFill>
+                <a:latin typeface="Segoe UI"/>
+              </a:rPr>
+              <a:t>by Typhoon Tino</a:t>
             </a:r>
           </a:p>
         </p:txBody>
       </p:sp>
       <p:cxnSp>
         <p:nvCxnSpPr>
-          <p:cNvPr id="10" name="Connector 9"/>
+          <p:cNvPr id="18" name="Connector 17"/>
           <p:cNvCxnSpPr/>
           <p:nvPr/>
         </p:nvCxnSpPr>
         <p:spPr>
           <a:xfrm>
-            <a:off x="609600" y="1371600"/>
-            <a:ext cx="10972800" cy="0"/>
+            <a:off x="5791200" y="2743200"/>
+            <a:ext cx="5791200" cy="0"/>
           </a:xfrm>
           <a:prstGeom prst="line">
             <a:avLst/>
           </a:prstGeom>
-          <a:ln w="12700">
+          <a:ln w="9525">
             <a:solidFill>
               <a:srgbClr val="D6E0F0"/>
             </a:solidFill>
@@ -12093,41 +12865,16 @@
           </a:fontRef>
         </p:style>
       </p:cxnSp>
-      <p:pic>
-        <p:nvPicPr>
-          <p:cNvPr id="11" name="Picture 10" descr="v6_13015b8219.jpg"/>
-          <p:cNvPicPr>
-            <a:picLocks noChangeAspect="1"/>
-          </p:cNvPicPr>
-          <p:nvPr/>
-        </p:nvPicPr>
-        <p:blipFill>
-          <a:blip r:embed="rId2"/>
-          <a:srcRect l="2331" r="2331"/>
-          <a:stretch>
-            <a:fillRect/>
-          </a:stretch>
-        </p:blipFill>
-        <p:spPr>
-          <a:xfrm>
-            <a:off x="609600" y="1574800"/>
-            <a:ext cx="5080000" cy="2997200"/>
-          </a:xfrm>
-          <a:prstGeom prst="rect">
-            <a:avLst/>
-          </a:prstGeom>
-        </p:spPr>
-      </p:pic>
-      <p:sp>
-        <p:nvSpPr>
-          <p:cNvPr id="12" name="TextBox 11"/>
+      <p:sp>
+        <p:nvSpPr>
+          <p:cNvPr id="19" name="TextBox 18"/>
           <p:cNvSpPr txBox="1"/>
           <p:nvPr/>
         </p:nvSpPr>
         <p:spPr>
           <a:xfrm>
-            <a:off x="609600" y="4622800"/>
-            <a:ext cx="5080000" cy="177800"/>
+            <a:off x="5791200" y="2895600"/>
+            <a:ext cx="3810000" cy="177800"/>
           </a:xfrm>
           <a:prstGeom prst="rect">
             <a:avLst/>
@@ -12142,34 +12889,34 @@
           <a:p>
             <a:pPr algn="l">
               <a:lnSpc>
-                <a:spcPct val="125000"/>
+                <a:spcPct val="120000"/>
               </a:lnSpc>
               <a:spcAft>
-                <a:spcPts val="300"/>
+                <a:spcPts val="0"/>
               </a:spcAft>
             </a:pPr>
             <a:r>
-              <a:rPr sz="850" b="0">
+              <a:rPr sz="900" b="0" spc="120">
                 <a:solidFill>
-                  <a:srgbClr val="93A0B4"/>
+                  <a:srgbClr val="7F9B00"/>
                 </a:solidFill>
-                <a:latin typeface="Arial"/>
+                <a:latin typeface="Segoe UI Semibold"/>
               </a:rPr>
-              <a:t>Line crews on a repair job. Illustrative imagery.</a:t>
+              <a:t>WHAT 450 MHZ DOES</a:t>
             </a:r>
           </a:p>
         </p:txBody>
       </p:sp>
       <p:sp>
         <p:nvSpPr>
-          <p:cNvPr id="13" name="Rectangle 12"/>
+          <p:cNvPr id="20" name="Rectangle 19"/>
           <p:cNvSpPr/>
           <p:nvPr/>
         </p:nvSpPr>
         <p:spPr>
           <a:xfrm>
-            <a:off x="5969000" y="1574800"/>
-            <a:ext cx="5613400" cy="711200"/>
+            <a:off x="5791200" y="3175000"/>
+            <a:ext cx="1828800" cy="1549400"/>
           </a:xfrm>
           <a:prstGeom prst="rect">
             <a:avLst/>
@@ -12204,60 +12951,40 @@
           </a:p>
         </p:txBody>
       </p:sp>
-      <p:sp>
-        <p:nvSpPr>
-          <p:cNvPr id="14" name="Rectangle 13"/>
-          <p:cNvSpPr/>
-          <p:nvPr/>
-        </p:nvSpPr>
-        <p:spPr>
-          <a:xfrm>
-            <a:off x="5969000" y="1574800"/>
-            <a:ext cx="50800" cy="711200"/>
+      <p:pic>
+        <p:nvPicPr>
+          <p:cNvPr id="21" name="Picture 20" descr="cpu_navy.png"/>
+          <p:cNvPicPr>
+            <a:picLocks noChangeAspect="1"/>
+          </p:cNvPicPr>
+          <p:nvPr/>
+        </p:nvPicPr>
+        <p:blipFill>
+          <a:blip r:embed="rId4"/>
+          <a:stretch>
+            <a:fillRect/>
+          </a:stretch>
+        </p:blipFill>
+        <p:spPr>
+          <a:xfrm>
+            <a:off x="5994400" y="3352800"/>
+            <a:ext cx="431800" cy="431800"/>
           </a:xfrm>
           <a:prstGeom prst="rect">
             <a:avLst/>
           </a:prstGeom>
-          <a:solidFill>
-            <a:srgbClr val="0B308E"/>
-          </a:solidFill>
-          <a:ln>
-            <a:noFill/>
-          </a:ln>
-          <a:effectLst/>
-        </p:spPr>
-        <p:style>
-          <a:lnRef idx="1">
-            <a:schemeClr val="accent1"/>
-          </a:lnRef>
-          <a:fillRef idx="3">
-            <a:schemeClr val="accent1"/>
-          </a:fillRef>
-          <a:effectRef idx="2">
-            <a:schemeClr val="accent1"/>
-          </a:effectRef>
-          <a:fontRef idx="minor">
-            <a:schemeClr val="lt1"/>
-          </a:fontRef>
-        </p:style>
-        <p:txBody>
-          <a:bodyPr rtlCol="0" anchor="ctr" wrap="square"/>
-          <a:lstStyle/>
-          <a:p>
-            <a:pPr algn="ctr"/>
-          </a:p>
-        </p:txBody>
-      </p:sp>
-      <p:sp>
-        <p:nvSpPr>
-          <p:cNvPr id="15" name="TextBox 14"/>
+        </p:spPr>
+      </p:pic>
+      <p:sp>
+        <p:nvSpPr>
+          <p:cNvPr id="22" name="TextBox 21"/>
           <p:cNvSpPr txBox="1"/>
           <p:nvPr/>
         </p:nvSpPr>
         <p:spPr>
           <a:xfrm>
-            <a:off x="6197600" y="1574800"/>
-            <a:ext cx="1219200" cy="711200"/>
+            <a:off x="5994400" y="3962400"/>
+            <a:ext cx="1524000" cy="635000"/>
           </a:xfrm>
           <a:prstGeom prst="rect">
             <a:avLst/>
@@ -12265,83 +12992,60 @@
           <a:noFill/>
         </p:spPr>
         <p:txBody>
-          <a:bodyPr wrap="square" lIns="0" rIns="0" tIns="0" bIns="0" anchor="ctr">
+          <a:bodyPr wrap="square" lIns="0" rIns="0" tIns="0" bIns="0" anchor="t">
             <a:spAutoFit/>
           </a:bodyPr>
           <a:lstStyle/>
           <a:p>
             <a:pPr algn="l">
               <a:lnSpc>
-                <a:spcPct val="125000"/>
+                <a:spcPct val="115000"/>
               </a:lnSpc>
               <a:spcAft>
-                <a:spcPts val="300"/>
+                <a:spcPts val="0"/>
               </a:spcAft>
             </a:pPr>
             <a:r>
-              <a:rPr sz="2400" b="1">
+              <a:rPr sz="1250" b="0">
                 <a:solidFill>
                   <a:srgbClr val="0B308E"/>
                 </a:solidFill>
-                <a:latin typeface="Arial"/>
+                <a:latin typeface="Segoe UI Semibold"/>
               </a:rPr>
-              <a:t>121</a:t>
+              <a:t>SCADA &amp;</a:t>
             </a:r>
           </a:p>
-        </p:txBody>
-      </p:sp>
-      <p:sp>
-        <p:nvSpPr>
-          <p:cNvPr id="16" name="TextBox 15"/>
-          <p:cNvSpPr txBox="1"/>
-          <p:nvPr/>
-        </p:nvSpPr>
-        <p:spPr>
-          <a:xfrm>
-            <a:off x="7493000" y="1574800"/>
-            <a:ext cx="3886200" cy="711200"/>
-          </a:xfrm>
-          <a:prstGeom prst="rect">
-            <a:avLst/>
-          </a:prstGeom>
-          <a:noFill/>
-        </p:spPr>
-        <p:txBody>
-          <a:bodyPr wrap="square" lIns="0" rIns="0" tIns="0" bIns="0" anchor="ctr">
-            <a:spAutoFit/>
-          </a:bodyPr>
-          <a:lstStyle/>
           <a:p>
             <a:pPr algn="l">
               <a:lnSpc>
-                <a:spcPct val="125000"/>
+                <a:spcPct val="115000"/>
               </a:lnSpc>
               <a:spcAft>
-                <a:spcPts val="300"/>
+                <a:spcPts val="0"/>
               </a:spcAft>
             </a:pPr>
             <a:r>
-              <a:rPr sz="1200" b="0">
+              <a:rPr sz="1250" b="0">
                 <a:solidFill>
-                  <a:srgbClr val="16213E"/>
+                  <a:srgbClr val="0B308E"/>
                 </a:solidFill>
-                <a:latin typeface="Arial"/>
+                <a:latin typeface="Segoe UI Semibold"/>
               </a:rPr>
-              <a:t>electric cooperatives under NEA serve the rural grid</a:t>
+              <a:t>feeder automation</a:t>
             </a:r>
           </a:p>
         </p:txBody>
       </p:sp>
       <p:sp>
         <p:nvSpPr>
-          <p:cNvPr id="17" name="Rectangle 16"/>
+          <p:cNvPr id="23" name="Rectangle 22"/>
           <p:cNvSpPr/>
           <p:nvPr/>
         </p:nvSpPr>
         <p:spPr>
           <a:xfrm>
-            <a:off x="5969000" y="2387600"/>
-            <a:ext cx="5613400" cy="711200"/>
+            <a:off x="7721600" y="3175000"/>
+            <a:ext cx="1828800" cy="1549400"/>
           </a:xfrm>
           <a:prstGeom prst="rect">
             <a:avLst/>
@@ -12376,60 +13080,40 @@
           </a:p>
         </p:txBody>
       </p:sp>
-      <p:sp>
-        <p:nvSpPr>
-          <p:cNvPr id="18" name="Rectangle 17"/>
-          <p:cNvSpPr/>
-          <p:nvPr/>
-        </p:nvSpPr>
-        <p:spPr>
-          <a:xfrm>
-            <a:off x="5969000" y="2387600"/>
-            <a:ext cx="50800" cy="711200"/>
+      <p:pic>
+        <p:nvPicPr>
+          <p:cNvPr id="24" name="Picture 23" descr="radio_navy.png"/>
+          <p:cNvPicPr>
+            <a:picLocks noChangeAspect="1"/>
+          </p:cNvPicPr>
+          <p:nvPr/>
+        </p:nvPicPr>
+        <p:blipFill>
+          <a:blip r:embed="rId5"/>
+          <a:stretch>
+            <a:fillRect/>
+          </a:stretch>
+        </p:blipFill>
+        <p:spPr>
+          <a:xfrm>
+            <a:off x="7924800" y="3352800"/>
+            <a:ext cx="431800" cy="431800"/>
           </a:xfrm>
           <a:prstGeom prst="rect">
             <a:avLst/>
           </a:prstGeom>
-          <a:solidFill>
-            <a:srgbClr val="0B308E"/>
-          </a:solidFill>
-          <a:ln>
-            <a:noFill/>
-          </a:ln>
-          <a:effectLst/>
-        </p:spPr>
-        <p:style>
-          <a:lnRef idx="1">
-            <a:schemeClr val="accent1"/>
-          </a:lnRef>
-          <a:fillRef idx="3">
-            <a:schemeClr val="accent1"/>
-          </a:fillRef>
-          <a:effectRef idx="2">
-            <a:schemeClr val="accent1"/>
-          </a:effectRef>
-          <a:fontRef idx="minor">
-            <a:schemeClr val="lt1"/>
-          </a:fontRef>
-        </p:style>
-        <p:txBody>
-          <a:bodyPr rtlCol="0" anchor="ctr" wrap="square"/>
-          <a:lstStyle/>
-          <a:p>
-            <a:pPr algn="ctr"/>
-          </a:p>
-        </p:txBody>
-      </p:sp>
-      <p:sp>
-        <p:nvSpPr>
-          <p:cNvPr id="19" name="TextBox 18"/>
+        </p:spPr>
+      </p:pic>
+      <p:sp>
+        <p:nvSpPr>
+          <p:cNvPr id="25" name="TextBox 24"/>
           <p:cNvSpPr txBox="1"/>
           <p:nvPr/>
         </p:nvSpPr>
         <p:spPr>
           <a:xfrm>
-            <a:off x="6197600" y="2387600"/>
-            <a:ext cx="1219200" cy="711200"/>
+            <a:off x="7924800" y="3962400"/>
+            <a:ext cx="1524000" cy="635000"/>
           </a:xfrm>
           <a:prstGeom prst="rect">
             <a:avLst/>
@@ -12437,509 +13121,60 @@
           <a:noFill/>
         </p:spPr>
         <p:txBody>
-          <a:bodyPr wrap="square" lIns="0" rIns="0" tIns="0" bIns="0" anchor="ctr">
+          <a:bodyPr wrap="square" lIns="0" rIns="0" tIns="0" bIns="0" anchor="t">
             <a:spAutoFit/>
           </a:bodyPr>
           <a:lstStyle/>
           <a:p>
             <a:pPr algn="l">
               <a:lnSpc>
-                <a:spcPct val="125000"/>
+                <a:spcPct val="115000"/>
               </a:lnSpc>
               <a:spcAft>
-                <a:spcPts val="300"/>
+                <a:spcPts val="0"/>
               </a:spcAft>
             </a:pPr>
             <a:r>
-              <a:rPr sz="2400" b="1">
+              <a:rPr sz="1250" b="0">
                 <a:solidFill>
                   <a:srgbClr val="0B308E"/>
                 </a:solidFill>
-                <a:latin typeface="Arial"/>
+                <a:latin typeface="Segoe UI Semibold"/>
               </a:rPr>
-              <a:t>1.4M</a:t>
+              <a:t>Push-to-talk</a:t>
             </a:r>
           </a:p>
-        </p:txBody>
-      </p:sp>
-      <p:sp>
-        <p:nvSpPr>
-          <p:cNvPr id="20" name="TextBox 19"/>
-          <p:cNvSpPr txBox="1"/>
-          <p:nvPr/>
-        </p:nvSpPr>
-        <p:spPr>
-          <a:xfrm>
-            <a:off x="7493000" y="2387600"/>
-            <a:ext cx="3886200" cy="711200"/>
-          </a:xfrm>
-          <a:prstGeom prst="rect">
-            <a:avLst/>
-          </a:prstGeom>
-          <a:noFill/>
-        </p:spPr>
-        <p:txBody>
-          <a:bodyPr wrap="square" lIns="0" rIns="0" tIns="0" bIns="0" anchor="ctr">
-            <a:spAutoFit/>
-          </a:bodyPr>
-          <a:lstStyle/>
           <a:p>
             <a:pPr algn="l">
               <a:lnSpc>
-                <a:spcPct val="125000"/>
+                <a:spcPct val="115000"/>
               </a:lnSpc>
               <a:spcAft>
-                <a:spcPts val="300"/>
+                <a:spcPts val="0"/>
               </a:spcAft>
             </a:pPr>
             <a:r>
-              <a:rPr sz="1200" b="0">
+              <a:rPr sz="1250" b="0">
                 <a:solidFill>
-                  <a:srgbClr val="16213E"/>
+                  <a:srgbClr val="0B308E"/>
                 </a:solidFill>
-                <a:latin typeface="Arial"/>
+                <a:latin typeface="Segoe UI Semibold"/>
               </a:rPr>
-              <a:t>electricity consumers without power after Typhoon Tino, Nov 2025</a:t>
+              <a:t>for line crews</a:t>
             </a:r>
           </a:p>
         </p:txBody>
       </p:sp>
       <p:sp>
         <p:nvSpPr>
-          <p:cNvPr id="21" name="TextBox 20"/>
-          <p:cNvSpPr txBox="1"/>
-          <p:nvPr/>
-        </p:nvSpPr>
-        <p:spPr>
-          <a:xfrm>
-            <a:off x="5969000" y="3327400"/>
-            <a:ext cx="5334000" cy="177800"/>
-          </a:xfrm>
-          <a:prstGeom prst="rect">
-            <a:avLst/>
-          </a:prstGeom>
-          <a:noFill/>
-        </p:spPr>
-        <p:txBody>
-          <a:bodyPr wrap="square" lIns="0" rIns="0" tIns="0" bIns="0" anchor="t">
-            <a:spAutoFit/>
-          </a:bodyPr>
-          <a:lstStyle/>
-          <a:p>
-            <a:pPr algn="l">
-              <a:lnSpc>
-                <a:spcPct val="125000"/>
-              </a:lnSpc>
-              <a:spcAft>
-                <a:spcPts val="300"/>
-              </a:spcAft>
-            </a:pPr>
-            <a:r>
-              <a:rPr sz="850" b="1">
-                <a:solidFill>
-                  <a:srgbClr val="7F9B00"/>
-                </a:solidFill>
-                <a:latin typeface="Arial"/>
-              </a:rPr>
-              <a:t>WHAT 450 MHZ DOES</a:t>
-            </a:r>
-          </a:p>
-        </p:txBody>
-      </p:sp>
-      <p:sp>
-        <p:nvSpPr>
-          <p:cNvPr id="22" name="Oval 21"/>
+          <p:cNvPr id="26" name="Rectangle 25"/>
           <p:cNvSpPr/>
           <p:nvPr/>
         </p:nvSpPr>
         <p:spPr>
           <a:xfrm>
-            <a:off x="5969000" y="3581400"/>
-            <a:ext cx="279400" cy="279400"/>
-          </a:xfrm>
-          <a:prstGeom prst="ellipse">
-            <a:avLst/>
-          </a:prstGeom>
-          <a:solidFill>
-            <a:srgbClr val="0B308E"/>
-          </a:solidFill>
-          <a:ln>
-            <a:noFill/>
-          </a:ln>
-          <a:effectLst/>
-        </p:spPr>
-        <p:style>
-          <a:lnRef idx="1">
-            <a:schemeClr val="accent1"/>
-          </a:lnRef>
-          <a:fillRef idx="3">
-            <a:schemeClr val="accent1"/>
-          </a:fillRef>
-          <a:effectRef idx="2">
-            <a:schemeClr val="accent1"/>
-          </a:effectRef>
-          <a:fontRef idx="minor">
-            <a:schemeClr val="lt1"/>
-          </a:fontRef>
-        </p:style>
-        <p:txBody>
-          <a:bodyPr rtlCol="0" anchor="ctr" wrap="square"/>
-          <a:lstStyle/>
-          <a:p>
-            <a:pPr algn="ctr"/>
-          </a:p>
-        </p:txBody>
-      </p:sp>
-      <p:sp>
-        <p:nvSpPr>
-          <p:cNvPr id="23" name="TextBox 22"/>
-          <p:cNvSpPr txBox="1"/>
-          <p:nvPr/>
-        </p:nvSpPr>
-        <p:spPr>
-          <a:xfrm>
-            <a:off x="5969000" y="3581400"/>
-            <a:ext cx="279400" cy="279400"/>
-          </a:xfrm>
-          <a:prstGeom prst="rect">
-            <a:avLst/>
-          </a:prstGeom>
-          <a:noFill/>
-        </p:spPr>
-        <p:txBody>
-          <a:bodyPr wrap="square" lIns="0" rIns="0" tIns="0" bIns="0" anchor="ctr">
-            <a:spAutoFit/>
-          </a:bodyPr>
-          <a:lstStyle/>
-          <a:p>
-            <a:pPr algn="ctr">
-              <a:lnSpc>
-                <a:spcPct val="125000"/>
-              </a:lnSpc>
-              <a:spcAft>
-                <a:spcPts val="300"/>
-              </a:spcAft>
-            </a:pPr>
-            <a:r>
-              <a:rPr sz="1000" b="1">
-                <a:solidFill>
-                  <a:srgbClr val="FFFFFF"/>
-                </a:solidFill>
-                <a:latin typeface="Arial"/>
-              </a:rPr>
-              <a:t>1</a:t>
-            </a:r>
-          </a:p>
-        </p:txBody>
-      </p:sp>
-      <p:sp>
-        <p:nvSpPr>
-          <p:cNvPr id="24" name="TextBox 23"/>
-          <p:cNvSpPr txBox="1"/>
-          <p:nvPr/>
-        </p:nvSpPr>
-        <p:spPr>
-          <a:xfrm>
-            <a:off x="6400800" y="3594100"/>
-            <a:ext cx="5181600" cy="304800"/>
-          </a:xfrm>
-          <a:prstGeom prst="rect">
-            <a:avLst/>
-          </a:prstGeom>
-          <a:noFill/>
-        </p:spPr>
-        <p:txBody>
-          <a:bodyPr wrap="square" lIns="0" rIns="0" tIns="0" bIns="0" anchor="t">
-            <a:spAutoFit/>
-          </a:bodyPr>
-          <a:lstStyle/>
-          <a:p>
-            <a:pPr algn="l">
-              <a:lnSpc>
-                <a:spcPct val="125000"/>
-              </a:lnSpc>
-              <a:spcAft>
-                <a:spcPts val="300"/>
-              </a:spcAft>
-            </a:pPr>
-            <a:r>
-              <a:rPr sz="1200" b="0">
-                <a:solidFill>
-                  <a:srgbClr val="16213E"/>
-                </a:solidFill>
-                <a:latin typeface="Arial"/>
-              </a:rPr>
-              <a:t>A private data path for SCADA, feeder automation and substations</a:t>
-            </a:r>
-          </a:p>
-        </p:txBody>
-      </p:sp>
-      <p:sp>
-        <p:nvSpPr>
-          <p:cNvPr id="25" name="Oval 24"/>
-          <p:cNvSpPr/>
-          <p:nvPr/>
-        </p:nvSpPr>
-        <p:spPr>
-          <a:xfrm>
-            <a:off x="5969000" y="3962400"/>
-            <a:ext cx="279400" cy="279400"/>
-          </a:xfrm>
-          <a:prstGeom prst="ellipse">
-            <a:avLst/>
-          </a:prstGeom>
-          <a:solidFill>
-            <a:srgbClr val="0B308E"/>
-          </a:solidFill>
-          <a:ln>
-            <a:noFill/>
-          </a:ln>
-          <a:effectLst/>
-        </p:spPr>
-        <p:style>
-          <a:lnRef idx="1">
-            <a:schemeClr val="accent1"/>
-          </a:lnRef>
-          <a:fillRef idx="3">
-            <a:schemeClr val="accent1"/>
-          </a:fillRef>
-          <a:effectRef idx="2">
-            <a:schemeClr val="accent1"/>
-          </a:effectRef>
-          <a:fontRef idx="minor">
-            <a:schemeClr val="lt1"/>
-          </a:fontRef>
-        </p:style>
-        <p:txBody>
-          <a:bodyPr rtlCol="0" anchor="ctr" wrap="square"/>
-          <a:lstStyle/>
-          <a:p>
-            <a:pPr algn="ctr"/>
-          </a:p>
-        </p:txBody>
-      </p:sp>
-      <p:sp>
-        <p:nvSpPr>
-          <p:cNvPr id="26" name="TextBox 25"/>
-          <p:cNvSpPr txBox="1"/>
-          <p:nvPr/>
-        </p:nvSpPr>
-        <p:spPr>
-          <a:xfrm>
-            <a:off x="5969000" y="3962400"/>
-            <a:ext cx="279400" cy="279400"/>
-          </a:xfrm>
-          <a:prstGeom prst="rect">
-            <a:avLst/>
-          </a:prstGeom>
-          <a:noFill/>
-        </p:spPr>
-        <p:txBody>
-          <a:bodyPr wrap="square" lIns="0" rIns="0" tIns="0" bIns="0" anchor="ctr">
-            <a:spAutoFit/>
-          </a:bodyPr>
-          <a:lstStyle/>
-          <a:p>
-            <a:pPr algn="ctr">
-              <a:lnSpc>
-                <a:spcPct val="125000"/>
-              </a:lnSpc>
-              <a:spcAft>
-                <a:spcPts val="300"/>
-              </a:spcAft>
-            </a:pPr>
-            <a:r>
-              <a:rPr sz="1000" b="1">
-                <a:solidFill>
-                  <a:srgbClr val="FFFFFF"/>
-                </a:solidFill>
-                <a:latin typeface="Arial"/>
-              </a:rPr>
-              <a:t>2</a:t>
-            </a:r>
-          </a:p>
-        </p:txBody>
-      </p:sp>
-      <p:sp>
-        <p:nvSpPr>
-          <p:cNvPr id="27" name="TextBox 26"/>
-          <p:cNvSpPr txBox="1"/>
-          <p:nvPr/>
-        </p:nvSpPr>
-        <p:spPr>
-          <a:xfrm>
-            <a:off x="6400800" y="3975100"/>
-            <a:ext cx="5181600" cy="304800"/>
-          </a:xfrm>
-          <a:prstGeom prst="rect">
-            <a:avLst/>
-          </a:prstGeom>
-          <a:noFill/>
-        </p:spPr>
-        <p:txBody>
-          <a:bodyPr wrap="square" lIns="0" rIns="0" tIns="0" bIns="0" anchor="t">
-            <a:spAutoFit/>
-          </a:bodyPr>
-          <a:lstStyle/>
-          <a:p>
-            <a:pPr algn="l">
-              <a:lnSpc>
-                <a:spcPct val="125000"/>
-              </a:lnSpc>
-              <a:spcAft>
-                <a:spcPts val="300"/>
-              </a:spcAft>
-            </a:pPr>
-            <a:r>
-              <a:rPr sz="1200" b="0">
-                <a:solidFill>
-                  <a:srgbClr val="16213E"/>
-                </a:solidFill>
-                <a:latin typeface="Arial"/>
-              </a:rPr>
-              <a:t>Push-to-talk, video and lone-worker alarms for line crews</a:t>
-            </a:r>
-          </a:p>
-        </p:txBody>
-      </p:sp>
-      <p:sp>
-        <p:nvSpPr>
-          <p:cNvPr id="28" name="Oval 27"/>
-          <p:cNvSpPr/>
-          <p:nvPr/>
-        </p:nvSpPr>
-        <p:spPr>
-          <a:xfrm>
-            <a:off x="5969000" y="4343400"/>
-            <a:ext cx="279400" cy="279400"/>
-          </a:xfrm>
-          <a:prstGeom prst="ellipse">
-            <a:avLst/>
-          </a:prstGeom>
-          <a:solidFill>
-            <a:srgbClr val="0B308E"/>
-          </a:solidFill>
-          <a:ln>
-            <a:noFill/>
-          </a:ln>
-          <a:effectLst/>
-        </p:spPr>
-        <p:style>
-          <a:lnRef idx="1">
-            <a:schemeClr val="accent1"/>
-          </a:lnRef>
-          <a:fillRef idx="3">
-            <a:schemeClr val="accent1"/>
-          </a:fillRef>
-          <a:effectRef idx="2">
-            <a:schemeClr val="accent1"/>
-          </a:effectRef>
-          <a:fontRef idx="minor">
-            <a:schemeClr val="lt1"/>
-          </a:fontRef>
-        </p:style>
-        <p:txBody>
-          <a:bodyPr rtlCol="0" anchor="ctr" wrap="square"/>
-          <a:lstStyle/>
-          <a:p>
-            <a:pPr algn="ctr"/>
-          </a:p>
-        </p:txBody>
-      </p:sp>
-      <p:sp>
-        <p:nvSpPr>
-          <p:cNvPr id="29" name="TextBox 28"/>
-          <p:cNvSpPr txBox="1"/>
-          <p:nvPr/>
-        </p:nvSpPr>
-        <p:spPr>
-          <a:xfrm>
-            <a:off x="5969000" y="4343400"/>
-            <a:ext cx="279400" cy="279400"/>
-          </a:xfrm>
-          <a:prstGeom prst="rect">
-            <a:avLst/>
-          </a:prstGeom>
-          <a:noFill/>
-        </p:spPr>
-        <p:txBody>
-          <a:bodyPr wrap="square" lIns="0" rIns="0" tIns="0" bIns="0" anchor="ctr">
-            <a:spAutoFit/>
-          </a:bodyPr>
-          <a:lstStyle/>
-          <a:p>
-            <a:pPr algn="ctr">
-              <a:lnSpc>
-                <a:spcPct val="125000"/>
-              </a:lnSpc>
-              <a:spcAft>
-                <a:spcPts val="300"/>
-              </a:spcAft>
-            </a:pPr>
-            <a:r>
-              <a:rPr sz="1000" b="1">
-                <a:solidFill>
-                  <a:srgbClr val="FFFFFF"/>
-                </a:solidFill>
-                <a:latin typeface="Arial"/>
-              </a:rPr>
-              <a:t>3</a:t>
-            </a:r>
-          </a:p>
-        </p:txBody>
-      </p:sp>
-      <p:sp>
-        <p:nvSpPr>
-          <p:cNvPr id="30" name="TextBox 29"/>
-          <p:cNvSpPr txBox="1"/>
-          <p:nvPr/>
-        </p:nvSpPr>
-        <p:spPr>
-          <a:xfrm>
-            <a:off x="6400800" y="4356100"/>
-            <a:ext cx="5181600" cy="304800"/>
-          </a:xfrm>
-          <a:prstGeom prst="rect">
-            <a:avLst/>
-          </a:prstGeom>
-          <a:noFill/>
-        </p:spPr>
-        <p:txBody>
-          <a:bodyPr wrap="square" lIns="0" rIns="0" tIns="0" bIns="0" anchor="t">
-            <a:spAutoFit/>
-          </a:bodyPr>
-          <a:lstStyle/>
-          <a:p>
-            <a:pPr algn="l">
-              <a:lnSpc>
-                <a:spcPct val="125000"/>
-              </a:lnSpc>
-              <a:spcAft>
-                <a:spcPts val="300"/>
-              </a:spcAft>
-            </a:pPr>
-            <a:r>
-              <a:rPr sz="1200" b="0">
-                <a:solidFill>
-                  <a:srgbClr val="16213E"/>
-                </a:solidFill>
-                <a:latin typeface="Arial"/>
-              </a:rPr>
-              <a:t>Smart meters on the same sites, reaching boxes deep indoors</a:t>
-            </a:r>
-          </a:p>
-        </p:txBody>
-      </p:sp>
-      <p:sp>
-        <p:nvSpPr>
-          <p:cNvPr id="31" name="Rectangle 30"/>
-          <p:cNvSpPr/>
-          <p:nvPr/>
-        </p:nvSpPr>
-        <p:spPr>
-          <a:xfrm>
-            <a:off x="609600" y="4978400"/>
-            <a:ext cx="5410200" cy="1219200"/>
+            <a:off x="9652000" y="3175000"/>
+            <a:ext cx="1828800" cy="1549400"/>
           </a:xfrm>
           <a:prstGeom prst="rect">
             <a:avLst/>
@@ -12974,22 +13209,107 @@
           </a:p>
         </p:txBody>
       </p:sp>
-      <p:sp>
-        <p:nvSpPr>
-          <p:cNvPr id="32" name="Rectangle 31"/>
+      <p:pic>
+        <p:nvPicPr>
+          <p:cNvPr id="27" name="Picture 26" descr="gauge_navy.png"/>
+          <p:cNvPicPr>
+            <a:picLocks noChangeAspect="1"/>
+          </p:cNvPicPr>
+          <p:nvPr/>
+        </p:nvPicPr>
+        <p:blipFill>
+          <a:blip r:embed="rId6"/>
+          <a:stretch>
+            <a:fillRect/>
+          </a:stretch>
+        </p:blipFill>
+        <p:spPr>
+          <a:xfrm>
+            <a:off x="9855200" y="3352800"/>
+            <a:ext cx="431800" cy="431800"/>
+          </a:xfrm>
+          <a:prstGeom prst="rect">
+            <a:avLst/>
+          </a:prstGeom>
+        </p:spPr>
+      </p:pic>
+      <p:sp>
+        <p:nvSpPr>
+          <p:cNvPr id="28" name="TextBox 27"/>
+          <p:cNvSpPr txBox="1"/>
+          <p:nvPr/>
+        </p:nvSpPr>
+        <p:spPr>
+          <a:xfrm>
+            <a:off x="9855200" y="3962400"/>
+            <a:ext cx="1524000" cy="635000"/>
+          </a:xfrm>
+          <a:prstGeom prst="rect">
+            <a:avLst/>
+          </a:prstGeom>
+          <a:noFill/>
+        </p:spPr>
+        <p:txBody>
+          <a:bodyPr wrap="square" lIns="0" rIns="0" tIns="0" bIns="0" anchor="t">
+            <a:spAutoFit/>
+          </a:bodyPr>
+          <a:lstStyle/>
+          <a:p>
+            <a:pPr algn="l">
+              <a:lnSpc>
+                <a:spcPct val="115000"/>
+              </a:lnSpc>
+              <a:spcAft>
+                <a:spcPts val="0"/>
+              </a:spcAft>
+            </a:pPr>
+            <a:r>
+              <a:rPr sz="1250" b="0">
+                <a:solidFill>
+                  <a:srgbClr val="0B308E"/>
+                </a:solidFill>
+                <a:latin typeface="Segoe UI Semibold"/>
+              </a:rPr>
+              <a:t>Smart meters,</a:t>
+            </a:r>
+          </a:p>
+          <a:p>
+            <a:pPr algn="l">
+              <a:lnSpc>
+                <a:spcPct val="115000"/>
+              </a:lnSpc>
+              <a:spcAft>
+                <a:spcPts val="0"/>
+              </a:spcAft>
+            </a:pPr>
+            <a:r>
+              <a:rPr sz="1250" b="0">
+                <a:solidFill>
+                  <a:srgbClr val="0B308E"/>
+                </a:solidFill>
+                <a:latin typeface="Segoe UI Semibold"/>
+              </a:rPr>
+              <a:t>deep indoors</a:t>
+            </a:r>
+          </a:p>
+        </p:txBody>
+      </p:sp>
+      <p:sp>
+        <p:nvSpPr>
+          <p:cNvPr id="29" name="Rectangle 28"/>
           <p:cNvSpPr/>
           <p:nvPr/>
         </p:nvSpPr>
         <p:spPr>
           <a:xfrm>
-            <a:off x="609600" y="4978400"/>
-            <a:ext cx="5410200" cy="50800"/>
+            <a:off x="609600" y="5029200"/>
+            <a:ext cx="5308600" cy="1270000"/>
           </a:xfrm>
           <a:prstGeom prst="rect">
             <a:avLst/>
           </a:prstGeom>
           <a:solidFill>
-            <a:srgbClr val="0B308E"/>
+            <a:srgbClr val="EEF2F9"/>
           </a:solidFill>
           <a:ln>
             <a:noFill/>
@@ -13018,16 +13338,40 @@
           </a:p>
         </p:txBody>
       </p:sp>
-      <p:sp>
-        <p:nvSpPr>
-          <p:cNvPr id="33" name="TextBox 32"/>
+      <p:pic>
+        <p:nvPicPr>
+          <p:cNvPr id="30" name="Picture 29" descr="badge-check_navy.png"/>
+          <p:cNvPicPr>
+            <a:picLocks noChangeAspect="1"/>
+          </p:cNvPicPr>
+          <p:nvPr/>
+        </p:nvPicPr>
+        <p:blipFill>
+          <a:blip r:embed="rId7"/>
+          <a:stretch>
+            <a:fillRect/>
+          </a:stretch>
+        </p:blipFill>
+        <p:spPr>
+          <a:xfrm>
+            <a:off x="812800" y="5207000"/>
+            <a:ext cx="330200" cy="330200"/>
+          </a:xfrm>
+          <a:prstGeom prst="rect">
+            <a:avLst/>
+          </a:prstGeom>
+        </p:spPr>
+      </p:pic>
+      <p:sp>
+        <p:nvSpPr>
+          <p:cNvPr id="31" name="TextBox 30"/>
           <p:cNvSpPr txBox="1"/>
           <p:nvPr/>
         </p:nvSpPr>
         <p:spPr>
           <a:xfrm>
-            <a:off x="838200" y="5156200"/>
-            <a:ext cx="4953000" cy="177800"/>
+            <a:off x="1270000" y="5283200"/>
+            <a:ext cx="2540000" cy="177800"/>
           </a:xfrm>
           <a:prstGeom prst="rect">
             <a:avLst/>
@@ -13042,18 +13386,18 @@
           <a:p>
             <a:pPr algn="l">
               <a:lnSpc>
-                <a:spcPct val="125000"/>
+                <a:spcPct val="120000"/>
               </a:lnSpc>
               <a:spcAft>
-                <a:spcPts val="300"/>
+                <a:spcPts val="0"/>
               </a:spcAft>
             </a:pPr>
             <a:r>
-              <a:rPr sz="1000" b="1">
+              <a:rPr sz="900" b="0" spc="120">
                 <a:solidFill>
                   <a:srgbClr val="0B308E"/>
                 </a:solidFill>
-                <a:latin typeface="Arial"/>
+                <a:latin typeface="Segoe UI Semibold"/>
               </a:rPr>
               <a:t>PROOF POINT</a:t>
             </a:r>
@@ -13062,14 +13406,14 @@
       </p:sp>
       <p:sp>
         <p:nvSpPr>
-          <p:cNvPr id="34" name="TextBox 33"/>
+          <p:cNvPr id="32" name="TextBox 31"/>
           <p:cNvSpPr txBox="1"/>
           <p:nvPr/>
         </p:nvSpPr>
         <p:spPr>
           <a:xfrm>
-            <a:off x="838200" y="5410200"/>
-            <a:ext cx="4953000" cy="812800"/>
+            <a:off x="838200" y="5638800"/>
+            <a:ext cx="2286000" cy="254000"/>
           </a:xfrm>
           <a:prstGeom prst="rect">
             <a:avLst/>
@@ -13084,34 +13428,160 @@
           <a:p>
             <a:pPr algn="l">
               <a:lnSpc>
-                <a:spcPct val="130000"/>
+                <a:spcPct val="120000"/>
               </a:lnSpc>
               <a:spcAft>
-                <a:spcPts val="300"/>
+                <a:spcPts val="0"/>
               </a:spcAft>
             </a:pPr>
             <a:r>
-              <a:rPr sz="1200" b="0">
+              <a:rPr sz="1250" b="0">
                 <a:solidFill>
-                  <a:srgbClr val="16213E"/>
+                  <a:srgbClr val="0B308E"/>
                 </a:solidFill>
-                <a:latin typeface="Arial"/>
+                <a:latin typeface="Segoe UI Semibold"/>
               </a:rPr>
-              <a:t>Germany: 450connect, Band 72, more than 95% national coverage.  Malaysia: TNB, Band 31, initial deployment in four areas.</a:t>
+              <a:t>Germany  450connect</a:t>
             </a:r>
           </a:p>
         </p:txBody>
       </p:sp>
       <p:sp>
         <p:nvSpPr>
-          <p:cNvPr id="35" name="Rectangle 34"/>
+          <p:cNvPr id="33" name="TextBox 32"/>
+          <p:cNvSpPr txBox="1"/>
+          <p:nvPr/>
+        </p:nvSpPr>
+        <p:spPr>
+          <a:xfrm>
+            <a:off x="3098800" y="5638800"/>
+            <a:ext cx="2667000" cy="254000"/>
+          </a:xfrm>
+          <a:prstGeom prst="rect">
+            <a:avLst/>
+          </a:prstGeom>
+          <a:noFill/>
+        </p:spPr>
+        <p:txBody>
+          <a:bodyPr wrap="square" lIns="0" rIns="0" tIns="0" bIns="0" anchor="t">
+            <a:spAutoFit/>
+          </a:bodyPr>
+          <a:lstStyle/>
+          <a:p>
+            <a:pPr algn="l">
+              <a:lnSpc>
+                <a:spcPct val="120000"/>
+              </a:lnSpc>
+              <a:spcAft>
+                <a:spcPts val="0"/>
+              </a:spcAft>
+            </a:pPr>
+            <a:r>
+              <a:rPr sz="1250" b="0">
+                <a:solidFill>
+                  <a:srgbClr val="55607A"/>
+                </a:solidFill>
+                <a:latin typeface="Segoe UI"/>
+              </a:rPr>
+              <a:t>Band 72  ·  &gt;95% coverage</a:t>
+            </a:r>
+          </a:p>
+        </p:txBody>
+      </p:sp>
+      <p:sp>
+        <p:nvSpPr>
+          <p:cNvPr id="34" name="TextBox 33"/>
+          <p:cNvSpPr txBox="1"/>
+          <p:nvPr/>
+        </p:nvSpPr>
+        <p:spPr>
+          <a:xfrm>
+            <a:off x="838200" y="5943600"/>
+            <a:ext cx="2286000" cy="254000"/>
+          </a:xfrm>
+          <a:prstGeom prst="rect">
+            <a:avLst/>
+          </a:prstGeom>
+          <a:noFill/>
+        </p:spPr>
+        <p:txBody>
+          <a:bodyPr wrap="square" lIns="0" rIns="0" tIns="0" bIns="0" anchor="t">
+            <a:spAutoFit/>
+          </a:bodyPr>
+          <a:lstStyle/>
+          <a:p>
+            <a:pPr algn="l">
+              <a:lnSpc>
+                <a:spcPct val="120000"/>
+              </a:lnSpc>
+              <a:spcAft>
+                <a:spcPts val="0"/>
+              </a:spcAft>
+            </a:pPr>
+            <a:r>
+              <a:rPr sz="1250" b="0">
+                <a:solidFill>
+                  <a:srgbClr val="0B308E"/>
+                </a:solidFill>
+                <a:latin typeface="Segoe UI Semibold"/>
+              </a:rPr>
+              <a:t>Malaysia  TNB</a:t>
+            </a:r>
+          </a:p>
+        </p:txBody>
+      </p:sp>
+      <p:sp>
+        <p:nvSpPr>
+          <p:cNvPr id="35" name="TextBox 34"/>
+          <p:cNvSpPr txBox="1"/>
+          <p:nvPr/>
+        </p:nvSpPr>
+        <p:spPr>
+          <a:xfrm>
+            <a:off x="3098800" y="5943600"/>
+            <a:ext cx="2667000" cy="254000"/>
+          </a:xfrm>
+          <a:prstGeom prst="rect">
+            <a:avLst/>
+          </a:prstGeom>
+          <a:noFill/>
+        </p:spPr>
+        <p:txBody>
+          <a:bodyPr wrap="square" lIns="0" rIns="0" tIns="0" bIns="0" anchor="t">
+            <a:spAutoFit/>
+          </a:bodyPr>
+          <a:lstStyle/>
+          <a:p>
+            <a:pPr algn="l">
+              <a:lnSpc>
+                <a:spcPct val="120000"/>
+              </a:lnSpc>
+              <a:spcAft>
+                <a:spcPts val="0"/>
+              </a:spcAft>
+            </a:pPr>
+            <a:r>
+              <a:rPr sz="1250" b="0">
+                <a:solidFill>
+                  <a:srgbClr val="55607A"/>
+                </a:solidFill>
+                <a:latin typeface="Segoe UI"/>
+              </a:rPr>
+              <a:t>Band 31  ·  4 areas</a:t>
+            </a:r>
+          </a:p>
+        </p:txBody>
+      </p:sp>
+      <p:sp>
+        <p:nvSpPr>
+          <p:cNvPr id="36" name="Rectangle 35"/>
           <p:cNvSpPr/>
           <p:nvPr/>
         </p:nvSpPr>
         <p:spPr>
           <a:xfrm>
-            <a:off x="6172200" y="4978400"/>
-            <a:ext cx="5410200" cy="1219200"/>
+            <a:off x="6273800" y="5029200"/>
+            <a:ext cx="5308600" cy="1270000"/>
           </a:xfrm>
           <a:prstGeom prst="rect">
             <a:avLst/>
@@ -13146,22 +13616,88 @@
           </a:p>
         </p:txBody>
       </p:sp>
-      <p:sp>
-        <p:nvSpPr>
-          <p:cNvPr id="36" name="Rectangle 35"/>
+      <p:pic>
+        <p:nvPicPr>
+          <p:cNvPr id="37" name="Picture 36" descr="hand-coins_green.png"/>
+          <p:cNvPicPr>
+            <a:picLocks noChangeAspect="1"/>
+          </p:cNvPicPr>
+          <p:nvPr/>
+        </p:nvPicPr>
+        <p:blipFill>
+          <a:blip r:embed="rId8"/>
+          <a:stretch>
+            <a:fillRect/>
+          </a:stretch>
+        </p:blipFill>
+        <p:spPr>
+          <a:xfrm>
+            <a:off x="6477000" y="5207000"/>
+            <a:ext cx="330200" cy="330200"/>
+          </a:xfrm>
+          <a:prstGeom prst="rect">
+            <a:avLst/>
+          </a:prstGeom>
+        </p:spPr>
+      </p:pic>
+      <p:sp>
+        <p:nvSpPr>
+          <p:cNvPr id="38" name="TextBox 37"/>
+          <p:cNvSpPr txBox="1"/>
+          <p:nvPr/>
+        </p:nvSpPr>
+        <p:spPr>
+          <a:xfrm>
+            <a:off x="6934200" y="5283200"/>
+            <a:ext cx="2540000" cy="177800"/>
+          </a:xfrm>
+          <a:prstGeom prst="rect">
+            <a:avLst/>
+          </a:prstGeom>
+          <a:noFill/>
+        </p:spPr>
+        <p:txBody>
+          <a:bodyPr wrap="square" lIns="0" rIns="0" tIns="0" bIns="0" anchor="t">
+            <a:spAutoFit/>
+          </a:bodyPr>
+          <a:lstStyle/>
+          <a:p>
+            <a:pPr algn="l">
+              <a:lnSpc>
+                <a:spcPct val="120000"/>
+              </a:lnSpc>
+              <a:spcAft>
+                <a:spcPts val="0"/>
+              </a:spcAft>
+            </a:pPr>
+            <a:r>
+              <a:rPr sz="900" b="0" spc="120">
+                <a:solidFill>
+                  <a:srgbClr val="7F9B00"/>
+                </a:solidFill>
+                <a:latin typeface="Segoe UI Semibold"/>
+              </a:rPr>
+              <a:t>WHAT GLOBE SELLS</a:t>
+            </a:r>
+          </a:p>
+        </p:txBody>
+      </p:sp>
+      <p:sp>
+        <p:nvSpPr>
+          <p:cNvPr id="39" name="Rounded Rectangle 38"/>
           <p:cNvSpPr/>
           <p:nvPr/>
         </p:nvSpPr>
         <p:spPr>
           <a:xfrm>
-            <a:off x="6172200" y="4978400"/>
-            <a:ext cx="5410200" cy="50800"/>
-          </a:xfrm>
-          <a:prstGeom prst="rect">
+            <a:off x="6477000" y="5664200"/>
+            <a:ext cx="1574800" cy="431800"/>
+          </a:xfrm>
+          <a:prstGeom prst="roundRect">
             <a:avLst/>
           </a:prstGeom>
           <a:solidFill>
-            <a:srgbClr val="7F9B00"/>
+            <a:srgbClr val="FFFFFF"/>
           </a:solidFill>
           <a:ln>
             <a:noFill/>
@@ -13192,14 +13728,14 @@
       </p:sp>
       <p:sp>
         <p:nvSpPr>
-          <p:cNvPr id="37" name="TextBox 36"/>
+          <p:cNvPr id="40" name="TextBox 39"/>
           <p:cNvSpPr txBox="1"/>
           <p:nvPr/>
         </p:nvSpPr>
         <p:spPr>
           <a:xfrm>
-            <a:off x="6400800" y="5156200"/>
-            <a:ext cx="4953000" cy="177800"/>
+            <a:off x="6477000" y="5664200"/>
+            <a:ext cx="1574800" cy="431800"/>
           </a:xfrm>
           <a:prstGeom prst="rect">
             <a:avLst/>
@@ -13207,83 +13743,213 @@
           <a:noFill/>
         </p:spPr>
         <p:txBody>
-          <a:bodyPr wrap="square" lIns="0" rIns="0" tIns="0" bIns="0" anchor="t">
+          <a:bodyPr wrap="square" lIns="0" rIns="0" tIns="0" bIns="0" anchor="ctr">
             <a:spAutoFit/>
           </a:bodyPr>
           <a:lstStyle/>
           <a:p>
-            <a:pPr algn="l">
+            <a:pPr algn="ctr">
               <a:lnSpc>
-                <a:spcPct val="125000"/>
+                <a:spcPct val="120000"/>
               </a:lnSpc>
               <a:spcAft>
-                <a:spcPts val="300"/>
-              </a:spcAft>
-            </a:pPr>
-            <a:r>
-              <a:rPr sz="1000" b="1">
-                <a:solidFill>
-                  <a:srgbClr val="7F9B00"/>
-                </a:solidFill>
-                <a:latin typeface="Arial"/>
-              </a:rPr>
-              <a:t>WHAT GLOBE SELLS</a:t>
-            </a:r>
-          </a:p>
-        </p:txBody>
-      </p:sp>
-      <p:sp>
-        <p:nvSpPr>
-          <p:cNvPr id="38" name="TextBox 37"/>
-          <p:cNvSpPr txBox="1"/>
-          <p:nvPr/>
-        </p:nvSpPr>
-        <p:spPr>
-          <a:xfrm>
-            <a:off x="6400800" y="5410200"/>
-            <a:ext cx="4953000" cy="812800"/>
-          </a:xfrm>
-          <a:prstGeom prst="rect">
-            <a:avLst/>
-          </a:prstGeom>
-          <a:noFill/>
-        </p:spPr>
-        <p:txBody>
-          <a:bodyPr wrap="square" lIns="0" rIns="0" tIns="0" bIns="0" anchor="t">
-            <a:spAutoFit/>
-          </a:bodyPr>
-          <a:lstStyle/>
-          <a:p>
-            <a:pPr algn="l">
-              <a:lnSpc>
-                <a:spcPct val="130000"/>
-              </a:lnSpc>
-              <a:spcAft>
-                <a:spcPts val="300"/>
+                <a:spcPts val="0"/>
               </a:spcAft>
             </a:pPr>
             <a:r>
               <a:rPr sz="1200" b="0">
                 <a:solidFill>
-                  <a:srgbClr val="16213E"/>
+                  <a:srgbClr val="7F9B00"/>
                 </a:solidFill>
-                <a:latin typeface="Arial"/>
+                <a:latin typeface="Segoe UI Semibold"/>
               </a:rPr>
-              <a:t>A capacity package for the cooperative, IoT connectivity per meter, and SCADA integration and O&amp;M.</a:t>
+              <a:t>Capacity package</a:t>
             </a:r>
           </a:p>
         </p:txBody>
       </p:sp>
       <p:sp>
         <p:nvSpPr>
-          <p:cNvPr id="39" name="TextBox 38"/>
+          <p:cNvPr id="41" name="Rounded Rectangle 40"/>
+          <p:cNvSpPr/>
+          <p:nvPr/>
+        </p:nvSpPr>
+        <p:spPr>
+          <a:xfrm>
+            <a:off x="8153400" y="5664200"/>
+            <a:ext cx="1574800" cy="431800"/>
+          </a:xfrm>
+          <a:prstGeom prst="roundRect">
+            <a:avLst/>
+          </a:prstGeom>
+          <a:solidFill>
+            <a:srgbClr val="FFFFFF"/>
+          </a:solidFill>
+          <a:ln>
+            <a:noFill/>
+          </a:ln>
+          <a:effectLst/>
+        </p:spPr>
+        <p:style>
+          <a:lnRef idx="1">
+            <a:schemeClr val="accent1"/>
+          </a:lnRef>
+          <a:fillRef idx="3">
+            <a:schemeClr val="accent1"/>
+          </a:fillRef>
+          <a:effectRef idx="2">
+            <a:schemeClr val="accent1"/>
+          </a:effectRef>
+          <a:fontRef idx="minor">
+            <a:schemeClr val="lt1"/>
+          </a:fontRef>
+        </p:style>
+        <p:txBody>
+          <a:bodyPr rtlCol="0" anchor="ctr" wrap="square"/>
+          <a:lstStyle/>
+          <a:p>
+            <a:pPr algn="ctr"/>
+          </a:p>
+        </p:txBody>
+      </p:sp>
+      <p:sp>
+        <p:nvSpPr>
+          <p:cNvPr id="42" name="TextBox 41"/>
           <p:cNvSpPr txBox="1"/>
           <p:nvPr/>
         </p:nvSpPr>
         <p:spPr>
           <a:xfrm>
-            <a:off x="609600" y="6477000"/>
-            <a:ext cx="10972800" cy="177800"/>
+            <a:off x="8153400" y="5664200"/>
+            <a:ext cx="1574800" cy="431800"/>
+          </a:xfrm>
+          <a:prstGeom prst="rect">
+            <a:avLst/>
+          </a:prstGeom>
+          <a:noFill/>
+        </p:spPr>
+        <p:txBody>
+          <a:bodyPr wrap="square" lIns="0" rIns="0" tIns="0" bIns="0" anchor="ctr">
+            <a:spAutoFit/>
+          </a:bodyPr>
+          <a:lstStyle/>
+          <a:p>
+            <a:pPr algn="ctr">
+              <a:lnSpc>
+                <a:spcPct val="120000"/>
+              </a:lnSpc>
+              <a:spcAft>
+                <a:spcPts val="0"/>
+              </a:spcAft>
+            </a:pPr>
+            <a:r>
+              <a:rPr sz="1200" b="0">
+                <a:solidFill>
+                  <a:srgbClr val="7F9B00"/>
+                </a:solidFill>
+                <a:latin typeface="Segoe UI Semibold"/>
+              </a:rPr>
+              <a:t>IoT per meter</a:t>
+            </a:r>
+          </a:p>
+        </p:txBody>
+      </p:sp>
+      <p:sp>
+        <p:nvSpPr>
+          <p:cNvPr id="43" name="Rounded Rectangle 42"/>
+          <p:cNvSpPr/>
+          <p:nvPr/>
+        </p:nvSpPr>
+        <p:spPr>
+          <a:xfrm>
+            <a:off x="9829800" y="5664200"/>
+            <a:ext cx="1574800" cy="431800"/>
+          </a:xfrm>
+          <a:prstGeom prst="roundRect">
+            <a:avLst/>
+          </a:prstGeom>
+          <a:solidFill>
+            <a:srgbClr val="FFFFFF"/>
+          </a:solidFill>
+          <a:ln>
+            <a:noFill/>
+          </a:ln>
+          <a:effectLst/>
+        </p:spPr>
+        <p:style>
+          <a:lnRef idx="1">
+            <a:schemeClr val="accent1"/>
+          </a:lnRef>
+          <a:fillRef idx="3">
+            <a:schemeClr val="accent1"/>
+          </a:fillRef>
+          <a:effectRef idx="2">
+            <a:schemeClr val="accent1"/>
+          </a:effectRef>
+          <a:fontRef idx="minor">
+            <a:schemeClr val="lt1"/>
+          </a:fontRef>
+        </p:style>
+        <p:txBody>
+          <a:bodyPr rtlCol="0" anchor="ctr" wrap="square"/>
+          <a:lstStyle/>
+          <a:p>
+            <a:pPr algn="ctr"/>
+          </a:p>
+        </p:txBody>
+      </p:sp>
+      <p:sp>
+        <p:nvSpPr>
+          <p:cNvPr id="44" name="TextBox 43"/>
+          <p:cNvSpPr txBox="1"/>
+          <p:nvPr/>
+        </p:nvSpPr>
+        <p:spPr>
+          <a:xfrm>
+            <a:off x="9829800" y="5664200"/>
+            <a:ext cx="1574800" cy="431800"/>
+          </a:xfrm>
+          <a:prstGeom prst="rect">
+            <a:avLst/>
+          </a:prstGeom>
+          <a:noFill/>
+        </p:spPr>
+        <p:txBody>
+          <a:bodyPr wrap="square" lIns="0" rIns="0" tIns="0" bIns="0" anchor="ctr">
+            <a:spAutoFit/>
+          </a:bodyPr>
+          <a:lstStyle/>
+          <a:p>
+            <a:pPr algn="ctr">
+              <a:lnSpc>
+                <a:spcPct val="120000"/>
+              </a:lnSpc>
+              <a:spcAft>
+                <a:spcPts val="0"/>
+              </a:spcAft>
+            </a:pPr>
+            <a:r>
+              <a:rPr sz="1200" b="0">
+                <a:solidFill>
+                  <a:srgbClr val="7F9B00"/>
+                </a:solidFill>
+                <a:latin typeface="Segoe UI Semibold"/>
+              </a:rPr>
+              <a:t>SCADA O&amp;M</a:t>
+            </a:r>
+          </a:p>
+        </p:txBody>
+      </p:sp>
+      <p:sp>
+        <p:nvSpPr>
+          <p:cNvPr id="45" name="TextBox 44"/>
+          <p:cNvSpPr txBox="1"/>
+          <p:nvPr/>
+        </p:nvSpPr>
+        <p:spPr>
+          <a:xfrm>
+            <a:off x="609600" y="6502400"/>
+            <a:ext cx="10972800" cy="152400"/>
           </a:xfrm>
           <a:prstGeom prst="rect">
             <a:avLst/>
@@ -13298,18 +13964,18 @@
           <a:p>
             <a:pPr algn="l">
               <a:lnSpc>
-                <a:spcPct val="125000"/>
+                <a:spcPct val="120000"/>
               </a:lnSpc>
               <a:spcAft>
-                <a:spcPts val="300"/>
+                <a:spcPts val="0"/>
               </a:spcAft>
             </a:pPr>
             <a:r>
-              <a:rPr sz="800" b="0">
+              <a:rPr sz="750" b="0">
                 <a:solidFill>
                   <a:srgbClr val="93A0B4"/>
                 </a:solidFill>
-                <a:latin typeface="Arial"/>
+                <a:latin typeface="Segoe UI"/>
               </a:rPr>
               <a:t>Source: NEA; Department of Energy (5 Nov 2025); 450 MHz Alliance, RFI for devices (2025) p5, Annual Global Update (Dec 2025) p8</a:t>
             </a:r>
